--- a/futurdata-thesis/use-cases/Ninja_Coffee_Bar_Single-Serve_System_CF11130_PLICHON_Noé/ninjacoffebar.pptx
+++ b/futurdata-thesis/use-cases/Ninja_Coffee_Bar_Single-Serve_System_CF11130_PLICHON_Noé/ninjacoffebar.pptx
@@ -3168,12 +3168,15 @@
           <a:noFill/>
         </p:spPr>
         <p:txBody>
-          <a:bodyPr wrap="square" lIns="27432" rIns="27432" tIns="27432" bIns="27432" anchor="t">
-            <a:spAutoFit/>
+          <a:bodyPr wrap="square" lIns="12801" rIns="12801" tIns="12801" bIns="12801" anchor="t">
+            <a:normAutofit/>
           </a:bodyPr>
           <a:lstStyle/>
           <a:p>
             <a:pPr algn="l">
+              <a:lnSpc>
+                <a:spcPct val="125000"/>
+              </a:lnSpc>
               <a:spcAft>
                 <a:spcPts val="0"/>
               </a:spcAft>
@@ -3183,7 +3186,7 @@
                 <a:solidFill>
                   <a:srgbClr val="19A7A0"/>
                 </a:solidFill>
-                <a:latin typeface="Aptos"/>
+                <a:latin typeface="Arial"/>
               </a:rPr>
               <a:t>FUTURDATA THESIS</a:t>
             </a:r>
@@ -3208,11 +3211,14 @@
         </p:spPr>
         <p:txBody>
           <a:bodyPr wrap="square" lIns="27432" rIns="27432" tIns="27432" bIns="27432" anchor="t">
-            <a:spAutoFit/>
+            <a:normAutofit/>
           </a:bodyPr>
           <a:lstStyle/>
           <a:p>
             <a:pPr algn="l">
+              <a:lnSpc>
+                <a:spcPct val="125000"/>
+              </a:lnSpc>
               <a:spcAft>
                 <a:spcPts val="0"/>
               </a:spcAft>
@@ -3222,7 +3228,7 @@
                 <a:solidFill>
                   <a:srgbClr val="FFFFFF"/>
                 </a:solidFill>
-                <a:latin typeface="Aptos"/>
+                <a:latin typeface="Arial"/>
               </a:rPr>
               <a:t>Disassembly Guide</a:t>
             </a:r>
@@ -3247,11 +3253,14 @@
         </p:spPr>
         <p:txBody>
           <a:bodyPr wrap="square" lIns="27432" rIns="27432" tIns="27432" bIns="27432" anchor="t">
-            <a:spAutoFit/>
+            <a:normAutofit/>
           </a:bodyPr>
           <a:lstStyle/>
           <a:p>
             <a:pPr algn="l">
+              <a:lnSpc>
+                <a:spcPct val="125000"/>
+              </a:lnSpc>
               <a:spcAft>
                 <a:spcPts val="0"/>
               </a:spcAft>
@@ -3261,9 +3270,10 @@
                 <a:solidFill>
                   <a:srgbClr val="FFFFFF"/>
                 </a:solidFill>
-                <a:latin typeface="Aptos"/>
-              </a:rPr>
-              <a:t>Ninja Coffee Bar Single-Serve System CF111 30</a:t>
+                <a:latin typeface="Arial"/>
+              </a:rPr>
+              <a:t>Ninja Coffee Bar Single-Serve System 
+CF111 30</a:t>
             </a:r>
           </a:p>
         </p:txBody>
@@ -3285,12 +3295,15 @@
           <a:noFill/>
         </p:spPr>
         <p:txBody>
-          <a:bodyPr wrap="square" lIns="27432" rIns="27432" tIns="27432" bIns="27432" anchor="t">
-            <a:spAutoFit/>
+          <a:bodyPr wrap="square" lIns="21945" rIns="21945" tIns="21945" bIns="21945" anchor="t">
+            <a:normAutofit/>
           </a:bodyPr>
           <a:lstStyle/>
           <a:p>
             <a:pPr algn="l">
+              <a:lnSpc>
+                <a:spcPct val="125000"/>
+              </a:lnSpc>
               <a:spcAft>
                 <a:spcPts val="0"/>
               </a:spcAft>
@@ -3300,7 +3313,7 @@
                 <a:solidFill>
                   <a:srgbClr val="C7D4E3"/>
                 </a:solidFill>
-                <a:latin typeface="Aptos"/>
+                <a:latin typeface="Arial"/>
               </a:rPr>
               <a:t>PPTX export • 4 action group(s) • depth: DepthMode.FULL • schema 1.1</a:t>
             </a:r>
@@ -3371,12 +3384,15 @@
           <a:noFill/>
         </p:spPr>
         <p:txBody>
-          <a:bodyPr wrap="square" lIns="27432" rIns="27432" tIns="27432" bIns="27432" anchor="t">
-            <a:spAutoFit/>
+          <a:bodyPr wrap="square" lIns="10972" rIns="10972" tIns="10972" bIns="10972" anchor="t">
+            <a:normAutofit/>
           </a:bodyPr>
           <a:lstStyle/>
           <a:p>
             <a:pPr algn="l">
+              <a:lnSpc>
+                <a:spcPct val="125000"/>
+              </a:lnSpc>
               <a:spcAft>
                 <a:spcPts val="0"/>
               </a:spcAft>
@@ -3386,7 +3402,7 @@
                 <a:solidFill>
                   <a:srgbClr val="FFFFFF"/>
                 </a:solidFill>
-                <a:latin typeface="Aptos"/>
+                <a:latin typeface="Arial"/>
               </a:rPr>
               <a:t>Nominal weight  Unknown</a:t>
             </a:r>
@@ -3458,11 +3474,14 @@
         </p:spPr>
         <p:txBody>
           <a:bodyPr wrap="square" lIns="27432" rIns="27432" tIns="27432" bIns="27432" anchor="ctr">
-            <a:spAutoFit/>
+            <a:normAutofit/>
           </a:bodyPr>
           <a:lstStyle/>
           <a:p>
             <a:pPr algn="ctr">
+              <a:lnSpc>
+                <a:spcPct val="125000"/>
+              </a:lnSpc>
               <a:spcAft>
                 <a:spcPts val="0"/>
               </a:spcAft>
@@ -3472,7 +3491,7 @@
                 <a:solidFill>
                   <a:srgbClr val="7B92AB"/>
                 </a:solidFill>
-                <a:latin typeface="Aptos"/>
+                <a:latin typeface="Arial"/>
               </a:rPr>
               <a:t>PRODUCT
 IMAGE</a:t>
@@ -3497,12 +3516,15 @@
           <a:noFill/>
         </p:spPr>
         <p:txBody>
-          <a:bodyPr wrap="square" lIns="27432" rIns="27432" tIns="27432" bIns="27432" anchor="t">
-            <a:spAutoFit/>
+          <a:bodyPr wrap="square" lIns="6583" rIns="6583" tIns="6583" bIns="6583" anchor="t">
+            <a:normAutofit/>
           </a:bodyPr>
           <a:lstStyle/>
           <a:p>
             <a:pPr algn="l">
+              <a:lnSpc>
+                <a:spcPct val="125000"/>
+              </a:lnSpc>
               <a:spcAft>
                 <a:spcPts val="0"/>
               </a:spcAft>
@@ -3512,7 +3534,7 @@
                 <a:solidFill>
                   <a:srgbClr val="64748B"/>
                 </a:solidFill>
-                <a:latin typeface="Aptos"/>
+                <a:latin typeface="Arial"/>
               </a:rPr>
               <a:t>Ninja Coffee Bar Single-Serve System CF111 30</a:t>
             </a:r>
@@ -3536,12 +3558,15 @@
           <a:noFill/>
         </p:spPr>
         <p:txBody>
-          <a:bodyPr wrap="square" lIns="27432" rIns="27432" tIns="27432" bIns="27432" anchor="t">
-            <a:spAutoFit/>
+          <a:bodyPr wrap="square" lIns="6583" rIns="6583" tIns="6583" bIns="6583" anchor="t">
+            <a:normAutofit/>
           </a:bodyPr>
           <a:lstStyle/>
           <a:p>
             <a:pPr algn="r">
+              <a:lnSpc>
+                <a:spcPct val="125000"/>
+              </a:lnSpc>
               <a:spcAft>
                 <a:spcPts val="0"/>
               </a:spcAft>
@@ -3551,7 +3576,7 @@
                 <a:solidFill>
                   <a:srgbClr val="64748B"/>
                 </a:solidFill>
-                <a:latin typeface="Aptos"/>
+                <a:latin typeface="Arial"/>
               </a:rPr>
               <a:t>1 / 11</a:t>
             </a:r>
@@ -3601,12 +3626,15 @@
           <a:noFill/>
         </p:spPr>
         <p:txBody>
-          <a:bodyPr wrap="square" lIns="27432" rIns="27432" tIns="27432" bIns="27432" anchor="t">
-            <a:spAutoFit/>
+          <a:bodyPr wrap="square" lIns="10241" rIns="10241" tIns="10241" bIns="10241" anchor="t">
+            <a:normAutofit/>
           </a:bodyPr>
           <a:lstStyle/>
           <a:p>
             <a:pPr algn="l">
+              <a:lnSpc>
+                <a:spcPct val="125000"/>
+              </a:lnSpc>
               <a:spcAft>
                 <a:spcPts val="0"/>
               </a:spcAft>
@@ -3616,7 +3644,7 @@
                 <a:solidFill>
                   <a:srgbClr val="19A7A0"/>
                 </a:solidFill>
-                <a:latin typeface="Aptos"/>
+                <a:latin typeface="Arial"/>
               </a:rPr>
               <a:t>ACTION GROUP 4</a:t>
             </a:r>
@@ -3640,12 +3668,15 @@
           <a:noFill/>
         </p:spPr>
         <p:txBody>
-          <a:bodyPr wrap="square" lIns="27432" rIns="27432" tIns="27432" bIns="27432" anchor="t">
-            <a:spAutoFit/>
+          <a:bodyPr wrap="square" lIns="20116" rIns="20116" tIns="20116" bIns="20116" anchor="t">
+            <a:normAutofit/>
           </a:bodyPr>
           <a:lstStyle/>
           <a:p>
             <a:pPr algn="l">
+              <a:lnSpc>
+                <a:spcPct val="125000"/>
+              </a:lnSpc>
               <a:spcAft>
                 <a:spcPts val="0"/>
               </a:spcAft>
@@ -3655,7 +3686,7 @@
                 <a:solidFill>
                   <a:srgbClr val="14213D"/>
                 </a:solidFill>
-                <a:latin typeface="Aptos"/>
+                <a:latin typeface="Arial"/>
               </a:rPr>
               <a:t>Remove power cable</a:t>
             </a:r>
@@ -3679,12 +3710,15 @@
           <a:noFill/>
         </p:spPr>
         <p:txBody>
-          <a:bodyPr wrap="square" lIns="27432" rIns="27432" tIns="27432" bIns="27432" anchor="t">
-            <a:spAutoFit/>
+          <a:bodyPr wrap="square" lIns="16459" rIns="16459" tIns="16459" bIns="16459" anchor="t">
+            <a:normAutofit/>
           </a:bodyPr>
           <a:lstStyle/>
           <a:p>
             <a:pPr algn="l">
+              <a:lnSpc>
+                <a:spcPct val="125000"/>
+              </a:lnSpc>
               <a:spcAft>
                 <a:spcPts val="0"/>
               </a:spcAft>
@@ -3694,7 +3728,7 @@
                 <a:solidFill>
                   <a:srgbClr val="64748B"/>
                 </a:solidFill>
-                <a:latin typeface="Aptos"/>
+                <a:latin typeface="Arial"/>
               </a:rPr>
               <a:t>Atomic actions are grouped under their parent disassembly operation.</a:t>
             </a:r>
@@ -3765,12 +3799,15 @@
           <a:noFill/>
         </p:spPr>
         <p:txBody>
-          <a:bodyPr wrap="square" lIns="27432" rIns="27432" tIns="27432" bIns="27432" anchor="t">
-            <a:spAutoFit/>
+          <a:bodyPr wrap="square" lIns="8046" rIns="8046" tIns="8046" bIns="8046" anchor="t">
+            <a:normAutofit/>
           </a:bodyPr>
           <a:lstStyle/>
           <a:p>
             <a:pPr algn="l">
+              <a:lnSpc>
+                <a:spcPct val="125000"/>
+              </a:lnSpc>
               <a:spcAft>
                 <a:spcPts val="0"/>
               </a:spcAft>
@@ -3780,7 +3817,7 @@
                 <a:solidFill>
                   <a:srgbClr val="14213D"/>
                 </a:solidFill>
-                <a:latin typeface="Aptos"/>
+                <a:latin typeface="Arial"/>
               </a:rPr>
               <a:t>Source: Component (Unknown)</a:t>
             </a:r>
@@ -3804,12 +3841,15 @@
           <a:noFill/>
         </p:spPr>
         <p:txBody>
-          <a:bodyPr wrap="square" lIns="27432" rIns="27432" tIns="27432" bIns="27432" anchor="t">
-            <a:spAutoFit/>
+          <a:bodyPr wrap="square" lIns="8046" rIns="8046" tIns="8046" bIns="8046" anchor="t">
+            <a:normAutofit/>
           </a:bodyPr>
           <a:lstStyle/>
           <a:p>
             <a:pPr algn="r">
+              <a:lnSpc>
+                <a:spcPct val="125000"/>
+              </a:lnSpc>
               <a:spcAft>
                 <a:spcPts val="0"/>
               </a:spcAft>
@@ -3819,7 +3859,7 @@
                 <a:solidFill>
                   <a:srgbClr val="19A7A0"/>
                 </a:solidFill>
-                <a:latin typeface="Aptos"/>
+                <a:latin typeface="Arial"/>
               </a:rPr>
               <a:t>explicit source</a:t>
             </a:r>
@@ -3890,12 +3930,15 @@
           <a:noFill/>
         </p:spPr>
         <p:txBody>
-          <a:bodyPr wrap="square" lIns="27432" rIns="27432" tIns="27432" bIns="27432" anchor="t">
-            <a:spAutoFit/>
+          <a:bodyPr wrap="square" lIns="9144" rIns="9144" tIns="9144" bIns="9144" anchor="t">
+            <a:normAutofit/>
           </a:bodyPr>
           <a:lstStyle/>
           <a:p>
             <a:pPr algn="l">
+              <a:lnSpc>
+                <a:spcPct val="125000"/>
+              </a:lnSpc>
               <a:spcAft>
                 <a:spcPts val="0"/>
               </a:spcAft>
@@ -3905,7 +3948,7 @@
                 <a:solidFill>
                   <a:srgbClr val="19A7A0"/>
                 </a:solidFill>
-                <a:latin typeface="Aptos"/>
+                <a:latin typeface="Arial"/>
               </a:rPr>
               <a:t>ATOMIC ACTIONS</a:t>
             </a:r>
@@ -3976,12 +4019,15 @@
           <a:noFill/>
         </p:spPr>
         <p:txBody>
-          <a:bodyPr wrap="square" lIns="27432" rIns="27432" tIns="27432" bIns="27432" anchor="ctr">
-            <a:spAutoFit/>
+          <a:bodyPr wrap="square" lIns="10241" rIns="10241" tIns="10241" bIns="10241" anchor="ctr">
+            <a:normAutofit/>
           </a:bodyPr>
           <a:lstStyle/>
           <a:p>
             <a:pPr algn="ctr">
+              <a:lnSpc>
+                <a:spcPct val="125000"/>
+              </a:lnSpc>
               <a:spcAft>
                 <a:spcPts val="0"/>
               </a:spcAft>
@@ -3991,7 +4037,7 @@
                 <a:solidFill>
                   <a:srgbClr val="FFFFFF"/>
                 </a:solidFill>
-                <a:latin typeface="Aptos"/>
+                <a:latin typeface="Arial"/>
               </a:rPr>
               <a:t>1</a:t>
             </a:r>
@@ -4015,12 +4061,15 @@
           <a:noFill/>
         </p:spPr>
         <p:txBody>
-          <a:bodyPr wrap="square" lIns="27432" rIns="27432" tIns="27432" bIns="27432" anchor="t">
-            <a:spAutoFit/>
+          <a:bodyPr wrap="square" lIns="19019" rIns="19019" tIns="19019" bIns="19019" anchor="t">
+            <a:normAutofit/>
           </a:bodyPr>
           <a:lstStyle/>
           <a:p>
             <a:pPr algn="l">
+              <a:lnSpc>
+                <a:spcPct val="125000"/>
+              </a:lnSpc>
               <a:spcAft>
                 <a:spcPts val="0"/>
               </a:spcAft>
@@ -4030,7 +4079,7 @@
                 <a:solidFill>
                   <a:srgbClr val="14213D"/>
                 </a:solidFill>
-                <a:latin typeface="Aptos"/>
+                <a:latin typeface="Arial"/>
               </a:rPr>
               <a:t>Remove six crews from the bottom of the unit</a:t>
             </a:r>
@@ -4101,12 +4150,15 @@
           <a:noFill/>
         </p:spPr>
         <p:txBody>
-          <a:bodyPr wrap="square" lIns="27432" rIns="27432" tIns="27432" bIns="27432" anchor="ctr">
-            <a:spAutoFit/>
+          <a:bodyPr wrap="square" lIns="10241" rIns="10241" tIns="10241" bIns="10241" anchor="ctr">
+            <a:normAutofit/>
           </a:bodyPr>
           <a:lstStyle/>
           <a:p>
             <a:pPr algn="ctr">
+              <a:lnSpc>
+                <a:spcPct val="125000"/>
+              </a:lnSpc>
               <a:spcAft>
                 <a:spcPts val="0"/>
               </a:spcAft>
@@ -4116,7 +4168,7 @@
                 <a:solidFill>
                   <a:srgbClr val="FFFFFF"/>
                 </a:solidFill>
-                <a:latin typeface="Aptos"/>
+                <a:latin typeface="Arial"/>
               </a:rPr>
               <a:t>2</a:t>
             </a:r>
@@ -4140,12 +4192,15 @@
           <a:noFill/>
         </p:spPr>
         <p:txBody>
-          <a:bodyPr wrap="square" lIns="27432" rIns="27432" tIns="27432" bIns="27432" anchor="t">
-            <a:spAutoFit/>
+          <a:bodyPr wrap="square" lIns="19019" rIns="19019" tIns="19019" bIns="19019" anchor="t">
+            <a:normAutofit/>
           </a:bodyPr>
           <a:lstStyle/>
           <a:p>
             <a:pPr algn="l">
+              <a:lnSpc>
+                <a:spcPct val="125000"/>
+              </a:lnSpc>
               <a:spcAft>
                 <a:spcPts val="0"/>
               </a:spcAft>
@@ -4155,7 +4210,7 @@
                 <a:solidFill>
                   <a:srgbClr val="14213D"/>
                 </a:solidFill>
-                <a:latin typeface="Aptos"/>
+                <a:latin typeface="Arial"/>
               </a:rPr>
               <a:t>Remove the bottom cover</a:t>
             </a:r>
@@ -4226,12 +4281,15 @@
           <a:noFill/>
         </p:spPr>
         <p:txBody>
-          <a:bodyPr wrap="square" lIns="27432" rIns="27432" tIns="27432" bIns="27432" anchor="ctr">
-            <a:spAutoFit/>
+          <a:bodyPr wrap="square" lIns="10241" rIns="10241" tIns="10241" bIns="10241" anchor="ctr">
+            <a:normAutofit/>
           </a:bodyPr>
           <a:lstStyle/>
           <a:p>
             <a:pPr algn="ctr">
+              <a:lnSpc>
+                <a:spcPct val="125000"/>
+              </a:lnSpc>
               <a:spcAft>
                 <a:spcPts val="0"/>
               </a:spcAft>
@@ -4241,7 +4299,7 @@
                 <a:solidFill>
                   <a:srgbClr val="FFFFFF"/>
                 </a:solidFill>
-                <a:latin typeface="Aptos"/>
+                <a:latin typeface="Arial"/>
               </a:rPr>
               <a:t>3</a:t>
             </a:r>
@@ -4265,12 +4323,15 @@
           <a:noFill/>
         </p:spPr>
         <p:txBody>
-          <a:bodyPr wrap="square" lIns="27432" rIns="27432" tIns="27432" bIns="27432" anchor="t">
-            <a:spAutoFit/>
+          <a:bodyPr wrap="square" lIns="19019" rIns="19019" tIns="19019" bIns="19019" anchor="t">
+            <a:normAutofit/>
           </a:bodyPr>
           <a:lstStyle/>
           <a:p>
             <a:pPr algn="l">
+              <a:lnSpc>
+                <a:spcPct val="125000"/>
+              </a:lnSpc>
               <a:spcAft>
                 <a:spcPts val="0"/>
               </a:spcAft>
@@ -4280,7 +4341,7 @@
                 <a:solidFill>
                   <a:srgbClr val="14213D"/>
                 </a:solidFill>
-                <a:latin typeface="Aptos"/>
+                <a:latin typeface="Arial"/>
               </a:rPr>
               <a:t>loosen two screws</a:t>
             </a:r>
@@ -4351,12 +4412,15 @@
           <a:noFill/>
         </p:spPr>
         <p:txBody>
-          <a:bodyPr wrap="square" lIns="27432" rIns="27432" tIns="27432" bIns="27432" anchor="ctr">
-            <a:spAutoFit/>
+          <a:bodyPr wrap="square" lIns="10241" rIns="10241" tIns="10241" bIns="10241" anchor="ctr">
+            <a:normAutofit/>
           </a:bodyPr>
           <a:lstStyle/>
           <a:p>
             <a:pPr algn="ctr">
+              <a:lnSpc>
+                <a:spcPct val="125000"/>
+              </a:lnSpc>
               <a:spcAft>
                 <a:spcPts val="0"/>
               </a:spcAft>
@@ -4366,7 +4430,7 @@
                 <a:solidFill>
                   <a:srgbClr val="FFFFFF"/>
                 </a:solidFill>
-                <a:latin typeface="Aptos"/>
+                <a:latin typeface="Arial"/>
               </a:rPr>
               <a:t>4</a:t>
             </a:r>
@@ -4390,12 +4454,15 @@
           <a:noFill/>
         </p:spPr>
         <p:txBody>
-          <a:bodyPr wrap="square" lIns="27432" rIns="27432" tIns="27432" bIns="27432" anchor="t">
-            <a:spAutoFit/>
+          <a:bodyPr wrap="square" lIns="19019" rIns="19019" tIns="19019" bIns="19019" anchor="t">
+            <a:normAutofit/>
           </a:bodyPr>
           <a:lstStyle/>
           <a:p>
             <a:pPr algn="l">
+              <a:lnSpc>
+                <a:spcPct val="125000"/>
+              </a:lnSpc>
               <a:spcAft>
                 <a:spcPts val="0"/>
               </a:spcAft>
@@ -4405,7 +4472,7 @@
                 <a:solidFill>
                   <a:srgbClr val="14213D"/>
                 </a:solidFill>
-                <a:latin typeface="Aptos"/>
+                <a:latin typeface="Arial"/>
               </a:rPr>
               <a:t>remove clamp holding power cable</a:t>
             </a:r>
@@ -4476,12 +4543,15 @@
           <a:noFill/>
         </p:spPr>
         <p:txBody>
-          <a:bodyPr wrap="square" lIns="27432" rIns="27432" tIns="27432" bIns="27432" anchor="ctr">
-            <a:spAutoFit/>
+          <a:bodyPr wrap="square" lIns="10241" rIns="10241" tIns="10241" bIns="10241" anchor="ctr">
+            <a:normAutofit/>
           </a:bodyPr>
           <a:lstStyle/>
           <a:p>
             <a:pPr algn="ctr">
+              <a:lnSpc>
+                <a:spcPct val="125000"/>
+              </a:lnSpc>
               <a:spcAft>
                 <a:spcPts val="0"/>
               </a:spcAft>
@@ -4491,7 +4561,7 @@
                 <a:solidFill>
                   <a:srgbClr val="FFFFFF"/>
                 </a:solidFill>
-                <a:latin typeface="Aptos"/>
+                <a:latin typeface="Arial"/>
               </a:rPr>
               <a:t>5</a:t>
             </a:r>
@@ -4515,12 +4585,15 @@
           <a:noFill/>
         </p:spPr>
         <p:txBody>
-          <a:bodyPr wrap="square" lIns="27432" rIns="27432" tIns="27432" bIns="27432" anchor="t">
-            <a:spAutoFit/>
+          <a:bodyPr wrap="square" lIns="19019" rIns="19019" tIns="19019" bIns="19019" anchor="t">
+            <a:normAutofit/>
           </a:bodyPr>
           <a:lstStyle/>
           <a:p>
             <a:pPr algn="l">
+              <a:lnSpc>
+                <a:spcPct val="125000"/>
+              </a:lnSpc>
               <a:spcAft>
                 <a:spcPts val="0"/>
               </a:spcAft>
@@ -4530,7 +4603,7 @@
                 <a:solidFill>
                   <a:srgbClr val="14213D"/>
                 </a:solidFill>
-                <a:latin typeface="Aptos"/>
+                <a:latin typeface="Arial"/>
               </a:rPr>
               <a:t>Pull the power cable out</a:t>
             </a:r>
@@ -4601,12 +4674,15 @@
           <a:noFill/>
         </p:spPr>
         <p:txBody>
-          <a:bodyPr wrap="square" lIns="27432" rIns="27432" tIns="27432" bIns="27432" anchor="t">
-            <a:spAutoFit/>
+          <a:bodyPr wrap="square" lIns="8046" rIns="8046" tIns="8046" bIns="8046" anchor="t">
+            <a:normAutofit/>
           </a:bodyPr>
           <a:lstStyle/>
           <a:p>
             <a:pPr algn="l">
+              <a:lnSpc>
+                <a:spcPct val="125000"/>
+              </a:lnSpc>
               <a:spcAft>
                 <a:spcPts val="0"/>
               </a:spcAft>
@@ -4616,7 +4692,7 @@
                 <a:solidFill>
                   <a:srgbClr val="19A7A0"/>
                 </a:solidFill>
-                <a:latin typeface="Aptos"/>
+                <a:latin typeface="Arial"/>
               </a:rPr>
               <a:t>RESULT</a:t>
             </a:r>
@@ -4641,11 +4717,14 @@
         </p:spPr>
         <p:txBody>
           <a:bodyPr wrap="square" lIns="27432" rIns="27432" tIns="27432" bIns="27432" anchor="t">
-            <a:spAutoFit/>
+            <a:normAutofit/>
           </a:bodyPr>
           <a:lstStyle/>
           <a:p>
             <a:pPr algn="l">
+              <a:lnSpc>
+                <a:spcPct val="125000"/>
+              </a:lnSpc>
               <a:spcAft>
                 <a:spcPts val="0"/>
               </a:spcAft>
@@ -4655,9 +4734,9 @@
                 <a:solidFill>
                   <a:srgbClr val="14213D"/>
                 </a:solidFill>
-                <a:latin typeface="Aptos"/>
-              </a:rPr>
-              <a:t>• power cable (Unknown)
+                <a:latin typeface="Arial"/>
+              </a:rPr>
+              <a:t>• Power cable (Unknown)
 • Component (Unknown)</a:t>
             </a:r>
           </a:p>
@@ -4680,12 +4759,15 @@
           <a:noFill/>
         </p:spPr>
         <p:txBody>
-          <a:bodyPr wrap="square" lIns="27432" rIns="27432" tIns="27432" bIns="27432" anchor="t">
-            <a:spAutoFit/>
+          <a:bodyPr wrap="square" lIns="7315" rIns="7315" tIns="7315" bIns="7315" anchor="t">
+            <a:normAutofit/>
           </a:bodyPr>
           <a:lstStyle/>
           <a:p>
             <a:pPr algn="l">
+              <a:lnSpc>
+                <a:spcPct val="125000"/>
+              </a:lnSpc>
               <a:spcAft>
                 <a:spcPts val="0"/>
               </a:spcAft>
@@ -4695,7 +4777,7 @@
                 <a:solidFill>
                   <a:srgbClr val="19A7A0"/>
                 </a:solidFill>
-                <a:latin typeface="Aptos"/>
+                <a:latin typeface="Arial"/>
               </a:rPr>
               <a:t>CONTINUES AS</a:t>
             </a:r>
@@ -4719,12 +4801,15 @@
           <a:noFill/>
         </p:spPr>
         <p:txBody>
-          <a:bodyPr wrap="square" lIns="27432" rIns="27432" tIns="27432" bIns="27432" anchor="t">
-            <a:spAutoFit/>
+          <a:bodyPr wrap="square" lIns="15361" rIns="15361" tIns="15361" bIns="15361" anchor="t">
+            <a:normAutofit/>
           </a:bodyPr>
           <a:lstStyle/>
           <a:p>
             <a:pPr algn="l">
+              <a:lnSpc>
+                <a:spcPct val="125000"/>
+              </a:lnSpc>
               <a:spcAft>
                 <a:spcPts val="0"/>
               </a:spcAft>
@@ -4734,7 +4819,7 @@
                 <a:solidFill>
                   <a:srgbClr val="14213D"/>
                 </a:solidFill>
-                <a:latin typeface="Aptos"/>
+                <a:latin typeface="Arial"/>
               </a:rPr>
               <a:t>End of this branch</a:t>
             </a:r>
@@ -4758,12 +4843,15 @@
           <a:noFill/>
         </p:spPr>
         <p:txBody>
-          <a:bodyPr wrap="square" lIns="27432" rIns="27432" tIns="27432" bIns="27432" anchor="t">
-            <a:spAutoFit/>
+          <a:bodyPr wrap="square" lIns="7315" rIns="7315" tIns="7315" bIns="7315" anchor="t">
+            <a:normAutofit/>
           </a:bodyPr>
           <a:lstStyle/>
           <a:p>
             <a:pPr algn="l">
+              <a:lnSpc>
+                <a:spcPct val="125000"/>
+              </a:lnSpc>
               <a:spcAft>
                 <a:spcPts val="0"/>
               </a:spcAft>
@@ -4773,7 +4861,7 @@
                 <a:solidFill>
                   <a:srgbClr val="19A7A0"/>
                 </a:solidFill>
-                <a:latin typeface="Aptos"/>
+                <a:latin typeface="Arial"/>
               </a:rPr>
               <a:t>TOOLS</a:t>
             </a:r>
@@ -4797,12 +4885,15 @@
           <a:noFill/>
         </p:spPr>
         <p:txBody>
-          <a:bodyPr wrap="square" lIns="27432" rIns="27432" tIns="27432" bIns="27432" anchor="t">
-            <a:spAutoFit/>
+          <a:bodyPr wrap="square" lIns="16459" rIns="16459" tIns="16459" bIns="16459" anchor="t">
+            <a:normAutofit/>
           </a:bodyPr>
           <a:lstStyle/>
           <a:p>
             <a:pPr algn="l">
+              <a:lnSpc>
+                <a:spcPct val="125000"/>
+              </a:lnSpc>
               <a:spcAft>
                 <a:spcPts val="0"/>
               </a:spcAft>
@@ -4812,7 +4903,7 @@
                 <a:solidFill>
                   <a:srgbClr val="14213D"/>
                 </a:solidFill>
-                <a:latin typeface="Aptos"/>
+                <a:latin typeface="Arial"/>
               </a:rPr>
               <a:t>No tools specified</a:t>
             </a:r>
@@ -4836,12 +4927,15 @@
           <a:noFill/>
         </p:spPr>
         <p:txBody>
-          <a:bodyPr wrap="square" lIns="27432" rIns="27432" tIns="27432" bIns="27432" anchor="t">
-            <a:spAutoFit/>
+          <a:bodyPr wrap="square" lIns="6583" rIns="6583" tIns="6583" bIns="6583" anchor="t">
+            <a:normAutofit/>
           </a:bodyPr>
           <a:lstStyle/>
           <a:p>
             <a:pPr algn="l">
+              <a:lnSpc>
+                <a:spcPct val="125000"/>
+              </a:lnSpc>
               <a:spcAft>
                 <a:spcPts val="0"/>
               </a:spcAft>
@@ -4851,7 +4945,7 @@
                 <a:solidFill>
                   <a:srgbClr val="64748B"/>
                 </a:solidFill>
-                <a:latin typeface="Aptos"/>
+                <a:latin typeface="Arial"/>
               </a:rPr>
               <a:t>Ninja Coffee Bar Single-Serve System CF111 30</a:t>
             </a:r>
@@ -4875,12 +4969,15 @@
           <a:noFill/>
         </p:spPr>
         <p:txBody>
-          <a:bodyPr wrap="square" lIns="27432" rIns="27432" tIns="27432" bIns="27432" anchor="t">
-            <a:spAutoFit/>
+          <a:bodyPr wrap="square" lIns="6583" rIns="6583" tIns="6583" bIns="6583" anchor="t">
+            <a:normAutofit/>
           </a:bodyPr>
           <a:lstStyle/>
           <a:p>
             <a:pPr algn="r">
+              <a:lnSpc>
+                <a:spcPct val="125000"/>
+              </a:lnSpc>
               <a:spcAft>
                 <a:spcPts val="0"/>
               </a:spcAft>
@@ -4890,7 +4987,7 @@
                 <a:solidFill>
                   <a:srgbClr val="64748B"/>
                 </a:solidFill>
-                <a:latin typeface="Aptos"/>
+                <a:latin typeface="Arial"/>
               </a:rPr>
               <a:t>10 / 11</a:t>
             </a:r>
@@ -4940,12 +5037,15 @@
           <a:noFill/>
         </p:spPr>
         <p:txBody>
-          <a:bodyPr wrap="square" lIns="27432" rIns="27432" tIns="27432" bIns="27432" anchor="t">
-            <a:spAutoFit/>
+          <a:bodyPr wrap="square" lIns="11704" rIns="11704" tIns="11704" bIns="11704" anchor="t">
+            <a:normAutofit/>
           </a:bodyPr>
           <a:lstStyle/>
           <a:p>
             <a:pPr algn="l">
+              <a:lnSpc>
+                <a:spcPct val="125000"/>
+              </a:lnSpc>
               <a:spcAft>
                 <a:spcPts val="0"/>
               </a:spcAft>
@@ -4955,7 +5055,7 @@
                 <a:solidFill>
                   <a:srgbClr val="19A7A0"/>
                 </a:solidFill>
-                <a:latin typeface="Aptos"/>
+                <a:latin typeface="Arial"/>
               </a:rPr>
               <a:t>EXPORT COMPLETE</a:t>
             </a:r>
@@ -4980,11 +5080,14 @@
         </p:spPr>
         <p:txBody>
           <a:bodyPr wrap="square" lIns="27432" rIns="27432" tIns="27432" bIns="27432" anchor="t">
-            <a:spAutoFit/>
+            <a:normAutofit/>
           </a:bodyPr>
           <a:lstStyle/>
           <a:p>
             <a:pPr algn="l">
+              <a:lnSpc>
+                <a:spcPct val="125000"/>
+              </a:lnSpc>
               <a:spcAft>
                 <a:spcPts val="0"/>
               </a:spcAft>
@@ -4994,7 +5097,7 @@
                 <a:solidFill>
                   <a:srgbClr val="FFFFFF"/>
                 </a:solidFill>
-                <a:latin typeface="Aptos"/>
+                <a:latin typeface="Arial"/>
               </a:rPr>
               <a:t>4 action groups prepared</a:t>
             </a:r>
@@ -5019,11 +5122,14 @@
         </p:spPr>
         <p:txBody>
           <a:bodyPr wrap="square" lIns="27432" rIns="27432" tIns="27432" bIns="27432" anchor="t">
-            <a:spAutoFit/>
+            <a:normAutofit/>
           </a:bodyPr>
           <a:lstStyle/>
           <a:p>
             <a:pPr algn="l">
+              <a:lnSpc>
+                <a:spcPct val="125000"/>
+              </a:lnSpc>
               <a:spcAft>
                 <a:spcPts val="0"/>
               </a:spcAft>
@@ -5033,9 +5139,10 @@
                 <a:solidFill>
                   <a:srgbClr val="FFFFFF"/>
                 </a:solidFill>
-                <a:latin typeface="Aptos"/>
-              </a:rPr>
-              <a:t>The PowerPoint remains fully editable: text, tables, images and component information can be revised after export.</a:t>
+                <a:latin typeface="Arial"/>
+              </a:rPr>
+              <a:t>The PowerPoint remains fully editable: text, tables, images and component information 
+can be revised after export.</a:t>
             </a:r>
           </a:p>
         </p:txBody>
@@ -5104,12 +5211,15 @@
           <a:noFill/>
         </p:spPr>
         <p:txBody>
-          <a:bodyPr wrap="square" lIns="27432" rIns="27432" tIns="27432" bIns="27432" anchor="t">
-            <a:spAutoFit/>
+          <a:bodyPr wrap="square" lIns="11704" rIns="11704" tIns="11704" bIns="11704" anchor="t">
+            <a:normAutofit/>
           </a:bodyPr>
           <a:lstStyle/>
           <a:p>
             <a:pPr algn="l">
+              <a:lnSpc>
+                <a:spcPct val="125000"/>
+              </a:lnSpc>
               <a:spcAft>
                 <a:spcPts val="0"/>
               </a:spcAft>
@@ -5119,7 +5229,7 @@
                 <a:solidFill>
                   <a:srgbClr val="19A7A0"/>
                 </a:solidFill>
-                <a:latin typeface="Aptos"/>
+                <a:latin typeface="Arial"/>
               </a:rPr>
               <a:t>Ninja Coffee Bar Single-Serve System CF111 30</a:t>
             </a:r>
@@ -5143,12 +5253,15 @@
           <a:noFill/>
         </p:spPr>
         <p:txBody>
-          <a:bodyPr wrap="square" lIns="27432" rIns="27432" tIns="27432" bIns="27432" anchor="t">
-            <a:spAutoFit/>
+          <a:bodyPr wrap="square" lIns="6583" rIns="6583" tIns="6583" bIns="6583" anchor="t">
+            <a:normAutofit/>
           </a:bodyPr>
           <a:lstStyle/>
           <a:p>
             <a:pPr algn="l">
+              <a:lnSpc>
+                <a:spcPct val="125000"/>
+              </a:lnSpc>
               <a:spcAft>
                 <a:spcPts val="0"/>
               </a:spcAft>
@@ -5158,7 +5271,7 @@
                 <a:solidFill>
                   <a:srgbClr val="64748B"/>
                 </a:solidFill>
-                <a:latin typeface="Aptos"/>
+                <a:latin typeface="Arial"/>
               </a:rPr>
               <a:t>Ninja Coffee Bar Single-Serve System CF111 30</a:t>
             </a:r>
@@ -5182,12 +5295,15 @@
           <a:noFill/>
         </p:spPr>
         <p:txBody>
-          <a:bodyPr wrap="square" lIns="27432" rIns="27432" tIns="27432" bIns="27432" anchor="t">
-            <a:spAutoFit/>
+          <a:bodyPr wrap="square" lIns="6583" rIns="6583" tIns="6583" bIns="6583" anchor="t">
+            <a:normAutofit/>
           </a:bodyPr>
           <a:lstStyle/>
           <a:p>
             <a:pPr algn="r">
+              <a:lnSpc>
+                <a:spcPct val="125000"/>
+              </a:lnSpc>
               <a:spcAft>
                 <a:spcPts val="0"/>
               </a:spcAft>
@@ -5197,7 +5313,7 @@
                 <a:solidFill>
                   <a:srgbClr val="64748B"/>
                 </a:solidFill>
-                <a:latin typeface="Aptos"/>
+                <a:latin typeface="Arial"/>
               </a:rPr>
               <a:t>11 / 11</a:t>
             </a:r>
@@ -5247,12 +5363,15 @@
           <a:noFill/>
         </p:spPr>
         <p:txBody>
-          <a:bodyPr wrap="square" lIns="27432" rIns="27432" tIns="27432" bIns="27432" anchor="t">
-            <a:spAutoFit/>
+          <a:bodyPr wrap="square" lIns="10241" rIns="10241" tIns="10241" bIns="10241" anchor="t">
+            <a:normAutofit/>
           </a:bodyPr>
           <a:lstStyle/>
           <a:p>
             <a:pPr algn="l">
+              <a:lnSpc>
+                <a:spcPct val="125000"/>
+              </a:lnSpc>
               <a:spcAft>
                 <a:spcPts val="0"/>
               </a:spcAft>
@@ -5262,7 +5381,7 @@
                 <a:solidFill>
                   <a:srgbClr val="19A7A0"/>
                 </a:solidFill>
-                <a:latin typeface="Aptos"/>
+                <a:latin typeface="Arial"/>
               </a:rPr>
               <a:t>PROJECT OVERVIEW</a:t>
             </a:r>
@@ -5286,12 +5405,15 @@
           <a:noFill/>
         </p:spPr>
         <p:txBody>
-          <a:bodyPr wrap="square" lIns="27432" rIns="27432" tIns="27432" bIns="27432" anchor="t">
-            <a:spAutoFit/>
+          <a:bodyPr wrap="square" lIns="20116" rIns="20116" tIns="20116" bIns="20116" anchor="t">
+            <a:normAutofit/>
           </a:bodyPr>
           <a:lstStyle/>
           <a:p>
             <a:pPr algn="l">
+              <a:lnSpc>
+                <a:spcPct val="125000"/>
+              </a:lnSpc>
               <a:spcAft>
                 <a:spcPts val="0"/>
               </a:spcAft>
@@ -5301,7 +5423,7 @@
                 <a:solidFill>
                   <a:srgbClr val="14213D"/>
                 </a:solidFill>
-                <a:latin typeface="Aptos"/>
+                <a:latin typeface="Arial"/>
               </a:rPr>
               <a:t>Export scope and model summary</a:t>
             </a:r>
@@ -5372,12 +5494,15 @@
           <a:noFill/>
         </p:spPr>
         <p:txBody>
-          <a:bodyPr wrap="square" lIns="27432" rIns="27432" tIns="27432" bIns="27432" anchor="t">
-            <a:spAutoFit/>
+          <a:bodyPr wrap="square" lIns="9144" rIns="9144" tIns="9144" bIns="9144" anchor="t">
+            <a:normAutofit/>
           </a:bodyPr>
           <a:lstStyle/>
           <a:p>
             <a:pPr algn="l">
+              <a:lnSpc>
+                <a:spcPct val="125000"/>
+              </a:lnSpc>
               <a:spcAft>
                 <a:spcPts val="0"/>
               </a:spcAft>
@@ -5387,7 +5512,7 @@
                 <a:solidFill>
                   <a:srgbClr val="19A7A0"/>
                 </a:solidFill>
-                <a:latin typeface="Aptos"/>
+                <a:latin typeface="Arial"/>
               </a:rPr>
               <a:t>PRODUCT ID</a:t>
             </a:r>
@@ -5411,24 +5536,27 @@
           <a:noFill/>
         </p:spPr>
         <p:txBody>
-          <a:bodyPr wrap="square" lIns="27432" rIns="27432" tIns="27432" bIns="27432" anchor="t">
-            <a:spAutoFit/>
+          <a:bodyPr wrap="square" lIns="16459" rIns="16459" tIns="16459" bIns="16459" anchor="t">
+            <a:normAutofit/>
           </a:bodyPr>
           <a:lstStyle/>
           <a:p>
             <a:pPr algn="l">
-              <a:spcAft>
-                <a:spcPts val="0"/>
-              </a:spcAft>
-            </a:pPr>
-            <a:r>
-              <a:rPr sz="2400" b="1">
+              <a:lnSpc>
+                <a:spcPct val="125000"/>
+              </a:lnSpc>
+              <a:spcAft>
+                <a:spcPts val="0"/>
+              </a:spcAft>
+            </a:pPr>
+            <a:r>
+              <a:rPr sz="2000" b="1">
                 <a:solidFill>
                   <a:srgbClr val="14213D"/>
                 </a:solidFill>
-                <a:latin typeface="Aptos"/>
-              </a:rPr>
-              <a:t>2327528076048</a:t>
+                <a:latin typeface="Arial"/>
+              </a:rPr>
+              <a:t>2046966055184</a:t>
             </a:r>
           </a:p>
         </p:txBody>
@@ -5497,12 +5625,15 @@
           <a:noFill/>
         </p:spPr>
         <p:txBody>
-          <a:bodyPr wrap="square" lIns="27432" rIns="27432" tIns="27432" bIns="27432" anchor="t">
-            <a:spAutoFit/>
+          <a:bodyPr wrap="square" lIns="9144" rIns="9144" tIns="9144" bIns="9144" anchor="t">
+            <a:normAutofit/>
           </a:bodyPr>
           <a:lstStyle/>
           <a:p>
             <a:pPr algn="l">
+              <a:lnSpc>
+                <a:spcPct val="125000"/>
+              </a:lnSpc>
               <a:spcAft>
                 <a:spcPts val="0"/>
               </a:spcAft>
@@ -5512,7 +5643,7 @@
                 <a:solidFill>
                   <a:srgbClr val="19A7A0"/>
                 </a:solidFill>
-                <a:latin typeface="Aptos"/>
+                <a:latin typeface="Arial"/>
               </a:rPr>
               <a:t>ACTION GROUPS</a:t>
             </a:r>
@@ -5536,22 +5667,25 @@
           <a:noFill/>
         </p:spPr>
         <p:txBody>
-          <a:bodyPr wrap="square" lIns="27432" rIns="27432" tIns="27432" bIns="27432" anchor="t">
-            <a:spAutoFit/>
+          <a:bodyPr wrap="square" lIns="16459" rIns="16459" tIns="16459" bIns="16459" anchor="t">
+            <a:normAutofit/>
           </a:bodyPr>
           <a:lstStyle/>
           <a:p>
             <a:pPr algn="l">
-              <a:spcAft>
-                <a:spcPts val="0"/>
-              </a:spcAft>
-            </a:pPr>
-            <a:r>
-              <a:rPr sz="2400" b="1">
+              <a:lnSpc>
+                <a:spcPct val="125000"/>
+              </a:lnSpc>
+              <a:spcAft>
+                <a:spcPts val="0"/>
+              </a:spcAft>
+            </a:pPr>
+            <a:r>
+              <a:rPr sz="2300" b="1">
                 <a:solidFill>
                   <a:srgbClr val="14213D"/>
                 </a:solidFill>
-                <a:latin typeface="Aptos"/>
+                <a:latin typeface="Arial"/>
               </a:rPr>
               <a:t>4</a:t>
             </a:r>
@@ -5622,12 +5756,15 @@
           <a:noFill/>
         </p:spPr>
         <p:txBody>
-          <a:bodyPr wrap="square" lIns="27432" rIns="27432" tIns="27432" bIns="27432" anchor="t">
-            <a:spAutoFit/>
+          <a:bodyPr wrap="square" lIns="9144" rIns="9144" tIns="9144" bIns="9144" anchor="t">
+            <a:normAutofit/>
           </a:bodyPr>
           <a:lstStyle/>
           <a:p>
             <a:pPr algn="l">
+              <a:lnSpc>
+                <a:spcPct val="125000"/>
+              </a:lnSpc>
               <a:spcAft>
                 <a:spcPts val="0"/>
               </a:spcAft>
@@ -5637,7 +5774,7 @@
                 <a:solidFill>
                   <a:srgbClr val="19A7A0"/>
                 </a:solidFill>
-                <a:latin typeface="Aptos"/>
+                <a:latin typeface="Arial"/>
               </a:rPr>
               <a:t>BOM COMPONENTS</a:t>
             </a:r>
@@ -5661,22 +5798,25 @@
           <a:noFill/>
         </p:spPr>
         <p:txBody>
-          <a:bodyPr wrap="square" lIns="27432" rIns="27432" tIns="27432" bIns="27432" anchor="t">
-            <a:spAutoFit/>
+          <a:bodyPr wrap="square" lIns="16459" rIns="16459" tIns="16459" bIns="16459" anchor="t">
+            <a:normAutofit/>
           </a:bodyPr>
           <a:lstStyle/>
           <a:p>
             <a:pPr algn="l">
-              <a:spcAft>
-                <a:spcPts val="0"/>
-              </a:spcAft>
-            </a:pPr>
-            <a:r>
-              <a:rPr sz="2400" b="1">
+              <a:lnSpc>
+                <a:spcPct val="125000"/>
+              </a:lnSpc>
+              <a:spcAft>
+                <a:spcPts val="0"/>
+              </a:spcAft>
+            </a:pPr>
+            <a:r>
+              <a:rPr sz="2300" b="1">
                 <a:solidFill>
                   <a:srgbClr val="14213D"/>
                 </a:solidFill>
-                <a:latin typeface="Aptos"/>
+                <a:latin typeface="Arial"/>
               </a:rPr>
               <a:t>5</a:t>
             </a:r>
@@ -5747,12 +5887,15 @@
           <a:noFill/>
         </p:spPr>
         <p:txBody>
-          <a:bodyPr wrap="square" lIns="27432" rIns="27432" tIns="27432" bIns="27432" anchor="t">
-            <a:spAutoFit/>
+          <a:bodyPr wrap="square" lIns="9144" rIns="9144" tIns="9144" bIns="9144" anchor="t">
+            <a:normAutofit/>
           </a:bodyPr>
           <a:lstStyle/>
           <a:p>
             <a:pPr algn="l">
+              <a:lnSpc>
+                <a:spcPct val="125000"/>
+              </a:lnSpc>
               <a:spcAft>
                 <a:spcPts val="0"/>
               </a:spcAft>
@@ -5762,7 +5905,7 @@
                 <a:solidFill>
                   <a:srgbClr val="19A7A0"/>
                 </a:solidFill>
-                <a:latin typeface="Aptos"/>
+                <a:latin typeface="Arial"/>
               </a:rPr>
               <a:t>VALIDATION ISSUES</a:t>
             </a:r>
@@ -5786,24 +5929,27 @@
           <a:noFill/>
         </p:spPr>
         <p:txBody>
-          <a:bodyPr wrap="square" lIns="27432" rIns="27432" tIns="27432" bIns="27432" anchor="t">
-            <a:spAutoFit/>
+          <a:bodyPr wrap="square" lIns="16459" rIns="16459" tIns="16459" bIns="16459" anchor="t">
+            <a:normAutofit/>
           </a:bodyPr>
           <a:lstStyle/>
           <a:p>
             <a:pPr algn="l">
-              <a:spcAft>
-                <a:spcPts val="0"/>
-              </a:spcAft>
-            </a:pPr>
-            <a:r>
-              <a:rPr sz="2400" b="1">
+              <a:lnSpc>
+                <a:spcPct val="125000"/>
+              </a:lnSpc>
+              <a:spcAft>
+                <a:spcPts val="0"/>
+              </a:spcAft>
+            </a:pPr>
+            <a:r>
+              <a:rPr sz="2300" b="1">
                 <a:solidFill>
                   <a:srgbClr val="14213D"/>
                 </a:solidFill>
-                <a:latin typeface="Aptos"/>
-              </a:rPr>
-              <a:t>2</a:t>
+                <a:latin typeface="Arial"/>
+              </a:rPr>
+              <a:t>1</a:t>
             </a:r>
           </a:p>
         </p:txBody>
@@ -5872,12 +6018,15 @@
           <a:noFill/>
         </p:spPr>
         <p:txBody>
-          <a:bodyPr wrap="square" lIns="27432" rIns="27432" tIns="27432" bIns="27432" anchor="t">
-            <a:spAutoFit/>
+          <a:bodyPr wrap="square" lIns="9144" rIns="9144" tIns="9144" bIns="9144" anchor="t">
+            <a:normAutofit/>
           </a:bodyPr>
           <a:lstStyle/>
           <a:p>
             <a:pPr algn="l">
+              <a:lnSpc>
+                <a:spcPct val="125000"/>
+              </a:lnSpc>
               <a:spcAft>
                 <a:spcPts val="0"/>
               </a:spcAft>
@@ -5887,7 +6036,7 @@
                 <a:solidFill>
                   <a:srgbClr val="19A7A0"/>
                 </a:solidFill>
-                <a:latin typeface="Aptos"/>
+                <a:latin typeface="Arial"/>
               </a:rPr>
               <a:t>PRODUCT DATA</a:t>
             </a:r>
@@ -5912,11 +6061,14 @@
         </p:spPr>
         <p:txBody>
           <a:bodyPr wrap="square" lIns="27432" rIns="27432" tIns="27432" bIns="27432" anchor="t">
-            <a:spAutoFit/>
+            <a:normAutofit/>
           </a:bodyPr>
           <a:lstStyle/>
           <a:p>
             <a:pPr algn="l">
+              <a:lnSpc>
+                <a:spcPct val="125000"/>
+              </a:lnSpc>
               <a:spcAft>
                 <a:spcPts val="0"/>
               </a:spcAft>
@@ -5926,7 +6078,7 @@
                 <a:solidFill>
                   <a:srgbClr val="14213D"/>
                 </a:solidFill>
-                <a:latin typeface="Aptos"/>
+                <a:latin typeface="Arial"/>
               </a:rPr>
               <a:t>Name: Ninja Coffee Bar Single-Serve System CF111 30
 Weight: Unknown
@@ -6001,12 +6153,15 @@
           <a:noFill/>
         </p:spPr>
         <p:txBody>
-          <a:bodyPr wrap="square" lIns="27432" rIns="27432" tIns="27432" bIns="27432" anchor="t">
-            <a:spAutoFit/>
+          <a:bodyPr wrap="square" lIns="9144" rIns="9144" tIns="9144" bIns="9144" anchor="t">
+            <a:normAutofit/>
           </a:bodyPr>
           <a:lstStyle/>
           <a:p>
             <a:pPr algn="l">
+              <a:lnSpc>
+                <a:spcPct val="125000"/>
+              </a:lnSpc>
               <a:spcAft>
                 <a:spcPts val="0"/>
               </a:spcAft>
@@ -6016,7 +6171,7 @@
                 <a:solidFill>
                   <a:srgbClr val="19A7A0"/>
                 </a:solidFill>
-                <a:latin typeface="Aptos"/>
+                <a:latin typeface="Arial"/>
               </a:rPr>
               <a:t>EXPORT BEHAVIOUR</a:t>
             </a:r>
@@ -6041,11 +6196,14 @@
         </p:spPr>
         <p:txBody>
           <a:bodyPr wrap="square" lIns="27432" rIns="27432" tIns="27432" bIns="27432" anchor="t">
-            <a:spAutoFit/>
+            <a:normAutofit/>
           </a:bodyPr>
           <a:lstStyle/>
           <a:p>
             <a:pPr algn="l">
+              <a:lnSpc>
+                <a:spcPct val="125000"/>
+              </a:lnSpc>
               <a:spcAft>
                 <a:spcPts val="0"/>
               </a:spcAft>
@@ -6055,7 +6213,7 @@
                 <a:solidFill>
                   <a:srgbClr val="14213D"/>
                 </a:solidFill>
-                <a:latin typeface="Aptos"/>
+                <a:latin typeface="Arial"/>
               </a:rPr>
               <a:t>• Parent operation and atomic actions stay grouped.
 • Output components and remaining assembly are shown.
@@ -6083,12 +6241,15 @@
           <a:noFill/>
         </p:spPr>
         <p:txBody>
-          <a:bodyPr wrap="square" lIns="27432" rIns="27432" tIns="27432" bIns="27432" anchor="t">
-            <a:spAutoFit/>
+          <a:bodyPr wrap="square" lIns="6583" rIns="6583" tIns="6583" bIns="6583" anchor="t">
+            <a:normAutofit/>
           </a:bodyPr>
           <a:lstStyle/>
           <a:p>
             <a:pPr algn="l">
+              <a:lnSpc>
+                <a:spcPct val="125000"/>
+              </a:lnSpc>
               <a:spcAft>
                 <a:spcPts val="0"/>
               </a:spcAft>
@@ -6098,7 +6259,7 @@
                 <a:solidFill>
                   <a:srgbClr val="64748B"/>
                 </a:solidFill>
-                <a:latin typeface="Aptos"/>
+                <a:latin typeface="Arial"/>
               </a:rPr>
               <a:t>Ninja Coffee Bar Single-Serve System CF111 30</a:t>
             </a:r>
@@ -6122,12 +6283,15 @@
           <a:noFill/>
         </p:spPr>
         <p:txBody>
-          <a:bodyPr wrap="square" lIns="27432" rIns="27432" tIns="27432" bIns="27432" anchor="t">
-            <a:spAutoFit/>
+          <a:bodyPr wrap="square" lIns="6583" rIns="6583" tIns="6583" bIns="6583" anchor="t">
+            <a:normAutofit/>
           </a:bodyPr>
           <a:lstStyle/>
           <a:p>
             <a:pPr algn="r">
+              <a:lnSpc>
+                <a:spcPct val="125000"/>
+              </a:lnSpc>
               <a:spcAft>
                 <a:spcPts val="0"/>
               </a:spcAft>
@@ -6137,7 +6301,7 @@
                 <a:solidFill>
                   <a:srgbClr val="64748B"/>
                 </a:solidFill>
-                <a:latin typeface="Aptos"/>
+                <a:latin typeface="Arial"/>
               </a:rPr>
               <a:t>2 / 11</a:t>
             </a:r>
@@ -6187,12 +6351,15 @@
           <a:noFill/>
         </p:spPr>
         <p:txBody>
-          <a:bodyPr wrap="square" lIns="27432" rIns="27432" tIns="27432" bIns="27432" anchor="t">
-            <a:spAutoFit/>
+          <a:bodyPr wrap="square" lIns="10241" rIns="10241" tIns="10241" bIns="10241" anchor="t">
+            <a:normAutofit/>
           </a:bodyPr>
           <a:lstStyle/>
           <a:p>
             <a:pPr algn="l">
+              <a:lnSpc>
+                <a:spcPct val="125000"/>
+              </a:lnSpc>
               <a:spcAft>
                 <a:spcPts val="0"/>
               </a:spcAft>
@@ -6202,7 +6369,7 @@
                 <a:solidFill>
                   <a:srgbClr val="19A7A0"/>
                 </a:solidFill>
-                <a:latin typeface="Aptos"/>
+                <a:latin typeface="Arial"/>
               </a:rPr>
               <a:t>VALIDATION</a:t>
             </a:r>
@@ -6226,12 +6393,15 @@
           <a:noFill/>
         </p:spPr>
         <p:txBody>
-          <a:bodyPr wrap="square" lIns="27432" rIns="27432" tIns="27432" bIns="27432" anchor="t">
-            <a:spAutoFit/>
+          <a:bodyPr wrap="square" lIns="20116" rIns="20116" tIns="20116" bIns="20116" anchor="t">
+            <a:normAutofit/>
           </a:bodyPr>
           <a:lstStyle/>
           <a:p>
             <a:pPr algn="l">
+              <a:lnSpc>
+                <a:spcPct val="125000"/>
+              </a:lnSpc>
               <a:spcAft>
                 <a:spcPts val="0"/>
               </a:spcAft>
@@ -6241,7 +6411,7 @@
                 <a:solidFill>
                   <a:srgbClr val="14213D"/>
                 </a:solidFill>
-                <a:latin typeface="Aptos"/>
+                <a:latin typeface="Arial"/>
               </a:rPr>
               <a:t>Model warnings and errors</a:t>
             </a:r>
@@ -6265,12 +6435,15 @@
           <a:noFill/>
         </p:spPr>
         <p:txBody>
-          <a:bodyPr wrap="square" lIns="27432" rIns="27432" tIns="27432" bIns="27432" anchor="t">
-            <a:spAutoFit/>
+          <a:bodyPr wrap="square" lIns="16459" rIns="16459" tIns="16459" bIns="16459" anchor="t">
+            <a:normAutofit/>
           </a:bodyPr>
           <a:lstStyle/>
           <a:p>
             <a:pPr algn="l">
+              <a:lnSpc>
+                <a:spcPct val="125000"/>
+              </a:lnSpc>
               <a:spcAft>
                 <a:spcPts val="0"/>
               </a:spcAft>
@@ -6280,7 +6453,7 @@
                 <a:solidFill>
                   <a:srgbClr val="64748B"/>
                 </a:solidFill>
-                <a:latin typeface="Aptos"/>
+                <a:latin typeface="Arial"/>
               </a:rPr>
               <a:t>Each issue is localized to the corresponding JSON element when possible.</a:t>
             </a:r>
@@ -6388,32 +6561,35 @@
         <p:spPr>
           <a:xfrm>
             <a:off x="868680" y="1892807"/>
-            <a:ext cx="2834640" cy="201168"/>
-          </a:xfrm>
-          <a:prstGeom prst="rect">
-            <a:avLst/>
-          </a:prstGeom>
-          <a:noFill/>
-        </p:spPr>
-        <p:txBody>
-          <a:bodyPr wrap="square" lIns="27432" rIns="27432" tIns="27432" bIns="27432" anchor="t">
-            <a:spAutoFit/>
+            <a:ext cx="1920240" cy="201168"/>
+          </a:xfrm>
+          <a:prstGeom prst="rect">
+            <a:avLst/>
+          </a:prstGeom>
+          <a:noFill/>
+        </p:spPr>
+        <p:txBody>
+          <a:bodyPr wrap="square" lIns="8046" rIns="8046" tIns="8046" bIns="8046" anchor="t">
+            <a:normAutofit/>
           </a:bodyPr>
           <a:lstStyle/>
           <a:p>
             <a:pPr algn="l">
-              <a:spcAft>
-                <a:spcPts val="0"/>
-              </a:spcAft>
-            </a:pPr>
-            <a:r>
-              <a:rPr sz="1000" b="1">
+              <a:lnSpc>
+                <a:spcPct val="125000"/>
+              </a:lnSpc>
+              <a:spcAft>
+                <a:spcPts val="0"/>
+              </a:spcAft>
+            </a:pPr>
+            <a:r>
+              <a:rPr sz="900" b="1">
                 <a:solidFill>
                   <a:srgbClr val="F59E0B"/>
                 </a:solidFill>
-                <a:latin typeface="Aptos"/>
-              </a:rPr>
-              <a:t>SEVERITY.ERROR · valid_node_types</a:t>
+                <a:latin typeface="Arial"/>
+              </a:rPr>
+              <a:t>SEVERITY.INFO · mass_balance</a:t>
             </a:r>
           </a:p>
         </p:txBody>
@@ -6435,12 +6611,15 @@
           <a:noFill/>
         </p:spPr>
         <p:txBody>
-          <a:bodyPr wrap="square" lIns="27432" rIns="27432" tIns="27432" bIns="27432" anchor="t">
-            <a:spAutoFit/>
+          <a:bodyPr wrap="square" lIns="11704" rIns="11704" tIns="11704" bIns="11704" anchor="t">
+            <a:normAutofit/>
           </a:bodyPr>
           <a:lstStyle/>
           <a:p>
             <a:pPr algn="l">
+              <a:lnSpc>
+                <a:spcPct val="125000"/>
+              </a:lnSpc>
               <a:spcAft>
                 <a:spcPts val="0"/>
               </a:spcAft>
@@ -6450,9 +6629,9 @@
                 <a:solidFill>
                   <a:srgbClr val="14213D"/>
                 </a:solidFill>
-                <a:latin typeface="Aptos"/>
-              </a:rPr>
-              <a:t>Nodes [2327528076048] have an unrecognized type and cannot be interpreted in the disassembly grammar.</a:t>
+                <a:latin typeface="Arial"/>
+              </a:rPr>
+              <a:t>Mass balance not verifiable: the product has no weight; 5 component(s) have no weight.</a:t>
             </a:r>
           </a:p>
         </p:txBody>
@@ -6474,12 +6653,15 @@
           <a:noFill/>
         </p:spPr>
         <p:txBody>
-          <a:bodyPr wrap="square" lIns="27432" rIns="27432" tIns="27432" bIns="27432" anchor="t">
-            <a:spAutoFit/>
+          <a:bodyPr wrap="square" lIns="6583" rIns="6583" tIns="6583" bIns="6583" anchor="t">
+            <a:normAutofit/>
           </a:bodyPr>
           <a:lstStyle/>
           <a:p>
             <a:pPr algn="l">
+              <a:lnSpc>
+                <a:spcPct val="125000"/>
+              </a:lnSpc>
               <a:spcAft>
                 <a:spcPts val="0"/>
               </a:spcAft>
@@ -6489,225 +6671,16 @@
                 <a:solidFill>
                   <a:srgbClr val="64748B"/>
                 </a:solidFill>
-                <a:latin typeface="Aptos"/>
-              </a:rPr>
-              <a:t>Location: node_ids=[2327528076048]</a:t>
-            </a:r>
-          </a:p>
-        </p:txBody>
-      </p:sp>
-      <p:sp>
-        <p:nvSpPr>
-          <p:cNvPr id="10" name="Rounded Rectangle 9"/>
-          <p:cNvSpPr/>
-          <p:nvPr/>
-        </p:nvSpPr>
-        <p:spPr>
-          <a:xfrm>
-            <a:off x="594360" y="2532888"/>
-            <a:ext cx="10972800" cy="658368"/>
-          </a:xfrm>
-          <a:prstGeom prst="roundRect">
-            <a:avLst>
-              <a:gd name="adj" fmla="val 8000"/>
-            </a:avLst>
-          </a:prstGeom>
-          <a:solidFill>
-            <a:srgbClr val="FFFFFF"/>
-          </a:solidFill>
-          <a:ln>
-            <a:solidFill>
-              <a:srgbClr val="D9E2EC"/>
-            </a:solidFill>
-          </a:ln>
-        </p:spPr>
-        <p:style>
-          <a:lnRef idx="1">
-            <a:schemeClr val="accent1"/>
-          </a:lnRef>
-          <a:fillRef idx="3">
-            <a:schemeClr val="accent1"/>
-          </a:fillRef>
-          <a:effectRef idx="2">
-            <a:schemeClr val="accent1"/>
-          </a:effectRef>
-          <a:fontRef idx="minor">
-            <a:schemeClr val="lt1"/>
-          </a:fontRef>
-        </p:style>
-        <p:txBody>
-          <a:bodyPr rtlCol="0" anchor="ctr"/>
-          <a:lstStyle/>
-          <a:p>
-            <a:pPr algn="ctr"/>
-          </a:p>
-        </p:txBody>
-      </p:sp>
-      <p:sp>
-        <p:nvSpPr>
-          <p:cNvPr id="11" name="Rectangle 10"/>
-          <p:cNvSpPr/>
-          <p:nvPr/>
-        </p:nvSpPr>
-        <p:spPr>
-          <a:xfrm>
-            <a:off x="594360" y="2532888"/>
-            <a:ext cx="109728" cy="658368"/>
-          </a:xfrm>
-          <a:prstGeom prst="rect">
-            <a:avLst/>
-          </a:prstGeom>
-          <a:solidFill>
-            <a:srgbClr val="F59E0B"/>
-          </a:solidFill>
-          <a:ln>
-            <a:solidFill>
-              <a:srgbClr val="F59E0B"/>
-            </a:solidFill>
-          </a:ln>
-        </p:spPr>
-        <p:style>
-          <a:lnRef idx="1">
-            <a:schemeClr val="accent1"/>
-          </a:lnRef>
-          <a:fillRef idx="3">
-            <a:schemeClr val="accent1"/>
-          </a:fillRef>
-          <a:effectRef idx="2">
-            <a:schemeClr val="accent1"/>
-          </a:effectRef>
-          <a:fontRef idx="minor">
-            <a:schemeClr val="lt1"/>
-          </a:fontRef>
-        </p:style>
-        <p:txBody>
-          <a:bodyPr rtlCol="0" anchor="ctr"/>
-          <a:lstStyle/>
-          <a:p>
-            <a:pPr algn="ctr"/>
-          </a:p>
-        </p:txBody>
-      </p:sp>
-      <p:sp>
-        <p:nvSpPr>
-          <p:cNvPr id="12" name="TextBox 11"/>
-          <p:cNvSpPr txBox="1"/>
-          <p:nvPr/>
-        </p:nvSpPr>
-        <p:spPr>
-          <a:xfrm>
-            <a:off x="868680" y="2642616"/>
-            <a:ext cx="2834640" cy="201168"/>
-          </a:xfrm>
-          <a:prstGeom prst="rect">
-            <a:avLst/>
-          </a:prstGeom>
-          <a:noFill/>
-        </p:spPr>
-        <p:txBody>
-          <a:bodyPr wrap="square" lIns="27432" rIns="27432" tIns="27432" bIns="27432" anchor="t">
-            <a:spAutoFit/>
-          </a:bodyPr>
-          <a:lstStyle/>
-          <a:p>
-            <a:pPr algn="l">
-              <a:spcAft>
-                <a:spcPts val="0"/>
-              </a:spcAft>
-            </a:pPr>
-            <a:r>
-              <a:rPr sz="1000" b="1">
-                <a:solidFill>
-                  <a:srgbClr val="F59E0B"/>
-                </a:solidFill>
-                <a:latin typeface="Aptos"/>
-              </a:rPr>
-              <a:t>SEVERITY.INFO · mass_balance</a:t>
-            </a:r>
-          </a:p>
-        </p:txBody>
-      </p:sp>
-      <p:sp>
-        <p:nvSpPr>
-          <p:cNvPr id="13" name="TextBox 12"/>
-          <p:cNvSpPr txBox="1"/>
-          <p:nvPr/>
-        </p:nvSpPr>
-        <p:spPr>
-          <a:xfrm>
-            <a:off x="2971800" y="2624328"/>
-            <a:ext cx="7223760" cy="292608"/>
-          </a:xfrm>
-          <a:prstGeom prst="rect">
-            <a:avLst/>
-          </a:prstGeom>
-          <a:noFill/>
-        </p:spPr>
-        <p:txBody>
-          <a:bodyPr wrap="square" lIns="27432" rIns="27432" tIns="27432" bIns="27432" anchor="t">
-            <a:spAutoFit/>
-          </a:bodyPr>
-          <a:lstStyle/>
-          <a:p>
-            <a:pPr algn="l">
-              <a:spcAft>
-                <a:spcPts val="0"/>
-              </a:spcAft>
-            </a:pPr>
-            <a:r>
-              <a:rPr sz="1100" b="0">
-                <a:solidFill>
-                  <a:srgbClr val="14213D"/>
-                </a:solidFill>
-                <a:latin typeface="Aptos"/>
-              </a:rPr>
-              <a:t>Mass balance not verifiable: the product has no weight; 5 component(s) have no weight.</a:t>
-            </a:r>
-          </a:p>
-        </p:txBody>
-      </p:sp>
-      <p:sp>
-        <p:nvSpPr>
-          <p:cNvPr id="14" name="TextBox 13"/>
-          <p:cNvSpPr txBox="1"/>
-          <p:nvPr/>
-        </p:nvSpPr>
-        <p:spPr>
-          <a:xfrm>
-            <a:off x="2971800" y="2926080"/>
-            <a:ext cx="7955279" cy="164592"/>
-          </a:xfrm>
-          <a:prstGeom prst="rect">
-            <a:avLst/>
-          </a:prstGeom>
-          <a:noFill/>
-        </p:spPr>
-        <p:txBody>
-          <a:bodyPr wrap="square" lIns="27432" rIns="27432" tIns="27432" bIns="27432" anchor="t">
-            <a:spAutoFit/>
-          </a:bodyPr>
-          <a:lstStyle/>
-          <a:p>
-            <a:pPr algn="l">
-              <a:spcAft>
-                <a:spcPts val="0"/>
-              </a:spcAft>
-            </a:pPr>
-            <a:r>
-              <a:rPr sz="800" b="0">
-                <a:solidFill>
-                  <a:srgbClr val="64748B"/>
-                </a:solidFill>
-                <a:latin typeface="Aptos"/>
-              </a:rPr>
-              <a:t>Location: node_ids=[2327528032144, 2327528047824, 2327528049744, 2327528052176, 2327528063760]</a:t>
-            </a:r>
-          </a:p>
-        </p:txBody>
-      </p:sp>
-      <p:sp>
-        <p:nvSpPr>
-          <p:cNvPr id="15" name="TextBox 14"/>
+                <a:latin typeface="Arial"/>
+              </a:rPr>
+              <a:t>Location: node_ids=[2046884535632, 2046970958032, 2046975404944, 2046996689808, 2047096597072]</a:t>
+            </a:r>
+          </a:p>
+        </p:txBody>
+      </p:sp>
+      <p:sp>
+        <p:nvSpPr>
+          <p:cNvPr id="10" name="TextBox 9"/>
           <p:cNvSpPr txBox="1"/>
           <p:nvPr/>
         </p:nvSpPr>
@@ -6722,12 +6695,15 @@
           <a:noFill/>
         </p:spPr>
         <p:txBody>
-          <a:bodyPr wrap="square" lIns="27432" rIns="27432" tIns="27432" bIns="27432" anchor="t">
-            <a:spAutoFit/>
+          <a:bodyPr wrap="square" lIns="6583" rIns="6583" tIns="6583" bIns="6583" anchor="t">
+            <a:normAutofit/>
           </a:bodyPr>
           <a:lstStyle/>
           <a:p>
             <a:pPr algn="l">
+              <a:lnSpc>
+                <a:spcPct val="125000"/>
+              </a:lnSpc>
               <a:spcAft>
                 <a:spcPts val="0"/>
               </a:spcAft>
@@ -6737,7 +6713,7 @@
                 <a:solidFill>
                   <a:srgbClr val="64748B"/>
                 </a:solidFill>
-                <a:latin typeface="Aptos"/>
+                <a:latin typeface="Arial"/>
               </a:rPr>
               <a:t>Ninja Coffee Bar Single-Serve System CF111 30</a:t>
             </a:r>
@@ -6746,7 +6722,7 @@
       </p:sp>
       <p:sp>
         <p:nvSpPr>
-          <p:cNvPr id="16" name="TextBox 15"/>
+          <p:cNvPr id="11" name="TextBox 10"/>
           <p:cNvSpPr txBox="1"/>
           <p:nvPr/>
         </p:nvSpPr>
@@ -6761,12 +6737,15 @@
           <a:noFill/>
         </p:spPr>
         <p:txBody>
-          <a:bodyPr wrap="square" lIns="27432" rIns="27432" tIns="27432" bIns="27432" anchor="t">
-            <a:spAutoFit/>
+          <a:bodyPr wrap="square" lIns="6583" rIns="6583" tIns="6583" bIns="6583" anchor="t">
+            <a:normAutofit/>
           </a:bodyPr>
           <a:lstStyle/>
           <a:p>
             <a:pPr algn="r">
+              <a:lnSpc>
+                <a:spcPct val="125000"/>
+              </a:lnSpc>
               <a:spcAft>
                 <a:spcPts val="0"/>
               </a:spcAft>
@@ -6776,7 +6755,7 @@
                 <a:solidFill>
                   <a:srgbClr val="64748B"/>
                 </a:solidFill>
-                <a:latin typeface="Aptos"/>
+                <a:latin typeface="Arial"/>
               </a:rPr>
               <a:t>3 / 11</a:t>
             </a:r>
@@ -6826,12 +6805,15 @@
           <a:noFill/>
         </p:spPr>
         <p:txBody>
-          <a:bodyPr wrap="square" lIns="27432" rIns="27432" tIns="27432" bIns="27432" anchor="t">
-            <a:spAutoFit/>
+          <a:bodyPr wrap="square" lIns="10241" rIns="10241" tIns="10241" bIns="10241" anchor="t">
+            <a:normAutofit/>
           </a:bodyPr>
           <a:lstStyle/>
           <a:p>
             <a:pPr algn="l">
+              <a:lnSpc>
+                <a:spcPct val="125000"/>
+              </a:lnSpc>
               <a:spcAft>
                 <a:spcPts val="0"/>
               </a:spcAft>
@@ -6841,7 +6823,7 @@
                 <a:solidFill>
                   <a:srgbClr val="19A7A0"/>
                 </a:solidFill>
-                <a:latin typeface="Aptos"/>
+                <a:latin typeface="Arial"/>
               </a:rPr>
               <a:t>PREPARATION</a:t>
             </a:r>
@@ -6865,12 +6847,15 @@
           <a:noFill/>
         </p:spPr>
         <p:txBody>
-          <a:bodyPr wrap="square" lIns="27432" rIns="27432" tIns="27432" bIns="27432" anchor="t">
-            <a:spAutoFit/>
+          <a:bodyPr wrap="square" lIns="20116" rIns="20116" tIns="20116" bIns="20116" anchor="t">
+            <a:normAutofit/>
           </a:bodyPr>
           <a:lstStyle/>
           <a:p>
             <a:pPr algn="l">
+              <a:lnSpc>
+                <a:spcPct val="125000"/>
+              </a:lnSpc>
               <a:spcAft>
                 <a:spcPts val="0"/>
               </a:spcAft>
@@ -6880,7 +6865,7 @@
                 <a:solidFill>
                   <a:srgbClr val="14213D"/>
                 </a:solidFill>
-                <a:latin typeface="Aptos"/>
+                <a:latin typeface="Arial"/>
               </a:rPr>
               <a:t>Tools and safety notices</a:t>
             </a:r>
@@ -6904,12 +6889,15 @@
           <a:noFill/>
         </p:spPr>
         <p:txBody>
-          <a:bodyPr wrap="square" lIns="27432" rIns="27432" tIns="27432" bIns="27432" anchor="t">
-            <a:spAutoFit/>
+          <a:bodyPr wrap="square" lIns="16459" rIns="16459" tIns="16459" bIns="16459" anchor="t">
+            <a:normAutofit/>
           </a:bodyPr>
           <a:lstStyle/>
           <a:p>
             <a:pPr algn="l">
+              <a:lnSpc>
+                <a:spcPct val="125000"/>
+              </a:lnSpc>
               <a:spcAft>
                 <a:spcPts val="0"/>
               </a:spcAft>
@@ -6919,7 +6907,7 @@
                 <a:solidFill>
                   <a:srgbClr val="64748B"/>
                 </a:solidFill>
-                <a:latin typeface="Aptos"/>
+                <a:latin typeface="Arial"/>
               </a:rPr>
               <a:t>Aggregated from step-level and atomic-action metadata.</a:t>
             </a:r>
@@ -6990,12 +6978,15 @@
           <a:noFill/>
         </p:spPr>
         <p:txBody>
-          <a:bodyPr wrap="square" lIns="27432" rIns="27432" tIns="27432" bIns="27432" anchor="t">
-            <a:spAutoFit/>
+          <a:bodyPr wrap="square" lIns="9144" rIns="9144" tIns="9144" bIns="9144" anchor="t">
+            <a:normAutofit/>
           </a:bodyPr>
           <a:lstStyle/>
           <a:p>
             <a:pPr algn="l">
+              <a:lnSpc>
+                <a:spcPct val="125000"/>
+              </a:lnSpc>
               <a:spcAft>
                 <a:spcPts val="0"/>
               </a:spcAft>
@@ -7005,7 +6996,7 @@
                 <a:solidFill>
                   <a:srgbClr val="19A7A0"/>
                 </a:solidFill>
-                <a:latin typeface="Aptos"/>
+                <a:latin typeface="Arial"/>
               </a:rPr>
               <a:t>TOOLS REQUIRED</a:t>
             </a:r>
@@ -7030,11 +7021,14 @@
         </p:spPr>
         <p:txBody>
           <a:bodyPr wrap="square" lIns="27432" rIns="27432" tIns="27432" bIns="27432" anchor="t">
-            <a:spAutoFit/>
+            <a:normAutofit/>
           </a:bodyPr>
           <a:lstStyle/>
           <a:p>
             <a:pPr algn="l">
+              <a:lnSpc>
+                <a:spcPct val="125000"/>
+              </a:lnSpc>
               <a:spcAft>
                 <a:spcPts val="0"/>
               </a:spcAft>
@@ -7044,7 +7038,7 @@
                 <a:solidFill>
                   <a:srgbClr val="14213D"/>
                 </a:solidFill>
-                <a:latin typeface="Aptos"/>
+                <a:latin typeface="Arial"/>
               </a:rPr>
               <a:t>• No tools are specified in this model.</a:t>
             </a:r>
@@ -7115,12 +7109,15 @@
           <a:noFill/>
         </p:spPr>
         <p:txBody>
-          <a:bodyPr wrap="square" lIns="27432" rIns="27432" tIns="27432" bIns="27432" anchor="t">
-            <a:spAutoFit/>
+          <a:bodyPr wrap="square" lIns="9144" rIns="9144" tIns="9144" bIns="9144" anchor="t">
+            <a:normAutofit/>
           </a:bodyPr>
           <a:lstStyle/>
           <a:p>
             <a:pPr algn="l">
+              <a:lnSpc>
+                <a:spcPct val="125000"/>
+              </a:lnSpc>
               <a:spcAft>
                 <a:spcPts val="0"/>
               </a:spcAft>
@@ -7130,7 +7127,7 @@
                 <a:solidFill>
                   <a:srgbClr val="F59E0B"/>
                 </a:solidFill>
-                <a:latin typeface="Aptos"/>
+                <a:latin typeface="Arial"/>
               </a:rPr>
               <a:t>SAFETY NOTICES</a:t>
             </a:r>
@@ -7155,11 +7152,14 @@
         </p:spPr>
         <p:txBody>
           <a:bodyPr wrap="square" lIns="27432" rIns="27432" tIns="27432" bIns="27432" anchor="t">
-            <a:spAutoFit/>
+            <a:normAutofit/>
           </a:bodyPr>
           <a:lstStyle/>
           <a:p>
             <a:pPr algn="l">
+              <a:lnSpc>
+                <a:spcPct val="125000"/>
+              </a:lnSpc>
               <a:spcAft>
                 <a:spcPts val="0"/>
               </a:spcAft>
@@ -7169,7 +7169,7 @@
                 <a:solidFill>
                   <a:srgbClr val="14213D"/>
                 </a:solidFill>
-                <a:latin typeface="Aptos"/>
+                <a:latin typeface="Arial"/>
               </a:rPr>
               <a:t>• No safety notices are specified in this model.</a:t>
             </a:r>
@@ -7193,12 +7193,15 @@
           <a:noFill/>
         </p:spPr>
         <p:txBody>
-          <a:bodyPr wrap="square" lIns="27432" rIns="27432" tIns="27432" bIns="27432" anchor="t">
-            <a:spAutoFit/>
+          <a:bodyPr wrap="square" lIns="6583" rIns="6583" tIns="6583" bIns="6583" anchor="t">
+            <a:normAutofit/>
           </a:bodyPr>
           <a:lstStyle/>
           <a:p>
             <a:pPr algn="l">
+              <a:lnSpc>
+                <a:spcPct val="125000"/>
+              </a:lnSpc>
               <a:spcAft>
                 <a:spcPts val="0"/>
               </a:spcAft>
@@ -7208,7 +7211,7 @@
                 <a:solidFill>
                   <a:srgbClr val="64748B"/>
                 </a:solidFill>
-                <a:latin typeface="Aptos"/>
+                <a:latin typeface="Arial"/>
               </a:rPr>
               <a:t>Ninja Coffee Bar Single-Serve System CF111 30</a:t>
             </a:r>
@@ -7232,12 +7235,15 @@
           <a:noFill/>
         </p:spPr>
         <p:txBody>
-          <a:bodyPr wrap="square" lIns="27432" rIns="27432" tIns="27432" bIns="27432" anchor="t">
-            <a:spAutoFit/>
+          <a:bodyPr wrap="square" lIns="6583" rIns="6583" tIns="6583" bIns="6583" anchor="t">
+            <a:normAutofit/>
           </a:bodyPr>
           <a:lstStyle/>
           <a:p>
             <a:pPr algn="r">
+              <a:lnSpc>
+                <a:spcPct val="125000"/>
+              </a:lnSpc>
               <a:spcAft>
                 <a:spcPts val="0"/>
               </a:spcAft>
@@ -7247,7 +7253,7 @@
                 <a:solidFill>
                   <a:srgbClr val="64748B"/>
                 </a:solidFill>
-                <a:latin typeface="Aptos"/>
+                <a:latin typeface="Arial"/>
               </a:rPr>
               <a:t>4 / 11</a:t>
             </a:r>
@@ -7297,12 +7303,15 @@
           <a:noFill/>
         </p:spPr>
         <p:txBody>
-          <a:bodyPr wrap="square" lIns="27432" rIns="27432" tIns="27432" bIns="27432" anchor="t">
-            <a:spAutoFit/>
+          <a:bodyPr wrap="square" lIns="10241" rIns="10241" tIns="10241" bIns="10241" anchor="t">
+            <a:normAutofit/>
           </a:bodyPr>
           <a:lstStyle/>
           <a:p>
             <a:pPr algn="l">
+              <a:lnSpc>
+                <a:spcPct val="125000"/>
+              </a:lnSpc>
               <a:spcAft>
                 <a:spcPts val="0"/>
               </a:spcAft>
@@ -7312,7 +7321,7 @@
                 <a:solidFill>
                   <a:srgbClr val="19A7A0"/>
                 </a:solidFill>
-                <a:latin typeface="Aptos"/>
+                <a:latin typeface="Arial"/>
               </a:rPr>
               <a:t>BILL OF MATERIALS</a:t>
             </a:r>
@@ -7336,12 +7345,15 @@
           <a:noFill/>
         </p:spPr>
         <p:txBody>
-          <a:bodyPr wrap="square" lIns="27432" rIns="27432" tIns="27432" bIns="27432" anchor="t">
-            <a:spAutoFit/>
+          <a:bodyPr wrap="square" lIns="20116" rIns="20116" tIns="20116" bIns="20116" anchor="t">
+            <a:normAutofit/>
           </a:bodyPr>
           <a:lstStyle/>
           <a:p>
             <a:pPr algn="l">
+              <a:lnSpc>
+                <a:spcPct val="125000"/>
+              </a:lnSpc>
               <a:spcAft>
                 <a:spcPts val="0"/>
               </a:spcAft>
@@ -7351,7 +7363,7 @@
                 <a:solidFill>
                   <a:srgbClr val="14213D"/>
                 </a:solidFill>
-                <a:latin typeface="Aptos"/>
+                <a:latin typeface="Arial"/>
               </a:rPr>
               <a:t>Recovered components — page 1 of 1</a:t>
             </a:r>
@@ -7388,10 +7400,15 @@
               <a:tr h="784860">
                 <a:tc>
                   <a:txBody>
-                    <a:bodyPr wrap="square"/>
+                    <a:bodyPr wrap="square">
+                      <a:normAutofit/>
+                    </a:bodyPr>
                     <a:lstStyle/>
                     <a:p>
                       <a:pPr>
+                        <a:lnSpc>
+                          <a:spcPct val="125000"/>
+                        </a:lnSpc>
                         <a:spcAft>
                           <a:spcPts val="0"/>
                         </a:spcAft>
@@ -7401,7 +7418,7 @@
                           <a:solidFill>
                             <a:srgbClr val="FFFFFF"/>
                           </a:solidFill>
-                          <a:latin typeface="Aptos"/>
+                          <a:latin typeface="Arial"/>
                         </a:rPr>
                         <a:t>ID</a:t>
                       </a:r>
@@ -7415,10 +7432,15 @@
                 </a:tc>
                 <a:tc>
                   <a:txBody>
-                    <a:bodyPr wrap="square"/>
+                    <a:bodyPr wrap="square">
+                      <a:normAutofit/>
+                    </a:bodyPr>
                     <a:lstStyle/>
                     <a:p>
                       <a:pPr>
+                        <a:lnSpc>
+                          <a:spcPct val="125000"/>
+                        </a:lnSpc>
                         <a:spcAft>
                           <a:spcPts val="0"/>
                         </a:spcAft>
@@ -7428,7 +7450,7 @@
                           <a:solidFill>
                             <a:srgbClr val="FFFFFF"/>
                           </a:solidFill>
-                          <a:latin typeface="Aptos"/>
+                          <a:latin typeface="Arial"/>
                         </a:rPr>
                         <a:t>Component</a:t>
                       </a:r>
@@ -7442,10 +7464,15 @@
                 </a:tc>
                 <a:tc>
                   <a:txBody>
-                    <a:bodyPr wrap="square"/>
+                    <a:bodyPr wrap="square">
+                      <a:normAutofit/>
+                    </a:bodyPr>
                     <a:lstStyle/>
                     <a:p>
                       <a:pPr>
+                        <a:lnSpc>
+                          <a:spcPct val="125000"/>
+                        </a:lnSpc>
                         <a:spcAft>
                           <a:spcPts val="0"/>
                         </a:spcAft>
@@ -7455,7 +7482,7 @@
                           <a:solidFill>
                             <a:srgbClr val="FFFFFF"/>
                           </a:solidFill>
-                          <a:latin typeface="Aptos"/>
+                          <a:latin typeface="Arial"/>
                         </a:rPr>
                         <a:t>Weight</a:t>
                       </a:r>
@@ -7469,10 +7496,15 @@
                 </a:tc>
                 <a:tc>
                   <a:txBody>
-                    <a:bodyPr wrap="square"/>
+                    <a:bodyPr wrap="square">
+                      <a:normAutofit/>
+                    </a:bodyPr>
                     <a:lstStyle/>
                     <a:p>
                       <a:pPr>
+                        <a:lnSpc>
+                          <a:spcPct val="125000"/>
+                        </a:lnSpc>
                         <a:spcAft>
                           <a:spcPts val="0"/>
                         </a:spcAft>
@@ -7482,7 +7514,7 @@
                           <a:solidFill>
                             <a:srgbClr val="FFFFFF"/>
                           </a:solidFill>
-                          <a:latin typeface="Aptos"/>
+                          <a:latin typeface="Arial"/>
                         </a:rPr>
                         <a:t>Material</a:t>
                       </a:r>
@@ -7496,10 +7528,15 @@
                 </a:tc>
                 <a:tc>
                   <a:txBody>
-                    <a:bodyPr wrap="square"/>
+                    <a:bodyPr wrap="square">
+                      <a:normAutofit/>
+                    </a:bodyPr>
                     <a:lstStyle/>
                     <a:p>
                       <a:pPr>
+                        <a:lnSpc>
+                          <a:spcPct val="125000"/>
+                        </a:lnSpc>
                         <a:spcAft>
                           <a:spcPts val="0"/>
                         </a:spcAft>
@@ -7509,7 +7546,7 @@
                           <a:solidFill>
                             <a:srgbClr val="FFFFFF"/>
                           </a:solidFill>
-                          <a:latin typeface="Aptos"/>
+                          <a:latin typeface="Arial"/>
                         </a:rPr>
                         <a:t>Color</a:t>
                       </a:r>
@@ -7523,10 +7560,15 @@
                 </a:tc>
                 <a:tc>
                   <a:txBody>
-                    <a:bodyPr wrap="square"/>
+                    <a:bodyPr wrap="square">
+                      <a:normAutofit/>
+                    </a:bodyPr>
                     <a:lstStyle/>
                     <a:p>
                       <a:pPr>
+                        <a:lnSpc>
+                          <a:spcPct val="125000"/>
+                        </a:lnSpc>
                         <a:spcAft>
                           <a:spcPts val="0"/>
                         </a:spcAft>
@@ -7536,7 +7578,7 @@
                           <a:solidFill>
                             <a:srgbClr val="FFFFFF"/>
                           </a:solidFill>
-                          <a:latin typeface="Aptos"/>
+                          <a:latin typeface="Arial"/>
                         </a:rPr>
                         <a:t>Quality</a:t>
                       </a:r>
@@ -7550,10 +7592,15 @@
                 </a:tc>
                 <a:tc>
                   <a:txBody>
-                    <a:bodyPr wrap="square"/>
+                    <a:bodyPr wrap="square">
+                      <a:normAutofit/>
+                    </a:bodyPr>
                     <a:lstStyle/>
                     <a:p>
                       <a:pPr>
+                        <a:lnSpc>
+                          <a:spcPct val="125000"/>
+                        </a:lnSpc>
                         <a:spcAft>
                           <a:spcPts val="0"/>
                         </a:spcAft>
@@ -7563,7 +7610,7 @@
                           <a:solidFill>
                             <a:srgbClr val="FFFFFF"/>
                           </a:solidFill>
-                          <a:latin typeface="Aptos"/>
+                          <a:latin typeface="Arial"/>
                         </a:rPr>
                         <a:t>Destination</a:t>
                       </a:r>
@@ -7579,10 +7626,15 @@
               <a:tr h="784860">
                 <a:tc>
                   <a:txBody>
-                    <a:bodyPr wrap="square"/>
+                    <a:bodyPr wrap="square">
+                      <a:normAutofit/>
+                    </a:bodyPr>
                     <a:lstStyle/>
                     <a:p>
                       <a:pPr>
+                        <a:lnSpc>
+                          <a:spcPct val="125000"/>
+                        </a:lnSpc>
                         <a:spcAft>
                           <a:spcPts val="0"/>
                         </a:spcAft>
@@ -7592,9 +7644,28 @@
                           <a:solidFill>
                             <a:srgbClr val="14213D"/>
                           </a:solidFill>
-                          <a:latin typeface="Aptos"/>
+                          <a:latin typeface="Arial"/>
                         </a:rPr>
-                        <a:t>2327528032144</a:t>
+                        <a:t>2047096</a:t>
+                      </a:r>
+                    </a:p>
+                    <a:p>
+                      <a:pPr>
+                        <a:lnSpc>
+                          <a:spcPct val="125000"/>
+                        </a:lnSpc>
+                        <a:spcAft>
+                          <a:spcPts val="0"/>
+                        </a:spcAft>
+                      </a:pPr>
+                      <a:r>
+                        <a:rPr sz="900" b="0">
+                          <a:solidFill>
+                            <a:srgbClr val="14213D"/>
+                          </a:solidFill>
+                          <a:latin typeface="Arial"/>
+                        </a:rPr>
+                        <a:t>597072</a:t>
                       </a:r>
                     </a:p>
                   </a:txBody>
@@ -7606,10 +7677,15 @@
                 </a:tc>
                 <a:tc>
                   <a:txBody>
-                    <a:bodyPr wrap="square"/>
+                    <a:bodyPr wrap="square">
+                      <a:normAutofit/>
+                    </a:bodyPr>
                     <a:lstStyle/>
                     <a:p>
                       <a:pPr>
+                        <a:lnSpc>
+                          <a:spcPct val="125000"/>
+                        </a:lnSpc>
                         <a:spcAft>
                           <a:spcPts val="0"/>
                         </a:spcAft>
@@ -7619,9 +7695,9 @@
                           <a:solidFill>
                             <a:srgbClr val="14213D"/>
                           </a:solidFill>
-                          <a:latin typeface="Aptos"/>
+                          <a:latin typeface="Arial"/>
                         </a:rPr>
-                        <a:t>brew basket</a:t>
+                        <a:t>Brew basket</a:t>
                       </a:r>
                     </a:p>
                   </a:txBody>
@@ -7633,10 +7709,15 @@
                 </a:tc>
                 <a:tc>
                   <a:txBody>
-                    <a:bodyPr wrap="square"/>
+                    <a:bodyPr wrap="square">
+                      <a:normAutofit/>
+                    </a:bodyPr>
                     <a:lstStyle/>
                     <a:p>
                       <a:pPr>
+                        <a:lnSpc>
+                          <a:spcPct val="125000"/>
+                        </a:lnSpc>
                         <a:spcAft>
                           <a:spcPts val="0"/>
                         </a:spcAft>
@@ -7646,7 +7727,7 @@
                           <a:solidFill>
                             <a:srgbClr val="14213D"/>
                           </a:solidFill>
-                          <a:latin typeface="Aptos"/>
+                          <a:latin typeface="Arial"/>
                         </a:rPr>
                         <a:t>Unknown</a:t>
                       </a:r>
@@ -7660,10 +7741,15 @@
                 </a:tc>
                 <a:tc>
                   <a:txBody>
-                    <a:bodyPr wrap="square"/>
+                    <a:bodyPr wrap="square">
+                      <a:normAutofit/>
+                    </a:bodyPr>
                     <a:lstStyle/>
                     <a:p>
                       <a:pPr>
+                        <a:lnSpc>
+                          <a:spcPct val="125000"/>
+                        </a:lnSpc>
                         <a:spcAft>
                           <a:spcPts val="0"/>
                         </a:spcAft>
@@ -7673,7 +7759,7 @@
                           <a:solidFill>
                             <a:srgbClr val="14213D"/>
                           </a:solidFill>
-                          <a:latin typeface="Aptos"/>
+                          <a:latin typeface="Arial"/>
                         </a:rPr>
                         <a:t>Unknown</a:t>
                       </a:r>
@@ -7687,10 +7773,15 @@
                 </a:tc>
                 <a:tc>
                   <a:txBody>
-                    <a:bodyPr wrap="square"/>
+                    <a:bodyPr wrap="square">
+                      <a:normAutofit/>
+                    </a:bodyPr>
                     <a:lstStyle/>
                     <a:p>
                       <a:pPr>
+                        <a:lnSpc>
+                          <a:spcPct val="125000"/>
+                        </a:lnSpc>
                         <a:spcAft>
                           <a:spcPts val="0"/>
                         </a:spcAft>
@@ -7700,7 +7791,7 @@
                           <a:solidFill>
                             <a:srgbClr val="14213D"/>
                           </a:solidFill>
-                          <a:latin typeface="Aptos"/>
+                          <a:latin typeface="Arial"/>
                         </a:rPr>
                         <a:t>Unknown</a:t>
                       </a:r>
@@ -7714,10 +7805,15 @@
                 </a:tc>
                 <a:tc>
                   <a:txBody>
-                    <a:bodyPr wrap="square"/>
+                    <a:bodyPr wrap="square">
+                      <a:normAutofit/>
+                    </a:bodyPr>
                     <a:lstStyle/>
                     <a:p>
                       <a:pPr>
+                        <a:lnSpc>
+                          <a:spcPct val="125000"/>
+                        </a:lnSpc>
                         <a:spcAft>
                           <a:spcPts val="0"/>
                         </a:spcAft>
@@ -7727,7 +7823,7 @@
                           <a:solidFill>
                             <a:srgbClr val="14213D"/>
                           </a:solidFill>
-                          <a:latin typeface="Aptos"/>
+                          <a:latin typeface="Arial"/>
                         </a:rPr>
                         <a:t>—</a:t>
                       </a:r>
@@ -7741,10 +7837,15 @@
                 </a:tc>
                 <a:tc>
                   <a:txBody>
-                    <a:bodyPr wrap="square"/>
+                    <a:bodyPr wrap="square">
+                      <a:normAutofit/>
+                    </a:bodyPr>
                     <a:lstStyle/>
                     <a:p>
                       <a:pPr>
+                        <a:lnSpc>
+                          <a:spcPct val="125000"/>
+                        </a:lnSpc>
                         <a:spcAft>
                           <a:spcPts val="0"/>
                         </a:spcAft>
@@ -7754,7 +7855,7 @@
                           <a:solidFill>
                             <a:srgbClr val="14213D"/>
                           </a:solidFill>
-                          <a:latin typeface="Aptos"/>
+                          <a:latin typeface="Arial"/>
                         </a:rPr>
                         <a:t>—</a:t>
                       </a:r>
@@ -7770,10 +7871,15 @@
               <a:tr h="784860">
                 <a:tc>
                   <a:txBody>
-                    <a:bodyPr wrap="square"/>
+                    <a:bodyPr wrap="square">
+                      <a:normAutofit/>
+                    </a:bodyPr>
                     <a:lstStyle/>
                     <a:p>
                       <a:pPr>
+                        <a:lnSpc>
+                          <a:spcPct val="125000"/>
+                        </a:lnSpc>
                         <a:spcAft>
                           <a:spcPts val="0"/>
                         </a:spcAft>
@@ -7783,9 +7889,28 @@
                           <a:solidFill>
                             <a:srgbClr val="14213D"/>
                           </a:solidFill>
-                          <a:latin typeface="Aptos"/>
+                          <a:latin typeface="Arial"/>
                         </a:rPr>
-                        <a:t>2327528063760</a:t>
+                        <a:t>2046884</a:t>
+                      </a:r>
+                    </a:p>
+                    <a:p>
+                      <a:pPr>
+                        <a:lnSpc>
+                          <a:spcPct val="125000"/>
+                        </a:lnSpc>
+                        <a:spcAft>
+                          <a:spcPts val="0"/>
+                        </a:spcAft>
+                      </a:pPr>
+                      <a:r>
+                        <a:rPr sz="900" b="0">
+                          <a:solidFill>
+                            <a:srgbClr val="14213D"/>
+                          </a:solidFill>
+                          <a:latin typeface="Arial"/>
+                        </a:rPr>
+                        <a:t>535632</a:t>
                       </a:r>
                     </a:p>
                   </a:txBody>
@@ -7797,10 +7922,15 @@
                 </a:tc>
                 <a:tc>
                   <a:txBody>
-                    <a:bodyPr wrap="square"/>
+                    <a:bodyPr wrap="square">
+                      <a:normAutofit/>
+                    </a:bodyPr>
                     <a:lstStyle/>
                     <a:p>
                       <a:pPr>
+                        <a:lnSpc>
+                          <a:spcPct val="125000"/>
+                        </a:lnSpc>
                         <a:spcAft>
                           <a:spcPts val="0"/>
                         </a:spcAft>
@@ -7810,9 +7940,9 @@
                           <a:solidFill>
                             <a:srgbClr val="14213D"/>
                           </a:solidFill>
-                          <a:latin typeface="Aptos"/>
+                          <a:latin typeface="Arial"/>
                         </a:rPr>
-                        <a:t>frother</a:t>
+                        <a:t>Frother</a:t>
                       </a:r>
                     </a:p>
                   </a:txBody>
@@ -7824,10 +7954,15 @@
                 </a:tc>
                 <a:tc>
                   <a:txBody>
-                    <a:bodyPr wrap="square"/>
+                    <a:bodyPr wrap="square">
+                      <a:normAutofit/>
+                    </a:bodyPr>
                     <a:lstStyle/>
                     <a:p>
                       <a:pPr>
+                        <a:lnSpc>
+                          <a:spcPct val="125000"/>
+                        </a:lnSpc>
                         <a:spcAft>
                           <a:spcPts val="0"/>
                         </a:spcAft>
@@ -7837,7 +7972,7 @@
                           <a:solidFill>
                             <a:srgbClr val="14213D"/>
                           </a:solidFill>
-                          <a:latin typeface="Aptos"/>
+                          <a:latin typeface="Arial"/>
                         </a:rPr>
                         <a:t>Unknown</a:t>
                       </a:r>
@@ -7851,10 +7986,15 @@
                 </a:tc>
                 <a:tc>
                   <a:txBody>
-                    <a:bodyPr wrap="square"/>
+                    <a:bodyPr wrap="square">
+                      <a:normAutofit/>
+                    </a:bodyPr>
                     <a:lstStyle/>
                     <a:p>
                       <a:pPr>
+                        <a:lnSpc>
+                          <a:spcPct val="125000"/>
+                        </a:lnSpc>
                         <a:spcAft>
                           <a:spcPts val="0"/>
                         </a:spcAft>
@@ -7864,7 +8004,7 @@
                           <a:solidFill>
                             <a:srgbClr val="14213D"/>
                           </a:solidFill>
-                          <a:latin typeface="Aptos"/>
+                          <a:latin typeface="Arial"/>
                         </a:rPr>
                         <a:t>Unknown</a:t>
                       </a:r>
@@ -7878,10 +8018,15 @@
                 </a:tc>
                 <a:tc>
                   <a:txBody>
-                    <a:bodyPr wrap="square"/>
+                    <a:bodyPr wrap="square">
+                      <a:normAutofit/>
+                    </a:bodyPr>
                     <a:lstStyle/>
                     <a:p>
                       <a:pPr>
+                        <a:lnSpc>
+                          <a:spcPct val="125000"/>
+                        </a:lnSpc>
                         <a:spcAft>
                           <a:spcPts val="0"/>
                         </a:spcAft>
@@ -7891,7 +8036,7 @@
                           <a:solidFill>
                             <a:srgbClr val="14213D"/>
                           </a:solidFill>
-                          <a:latin typeface="Aptos"/>
+                          <a:latin typeface="Arial"/>
                         </a:rPr>
                         <a:t>Unknown</a:t>
                       </a:r>
@@ -7905,10 +8050,15 @@
                 </a:tc>
                 <a:tc>
                   <a:txBody>
-                    <a:bodyPr wrap="square"/>
+                    <a:bodyPr wrap="square">
+                      <a:normAutofit/>
+                    </a:bodyPr>
                     <a:lstStyle/>
                     <a:p>
                       <a:pPr>
+                        <a:lnSpc>
+                          <a:spcPct val="125000"/>
+                        </a:lnSpc>
                         <a:spcAft>
                           <a:spcPts val="0"/>
                         </a:spcAft>
@@ -7918,7 +8068,7 @@
                           <a:solidFill>
                             <a:srgbClr val="14213D"/>
                           </a:solidFill>
-                          <a:latin typeface="Aptos"/>
+                          <a:latin typeface="Arial"/>
                         </a:rPr>
                         <a:t>—</a:t>
                       </a:r>
@@ -7932,10 +8082,15 @@
                 </a:tc>
                 <a:tc>
                   <a:txBody>
-                    <a:bodyPr wrap="square"/>
+                    <a:bodyPr wrap="square">
+                      <a:normAutofit/>
+                    </a:bodyPr>
                     <a:lstStyle/>
                     <a:p>
                       <a:pPr>
+                        <a:lnSpc>
+                          <a:spcPct val="125000"/>
+                        </a:lnSpc>
                         <a:spcAft>
                           <a:spcPts val="0"/>
                         </a:spcAft>
@@ -7945,7 +8100,7 @@
                           <a:solidFill>
                             <a:srgbClr val="14213D"/>
                           </a:solidFill>
-                          <a:latin typeface="Aptos"/>
+                          <a:latin typeface="Arial"/>
                         </a:rPr>
                         <a:t>—</a:t>
                       </a:r>
@@ -7961,10 +8116,15 @@
               <a:tr h="784860">
                 <a:tc>
                   <a:txBody>
-                    <a:bodyPr wrap="square"/>
+                    <a:bodyPr wrap="square">
+                      <a:normAutofit/>
+                    </a:bodyPr>
                     <a:lstStyle/>
                     <a:p>
                       <a:pPr>
+                        <a:lnSpc>
+                          <a:spcPct val="125000"/>
+                        </a:lnSpc>
                         <a:spcAft>
                           <a:spcPts val="0"/>
                         </a:spcAft>
@@ -7974,9 +8134,28 @@
                           <a:solidFill>
                             <a:srgbClr val="14213D"/>
                           </a:solidFill>
-                          <a:latin typeface="Aptos"/>
+                          <a:latin typeface="Arial"/>
                         </a:rPr>
-                        <a:t>2327528052176</a:t>
+                        <a:t>2046975</a:t>
+                      </a:r>
+                    </a:p>
+                    <a:p>
+                      <a:pPr>
+                        <a:lnSpc>
+                          <a:spcPct val="125000"/>
+                        </a:lnSpc>
+                        <a:spcAft>
+                          <a:spcPts val="0"/>
+                        </a:spcAft>
+                      </a:pPr>
+                      <a:r>
+                        <a:rPr sz="900" b="0">
+                          <a:solidFill>
+                            <a:srgbClr val="14213D"/>
+                          </a:solidFill>
+                          <a:latin typeface="Arial"/>
+                        </a:rPr>
+                        <a:t>404944</a:t>
                       </a:r>
                     </a:p>
                   </a:txBody>
@@ -7988,10 +8167,15 @@
                 </a:tc>
                 <a:tc>
                   <a:txBody>
-                    <a:bodyPr wrap="square"/>
+                    <a:bodyPr wrap="square">
+                      <a:normAutofit/>
+                    </a:bodyPr>
                     <a:lstStyle/>
                     <a:p>
                       <a:pPr>
+                        <a:lnSpc>
+                          <a:spcPct val="125000"/>
+                        </a:lnSpc>
                         <a:spcAft>
                           <a:spcPts val="0"/>
                         </a:spcAft>
@@ -8001,9 +8185,9 @@
                           <a:solidFill>
                             <a:srgbClr val="14213D"/>
                           </a:solidFill>
-                          <a:latin typeface="Aptos"/>
+                          <a:latin typeface="Arial"/>
                         </a:rPr>
-                        <a:t>heater</a:t>
+                        <a:t>Heater</a:t>
                       </a:r>
                     </a:p>
                   </a:txBody>
@@ -8015,10 +8199,15 @@
                 </a:tc>
                 <a:tc>
                   <a:txBody>
-                    <a:bodyPr wrap="square"/>
+                    <a:bodyPr wrap="square">
+                      <a:normAutofit/>
+                    </a:bodyPr>
                     <a:lstStyle/>
                     <a:p>
                       <a:pPr>
+                        <a:lnSpc>
+                          <a:spcPct val="125000"/>
+                        </a:lnSpc>
                         <a:spcAft>
                           <a:spcPts val="0"/>
                         </a:spcAft>
@@ -8028,7 +8217,7 @@
                           <a:solidFill>
                             <a:srgbClr val="14213D"/>
                           </a:solidFill>
-                          <a:latin typeface="Aptos"/>
+                          <a:latin typeface="Arial"/>
                         </a:rPr>
                         <a:t>Unknown</a:t>
                       </a:r>
@@ -8042,10 +8231,15 @@
                 </a:tc>
                 <a:tc>
                   <a:txBody>
-                    <a:bodyPr wrap="square"/>
+                    <a:bodyPr wrap="square">
+                      <a:normAutofit/>
+                    </a:bodyPr>
                     <a:lstStyle/>
                     <a:p>
                       <a:pPr>
+                        <a:lnSpc>
+                          <a:spcPct val="125000"/>
+                        </a:lnSpc>
                         <a:spcAft>
                           <a:spcPts val="0"/>
                         </a:spcAft>
@@ -8055,7 +8249,7 @@
                           <a:solidFill>
                             <a:srgbClr val="14213D"/>
                           </a:solidFill>
-                          <a:latin typeface="Aptos"/>
+                          <a:latin typeface="Arial"/>
                         </a:rPr>
                         <a:t>Unknown</a:t>
                       </a:r>
@@ -8069,10 +8263,15 @@
                 </a:tc>
                 <a:tc>
                   <a:txBody>
-                    <a:bodyPr wrap="square"/>
+                    <a:bodyPr wrap="square">
+                      <a:normAutofit/>
+                    </a:bodyPr>
                     <a:lstStyle/>
                     <a:p>
                       <a:pPr>
+                        <a:lnSpc>
+                          <a:spcPct val="125000"/>
+                        </a:lnSpc>
                         <a:spcAft>
                           <a:spcPts val="0"/>
                         </a:spcAft>
@@ -8082,7 +8281,7 @@
                           <a:solidFill>
                             <a:srgbClr val="14213D"/>
                           </a:solidFill>
-                          <a:latin typeface="Aptos"/>
+                          <a:latin typeface="Arial"/>
                         </a:rPr>
                         <a:t>Unknown</a:t>
                       </a:r>
@@ -8096,10 +8295,15 @@
                 </a:tc>
                 <a:tc>
                   <a:txBody>
-                    <a:bodyPr wrap="square"/>
+                    <a:bodyPr wrap="square">
+                      <a:normAutofit/>
+                    </a:bodyPr>
                     <a:lstStyle/>
                     <a:p>
                       <a:pPr>
+                        <a:lnSpc>
+                          <a:spcPct val="125000"/>
+                        </a:lnSpc>
                         <a:spcAft>
                           <a:spcPts val="0"/>
                         </a:spcAft>
@@ -8109,7 +8313,7 @@
                           <a:solidFill>
                             <a:srgbClr val="14213D"/>
                           </a:solidFill>
-                          <a:latin typeface="Aptos"/>
+                          <a:latin typeface="Arial"/>
                         </a:rPr>
                         <a:t>—</a:t>
                       </a:r>
@@ -8123,10 +8327,15 @@
                 </a:tc>
                 <a:tc>
                   <a:txBody>
-                    <a:bodyPr wrap="square"/>
+                    <a:bodyPr wrap="square">
+                      <a:normAutofit/>
+                    </a:bodyPr>
                     <a:lstStyle/>
                     <a:p>
                       <a:pPr>
+                        <a:lnSpc>
+                          <a:spcPct val="125000"/>
+                        </a:lnSpc>
                         <a:spcAft>
                           <a:spcPts val="0"/>
                         </a:spcAft>
@@ -8136,7 +8345,7 @@
                           <a:solidFill>
                             <a:srgbClr val="14213D"/>
                           </a:solidFill>
-                          <a:latin typeface="Aptos"/>
+                          <a:latin typeface="Arial"/>
                         </a:rPr>
                         <a:t>—</a:t>
                       </a:r>
@@ -8152,10 +8361,15 @@
               <a:tr h="784860">
                 <a:tc>
                   <a:txBody>
-                    <a:bodyPr wrap="square"/>
+                    <a:bodyPr wrap="square">
+                      <a:normAutofit/>
+                    </a:bodyPr>
                     <a:lstStyle/>
                     <a:p>
                       <a:pPr>
+                        <a:lnSpc>
+                          <a:spcPct val="125000"/>
+                        </a:lnSpc>
                         <a:spcAft>
                           <a:spcPts val="0"/>
                         </a:spcAft>
@@ -8165,9 +8379,28 @@
                           <a:solidFill>
                             <a:srgbClr val="14213D"/>
                           </a:solidFill>
-                          <a:latin typeface="Aptos"/>
+                          <a:latin typeface="Arial"/>
                         </a:rPr>
-                        <a:t>2327528049744</a:t>
+                        <a:t>2046970</a:t>
+                      </a:r>
+                    </a:p>
+                    <a:p>
+                      <a:pPr>
+                        <a:lnSpc>
+                          <a:spcPct val="125000"/>
+                        </a:lnSpc>
+                        <a:spcAft>
+                          <a:spcPts val="0"/>
+                        </a:spcAft>
+                      </a:pPr>
+                      <a:r>
+                        <a:rPr sz="900" b="0">
+                          <a:solidFill>
+                            <a:srgbClr val="14213D"/>
+                          </a:solidFill>
+                          <a:latin typeface="Arial"/>
+                        </a:rPr>
+                        <a:t>958032</a:t>
                       </a:r>
                     </a:p>
                   </a:txBody>
@@ -8179,10 +8412,15 @@
                 </a:tc>
                 <a:tc>
                   <a:txBody>
-                    <a:bodyPr wrap="square"/>
+                    <a:bodyPr wrap="square">
+                      <a:normAutofit/>
+                    </a:bodyPr>
                     <a:lstStyle/>
                     <a:p>
                       <a:pPr>
+                        <a:lnSpc>
+                          <a:spcPct val="125000"/>
+                        </a:lnSpc>
                         <a:spcAft>
                           <a:spcPts val="0"/>
                         </a:spcAft>
@@ -8192,9 +8430,9 @@
                           <a:solidFill>
                             <a:srgbClr val="14213D"/>
                           </a:solidFill>
-                          <a:latin typeface="Aptos"/>
+                          <a:latin typeface="Arial"/>
                         </a:rPr>
-                        <a:t>power cable</a:t>
+                        <a:t>Power cable</a:t>
                       </a:r>
                     </a:p>
                   </a:txBody>
@@ -8206,10 +8444,15 @@
                 </a:tc>
                 <a:tc>
                   <a:txBody>
-                    <a:bodyPr wrap="square"/>
+                    <a:bodyPr wrap="square">
+                      <a:normAutofit/>
+                    </a:bodyPr>
                     <a:lstStyle/>
                     <a:p>
                       <a:pPr>
+                        <a:lnSpc>
+                          <a:spcPct val="125000"/>
+                        </a:lnSpc>
                         <a:spcAft>
                           <a:spcPts val="0"/>
                         </a:spcAft>
@@ -8219,7 +8462,7 @@
                           <a:solidFill>
                             <a:srgbClr val="14213D"/>
                           </a:solidFill>
-                          <a:latin typeface="Aptos"/>
+                          <a:latin typeface="Arial"/>
                         </a:rPr>
                         <a:t>Unknown</a:t>
                       </a:r>
@@ -8233,10 +8476,15 @@
                 </a:tc>
                 <a:tc>
                   <a:txBody>
-                    <a:bodyPr wrap="square"/>
+                    <a:bodyPr wrap="square">
+                      <a:normAutofit/>
+                    </a:bodyPr>
                     <a:lstStyle/>
                     <a:p>
                       <a:pPr>
+                        <a:lnSpc>
+                          <a:spcPct val="125000"/>
+                        </a:lnSpc>
                         <a:spcAft>
                           <a:spcPts val="0"/>
                         </a:spcAft>
@@ -8246,7 +8494,7 @@
                           <a:solidFill>
                             <a:srgbClr val="14213D"/>
                           </a:solidFill>
-                          <a:latin typeface="Aptos"/>
+                          <a:latin typeface="Arial"/>
                         </a:rPr>
                         <a:t>Unknown</a:t>
                       </a:r>
@@ -8260,10 +8508,15 @@
                 </a:tc>
                 <a:tc>
                   <a:txBody>
-                    <a:bodyPr wrap="square"/>
+                    <a:bodyPr wrap="square">
+                      <a:normAutofit/>
+                    </a:bodyPr>
                     <a:lstStyle/>
                     <a:p>
                       <a:pPr>
+                        <a:lnSpc>
+                          <a:spcPct val="125000"/>
+                        </a:lnSpc>
                         <a:spcAft>
                           <a:spcPts val="0"/>
                         </a:spcAft>
@@ -8273,7 +8526,7 @@
                           <a:solidFill>
                             <a:srgbClr val="14213D"/>
                           </a:solidFill>
-                          <a:latin typeface="Aptos"/>
+                          <a:latin typeface="Arial"/>
                         </a:rPr>
                         <a:t>Unknown</a:t>
                       </a:r>
@@ -8287,10 +8540,15 @@
                 </a:tc>
                 <a:tc>
                   <a:txBody>
-                    <a:bodyPr wrap="square"/>
+                    <a:bodyPr wrap="square">
+                      <a:normAutofit/>
+                    </a:bodyPr>
                     <a:lstStyle/>
                     <a:p>
                       <a:pPr>
+                        <a:lnSpc>
+                          <a:spcPct val="125000"/>
+                        </a:lnSpc>
                         <a:spcAft>
                           <a:spcPts val="0"/>
                         </a:spcAft>
@@ -8300,7 +8558,7 @@
                           <a:solidFill>
                             <a:srgbClr val="14213D"/>
                           </a:solidFill>
-                          <a:latin typeface="Aptos"/>
+                          <a:latin typeface="Arial"/>
                         </a:rPr>
                         <a:t>—</a:t>
                       </a:r>
@@ -8314,10 +8572,15 @@
                 </a:tc>
                 <a:tc>
                   <a:txBody>
-                    <a:bodyPr wrap="square"/>
+                    <a:bodyPr wrap="square">
+                      <a:normAutofit/>
+                    </a:bodyPr>
                     <a:lstStyle/>
                     <a:p>
                       <a:pPr>
+                        <a:lnSpc>
+                          <a:spcPct val="125000"/>
+                        </a:lnSpc>
                         <a:spcAft>
                           <a:spcPts val="0"/>
                         </a:spcAft>
@@ -8327,7 +8590,7 @@
                           <a:solidFill>
                             <a:srgbClr val="14213D"/>
                           </a:solidFill>
-                          <a:latin typeface="Aptos"/>
+                          <a:latin typeface="Arial"/>
                         </a:rPr>
                         <a:t>—</a:t>
                       </a:r>
@@ -8343,10 +8606,15 @@
               <a:tr h="784860">
                 <a:tc>
                   <a:txBody>
-                    <a:bodyPr wrap="square"/>
+                    <a:bodyPr wrap="square">
+                      <a:normAutofit/>
+                    </a:bodyPr>
                     <a:lstStyle/>
                     <a:p>
                       <a:pPr>
+                        <a:lnSpc>
+                          <a:spcPct val="125000"/>
+                        </a:lnSpc>
                         <a:spcAft>
                           <a:spcPts val="0"/>
                         </a:spcAft>
@@ -8356,9 +8624,28 @@
                           <a:solidFill>
                             <a:srgbClr val="14213D"/>
                           </a:solidFill>
-                          <a:latin typeface="Aptos"/>
+                          <a:latin typeface="Arial"/>
                         </a:rPr>
-                        <a:t>2327528047824</a:t>
+                        <a:t>2046996</a:t>
+                      </a:r>
+                    </a:p>
+                    <a:p>
+                      <a:pPr>
+                        <a:lnSpc>
+                          <a:spcPct val="125000"/>
+                        </a:lnSpc>
+                        <a:spcAft>
+                          <a:spcPts val="0"/>
+                        </a:spcAft>
+                      </a:pPr>
+                      <a:r>
+                        <a:rPr sz="900" b="0">
+                          <a:solidFill>
+                            <a:srgbClr val="14213D"/>
+                          </a:solidFill>
+                          <a:latin typeface="Arial"/>
+                        </a:rPr>
+                        <a:t>689808</a:t>
                       </a:r>
                     </a:p>
                   </a:txBody>
@@ -8370,10 +8657,15 @@
                 </a:tc>
                 <a:tc>
                   <a:txBody>
-                    <a:bodyPr wrap="square"/>
+                    <a:bodyPr wrap="square">
+                      <a:normAutofit/>
+                    </a:bodyPr>
                     <a:lstStyle/>
                     <a:p>
                       <a:pPr>
+                        <a:lnSpc>
+                          <a:spcPct val="125000"/>
+                        </a:lnSpc>
                         <a:spcAft>
                           <a:spcPts val="0"/>
                         </a:spcAft>
@@ -8383,7 +8675,7 @@
                           <a:solidFill>
                             <a:srgbClr val="14213D"/>
                           </a:solidFill>
-                          <a:latin typeface="Aptos"/>
+                          <a:latin typeface="Arial"/>
                         </a:rPr>
                         <a:t>Component</a:t>
                       </a:r>
@@ -8397,10 +8689,15 @@
                 </a:tc>
                 <a:tc>
                   <a:txBody>
-                    <a:bodyPr wrap="square"/>
+                    <a:bodyPr wrap="square">
+                      <a:normAutofit/>
+                    </a:bodyPr>
                     <a:lstStyle/>
                     <a:p>
                       <a:pPr>
+                        <a:lnSpc>
+                          <a:spcPct val="125000"/>
+                        </a:lnSpc>
                         <a:spcAft>
                           <a:spcPts val="0"/>
                         </a:spcAft>
@@ -8410,7 +8707,7 @@
                           <a:solidFill>
                             <a:srgbClr val="14213D"/>
                           </a:solidFill>
-                          <a:latin typeface="Aptos"/>
+                          <a:latin typeface="Arial"/>
                         </a:rPr>
                         <a:t>Unknown</a:t>
                       </a:r>
@@ -8424,10 +8721,15 @@
                 </a:tc>
                 <a:tc>
                   <a:txBody>
-                    <a:bodyPr wrap="square"/>
+                    <a:bodyPr wrap="square">
+                      <a:normAutofit/>
+                    </a:bodyPr>
                     <a:lstStyle/>
                     <a:p>
                       <a:pPr>
+                        <a:lnSpc>
+                          <a:spcPct val="125000"/>
+                        </a:lnSpc>
                         <a:spcAft>
                           <a:spcPts val="0"/>
                         </a:spcAft>
@@ -8437,7 +8739,7 @@
                           <a:solidFill>
                             <a:srgbClr val="14213D"/>
                           </a:solidFill>
-                          <a:latin typeface="Aptos"/>
+                          <a:latin typeface="Arial"/>
                         </a:rPr>
                         <a:t>Unknown</a:t>
                       </a:r>
@@ -8451,10 +8753,15 @@
                 </a:tc>
                 <a:tc>
                   <a:txBody>
-                    <a:bodyPr wrap="square"/>
+                    <a:bodyPr wrap="square">
+                      <a:normAutofit/>
+                    </a:bodyPr>
                     <a:lstStyle/>
                     <a:p>
                       <a:pPr>
+                        <a:lnSpc>
+                          <a:spcPct val="125000"/>
+                        </a:lnSpc>
                         <a:spcAft>
                           <a:spcPts val="0"/>
                         </a:spcAft>
@@ -8464,7 +8771,7 @@
                           <a:solidFill>
                             <a:srgbClr val="14213D"/>
                           </a:solidFill>
-                          <a:latin typeface="Aptos"/>
+                          <a:latin typeface="Arial"/>
                         </a:rPr>
                         <a:t>Unknown</a:t>
                       </a:r>
@@ -8478,10 +8785,15 @@
                 </a:tc>
                 <a:tc>
                   <a:txBody>
-                    <a:bodyPr wrap="square"/>
+                    <a:bodyPr wrap="square">
+                      <a:normAutofit/>
+                    </a:bodyPr>
                     <a:lstStyle/>
                     <a:p>
                       <a:pPr>
+                        <a:lnSpc>
+                          <a:spcPct val="125000"/>
+                        </a:lnSpc>
                         <a:spcAft>
                           <a:spcPts val="0"/>
                         </a:spcAft>
@@ -8491,7 +8803,7 @@
                           <a:solidFill>
                             <a:srgbClr val="14213D"/>
                           </a:solidFill>
-                          <a:latin typeface="Aptos"/>
+                          <a:latin typeface="Arial"/>
                         </a:rPr>
                         <a:t>—</a:t>
                       </a:r>
@@ -8505,10 +8817,15 @@
                 </a:tc>
                 <a:tc>
                   <a:txBody>
-                    <a:bodyPr wrap="square"/>
+                    <a:bodyPr wrap="square">
+                      <a:normAutofit/>
+                    </a:bodyPr>
                     <a:lstStyle/>
                     <a:p>
                       <a:pPr>
+                        <a:lnSpc>
+                          <a:spcPct val="125000"/>
+                        </a:lnSpc>
                         <a:spcAft>
                           <a:spcPts val="0"/>
                         </a:spcAft>
@@ -8518,7 +8835,7 @@
                           <a:solidFill>
                             <a:srgbClr val="14213D"/>
                           </a:solidFill>
-                          <a:latin typeface="Aptos"/>
+                          <a:latin typeface="Arial"/>
                         </a:rPr>
                         <a:t>—</a:t>
                       </a:r>
@@ -8552,12 +8869,15 @@
           <a:noFill/>
         </p:spPr>
         <p:txBody>
-          <a:bodyPr wrap="square" lIns="27432" rIns="27432" tIns="27432" bIns="27432" anchor="t">
-            <a:spAutoFit/>
+          <a:bodyPr wrap="square" lIns="6583" rIns="6583" tIns="6583" bIns="6583" anchor="t">
+            <a:normAutofit/>
           </a:bodyPr>
           <a:lstStyle/>
           <a:p>
             <a:pPr algn="l">
+              <a:lnSpc>
+                <a:spcPct val="125000"/>
+              </a:lnSpc>
               <a:spcAft>
                 <a:spcPts val="0"/>
               </a:spcAft>
@@ -8567,7 +8887,7 @@
                 <a:solidFill>
                   <a:srgbClr val="64748B"/>
                 </a:solidFill>
-                <a:latin typeface="Aptos"/>
+                <a:latin typeface="Arial"/>
               </a:rPr>
               <a:t>Ninja Coffee Bar Single-Serve System CF111 30</a:t>
             </a:r>
@@ -8591,12 +8911,15 @@
           <a:noFill/>
         </p:spPr>
         <p:txBody>
-          <a:bodyPr wrap="square" lIns="27432" rIns="27432" tIns="27432" bIns="27432" anchor="t">
-            <a:spAutoFit/>
+          <a:bodyPr wrap="square" lIns="6583" rIns="6583" tIns="6583" bIns="6583" anchor="t">
+            <a:normAutofit/>
           </a:bodyPr>
           <a:lstStyle/>
           <a:p>
             <a:pPr algn="r">
+              <a:lnSpc>
+                <a:spcPct val="125000"/>
+              </a:lnSpc>
               <a:spcAft>
                 <a:spcPts val="0"/>
               </a:spcAft>
@@ -8606,7 +8929,7 @@
                 <a:solidFill>
                   <a:srgbClr val="64748B"/>
                 </a:solidFill>
-                <a:latin typeface="Aptos"/>
+                <a:latin typeface="Arial"/>
               </a:rPr>
               <a:t>5 / 11</a:t>
             </a:r>
@@ -8656,12 +8979,15 @@
           <a:noFill/>
         </p:spPr>
         <p:txBody>
-          <a:bodyPr wrap="square" lIns="27432" rIns="27432" tIns="27432" bIns="27432" anchor="t">
-            <a:spAutoFit/>
+          <a:bodyPr wrap="square" lIns="10241" rIns="10241" tIns="10241" bIns="10241" anchor="t">
+            <a:normAutofit/>
           </a:bodyPr>
           <a:lstStyle/>
           <a:p>
             <a:pPr algn="l">
+              <a:lnSpc>
+                <a:spcPct val="125000"/>
+              </a:lnSpc>
               <a:spcAft>
                 <a:spcPts val="0"/>
               </a:spcAft>
@@ -8671,7 +8997,7 @@
                 <a:solidFill>
                   <a:srgbClr val="19A7A0"/>
                 </a:solidFill>
-                <a:latin typeface="Aptos"/>
+                <a:latin typeface="Arial"/>
               </a:rPr>
               <a:t>ACTION GROUP 1</a:t>
             </a:r>
@@ -8695,12 +9021,15 @@
           <a:noFill/>
         </p:spPr>
         <p:txBody>
-          <a:bodyPr wrap="square" lIns="27432" rIns="27432" tIns="27432" bIns="27432" anchor="t">
-            <a:spAutoFit/>
+          <a:bodyPr wrap="square" lIns="20116" rIns="20116" tIns="20116" bIns="20116" anchor="t">
+            <a:normAutofit/>
           </a:bodyPr>
           <a:lstStyle/>
           <a:p>
             <a:pPr algn="l">
+              <a:lnSpc>
+                <a:spcPct val="125000"/>
+              </a:lnSpc>
               <a:spcAft>
                 <a:spcPts val="0"/>
               </a:spcAft>
@@ -8710,9 +9039,9 @@
                 <a:solidFill>
                   <a:srgbClr val="14213D"/>
                 </a:solidFill>
-                <a:latin typeface="Aptos"/>
-              </a:rPr>
-              <a:t>removing brew basket</a:t>
+                <a:latin typeface="Arial"/>
+              </a:rPr>
+              <a:t>Removing brew basket</a:t>
             </a:r>
           </a:p>
         </p:txBody>
@@ -8734,12 +9063,15 @@
           <a:noFill/>
         </p:spPr>
         <p:txBody>
-          <a:bodyPr wrap="square" lIns="27432" rIns="27432" tIns="27432" bIns="27432" anchor="t">
-            <a:spAutoFit/>
+          <a:bodyPr wrap="square" lIns="16459" rIns="16459" tIns="16459" bIns="16459" anchor="t">
+            <a:normAutofit/>
           </a:bodyPr>
           <a:lstStyle/>
           <a:p>
             <a:pPr algn="l">
+              <a:lnSpc>
+                <a:spcPct val="125000"/>
+              </a:lnSpc>
               <a:spcAft>
                 <a:spcPts val="0"/>
               </a:spcAft>
@@ -8749,7 +9081,7 @@
                 <a:solidFill>
                   <a:srgbClr val="64748B"/>
                 </a:solidFill>
-                <a:latin typeface="Aptos"/>
+                <a:latin typeface="Arial"/>
               </a:rPr>
               <a:t>Atomic actions are grouped under their parent disassembly operation.</a:t>
             </a:r>
@@ -8820,12 +9152,15 @@
           <a:noFill/>
         </p:spPr>
         <p:txBody>
-          <a:bodyPr wrap="square" lIns="27432" rIns="27432" tIns="27432" bIns="27432" anchor="t">
-            <a:spAutoFit/>
+          <a:bodyPr wrap="square" lIns="8046" rIns="8046" tIns="8046" bIns="8046" anchor="t">
+            <a:normAutofit/>
           </a:bodyPr>
           <a:lstStyle/>
           <a:p>
             <a:pPr algn="l">
+              <a:lnSpc>
+                <a:spcPct val="125000"/>
+              </a:lnSpc>
               <a:spcAft>
                 <a:spcPts val="0"/>
               </a:spcAft>
@@ -8835,7 +9170,7 @@
                 <a:solidFill>
                   <a:srgbClr val="14213D"/>
                 </a:solidFill>
-                <a:latin typeface="Aptos"/>
+                <a:latin typeface="Arial"/>
               </a:rPr>
               <a:t>Source: Ninja Coffee Bar Single-Serve System CF111 30 (Unknown)</a:t>
             </a:r>
@@ -8859,12 +9194,15 @@
           <a:noFill/>
         </p:spPr>
         <p:txBody>
-          <a:bodyPr wrap="square" lIns="27432" rIns="27432" tIns="27432" bIns="27432" anchor="t">
-            <a:spAutoFit/>
+          <a:bodyPr wrap="square" lIns="8046" rIns="8046" tIns="8046" bIns="8046" anchor="t">
+            <a:normAutofit/>
           </a:bodyPr>
           <a:lstStyle/>
           <a:p>
             <a:pPr algn="r">
+              <a:lnSpc>
+                <a:spcPct val="125000"/>
+              </a:lnSpc>
               <a:spcAft>
                 <a:spcPts val="0"/>
               </a:spcAft>
@@ -8874,7 +9212,7 @@
                 <a:solidFill>
                   <a:srgbClr val="19A7A0"/>
                 </a:solidFill>
-                <a:latin typeface="Aptos"/>
+                <a:latin typeface="Arial"/>
               </a:rPr>
               <a:t>explicit source</a:t>
             </a:r>
@@ -8945,12 +9283,15 @@
           <a:noFill/>
         </p:spPr>
         <p:txBody>
-          <a:bodyPr wrap="square" lIns="27432" rIns="27432" tIns="27432" bIns="27432" anchor="t">
-            <a:spAutoFit/>
+          <a:bodyPr wrap="square" lIns="9144" rIns="9144" tIns="9144" bIns="9144" anchor="t">
+            <a:normAutofit/>
           </a:bodyPr>
           <a:lstStyle/>
           <a:p>
             <a:pPr algn="l">
+              <a:lnSpc>
+                <a:spcPct val="125000"/>
+              </a:lnSpc>
               <a:spcAft>
                 <a:spcPts val="0"/>
               </a:spcAft>
@@ -8960,7 +9301,7 @@
                 <a:solidFill>
                   <a:srgbClr val="19A7A0"/>
                 </a:solidFill>
-                <a:latin typeface="Aptos"/>
+                <a:latin typeface="Arial"/>
               </a:rPr>
               <a:t>ATOMIC ACTIONS</a:t>
             </a:r>
@@ -9031,12 +9372,15 @@
           <a:noFill/>
         </p:spPr>
         <p:txBody>
-          <a:bodyPr wrap="square" lIns="27432" rIns="27432" tIns="27432" bIns="27432" anchor="ctr">
-            <a:spAutoFit/>
+          <a:bodyPr wrap="square" lIns="10241" rIns="10241" tIns="10241" bIns="10241" anchor="ctr">
+            <a:normAutofit/>
           </a:bodyPr>
           <a:lstStyle/>
           <a:p>
             <a:pPr algn="ctr">
+              <a:lnSpc>
+                <a:spcPct val="125000"/>
+              </a:lnSpc>
               <a:spcAft>
                 <a:spcPts val="0"/>
               </a:spcAft>
@@ -9046,7 +9390,7 @@
                 <a:solidFill>
                   <a:srgbClr val="FFFFFF"/>
                 </a:solidFill>
-                <a:latin typeface="Aptos"/>
+                <a:latin typeface="Arial"/>
               </a:rPr>
               <a:t>1</a:t>
             </a:r>
@@ -9070,12 +9414,15 @@
           <a:noFill/>
         </p:spPr>
         <p:txBody>
-          <a:bodyPr wrap="square" lIns="27432" rIns="27432" tIns="27432" bIns="27432" anchor="t">
-            <a:spAutoFit/>
+          <a:bodyPr wrap="square" lIns="19019" rIns="19019" tIns="19019" bIns="19019" anchor="t">
+            <a:normAutofit/>
           </a:bodyPr>
           <a:lstStyle/>
           <a:p>
             <a:pPr algn="l">
+              <a:lnSpc>
+                <a:spcPct val="125000"/>
+              </a:lnSpc>
               <a:spcAft>
                 <a:spcPts val="0"/>
               </a:spcAft>
@@ -9085,7 +9432,7 @@
                 <a:solidFill>
                   <a:srgbClr val="14213D"/>
                 </a:solidFill>
-                <a:latin typeface="Aptos"/>
+                <a:latin typeface="Arial"/>
               </a:rPr>
               <a:t>Slide the brew baskets to the open position.</a:t>
             </a:r>
@@ -9156,12 +9503,15 @@
           <a:noFill/>
         </p:spPr>
         <p:txBody>
-          <a:bodyPr wrap="square" lIns="27432" rIns="27432" tIns="27432" bIns="27432" anchor="ctr">
-            <a:spAutoFit/>
+          <a:bodyPr wrap="square" lIns="10241" rIns="10241" tIns="10241" bIns="10241" anchor="ctr">
+            <a:normAutofit/>
           </a:bodyPr>
           <a:lstStyle/>
           <a:p>
             <a:pPr algn="ctr">
+              <a:lnSpc>
+                <a:spcPct val="125000"/>
+              </a:lnSpc>
               <a:spcAft>
                 <a:spcPts val="0"/>
               </a:spcAft>
@@ -9171,7 +9521,7 @@
                 <a:solidFill>
                   <a:srgbClr val="FFFFFF"/>
                 </a:solidFill>
-                <a:latin typeface="Aptos"/>
+                <a:latin typeface="Arial"/>
               </a:rPr>
               <a:t>2</a:t>
             </a:r>
@@ -9195,12 +9545,15 @@
           <a:noFill/>
         </p:spPr>
         <p:txBody>
-          <a:bodyPr wrap="square" lIns="27432" rIns="27432" tIns="27432" bIns="27432" anchor="t">
-            <a:spAutoFit/>
+          <a:bodyPr wrap="square" lIns="19019" rIns="19019" tIns="19019" bIns="19019" anchor="t">
+            <a:normAutofit/>
           </a:bodyPr>
           <a:lstStyle/>
           <a:p>
             <a:pPr algn="l">
+              <a:lnSpc>
+                <a:spcPct val="125000"/>
+              </a:lnSpc>
               <a:spcAft>
                 <a:spcPts val="0"/>
               </a:spcAft>
@@ -9210,7 +9563,7 @@
                 <a:solidFill>
                   <a:srgbClr val="14213D"/>
                 </a:solidFill>
-                <a:latin typeface="Aptos"/>
+                <a:latin typeface="Arial"/>
               </a:rPr>
               <a:t>Remove three crews</a:t>
             </a:r>
@@ -9281,12 +9634,15 @@
           <a:noFill/>
         </p:spPr>
         <p:txBody>
-          <a:bodyPr wrap="square" lIns="27432" rIns="27432" tIns="27432" bIns="27432" anchor="ctr">
-            <a:spAutoFit/>
+          <a:bodyPr wrap="square" lIns="10241" rIns="10241" tIns="10241" bIns="10241" anchor="ctr">
+            <a:normAutofit/>
           </a:bodyPr>
           <a:lstStyle/>
           <a:p>
             <a:pPr algn="ctr">
+              <a:lnSpc>
+                <a:spcPct val="125000"/>
+              </a:lnSpc>
               <a:spcAft>
                 <a:spcPts val="0"/>
               </a:spcAft>
@@ -9296,7 +9652,7 @@
                 <a:solidFill>
                   <a:srgbClr val="FFFFFF"/>
                 </a:solidFill>
-                <a:latin typeface="Aptos"/>
+                <a:latin typeface="Arial"/>
               </a:rPr>
               <a:t>3</a:t>
             </a:r>
@@ -9320,12 +9676,15 @@
           <a:noFill/>
         </p:spPr>
         <p:txBody>
-          <a:bodyPr wrap="square" lIns="27432" rIns="27432" tIns="27432" bIns="27432" anchor="t">
-            <a:spAutoFit/>
+          <a:bodyPr wrap="square" lIns="19019" rIns="19019" tIns="19019" bIns="19019" anchor="t">
+            <a:normAutofit/>
           </a:bodyPr>
           <a:lstStyle/>
           <a:p>
             <a:pPr algn="l">
+              <a:lnSpc>
+                <a:spcPct val="125000"/>
+              </a:lnSpc>
               <a:spcAft>
                 <a:spcPts val="0"/>
               </a:spcAft>
@@ -9335,7 +9694,7 @@
                 <a:solidFill>
                   <a:srgbClr val="14213D"/>
                 </a:solidFill>
-                <a:latin typeface="Aptos"/>
+                <a:latin typeface="Arial"/>
               </a:rPr>
               <a:t>push the bottom of the pin up</a:t>
             </a:r>
@@ -9406,12 +9765,15 @@
           <a:noFill/>
         </p:spPr>
         <p:txBody>
-          <a:bodyPr wrap="square" lIns="27432" rIns="27432" tIns="27432" bIns="27432" anchor="ctr">
-            <a:spAutoFit/>
+          <a:bodyPr wrap="square" lIns="10241" rIns="10241" tIns="10241" bIns="10241" anchor="ctr">
+            <a:normAutofit/>
           </a:bodyPr>
           <a:lstStyle/>
           <a:p>
             <a:pPr algn="ctr">
+              <a:lnSpc>
+                <a:spcPct val="125000"/>
+              </a:lnSpc>
               <a:spcAft>
                 <a:spcPts val="0"/>
               </a:spcAft>
@@ -9421,7 +9783,7 @@
                 <a:solidFill>
                   <a:srgbClr val="FFFFFF"/>
                 </a:solidFill>
-                <a:latin typeface="Aptos"/>
+                <a:latin typeface="Arial"/>
               </a:rPr>
               <a:t>4</a:t>
             </a:r>
@@ -9445,12 +9807,15 @@
           <a:noFill/>
         </p:spPr>
         <p:txBody>
-          <a:bodyPr wrap="square" lIns="27432" rIns="27432" tIns="27432" bIns="27432" anchor="t">
-            <a:spAutoFit/>
+          <a:bodyPr wrap="square" lIns="19019" rIns="19019" tIns="19019" bIns="19019" anchor="t">
+            <a:normAutofit/>
           </a:bodyPr>
           <a:lstStyle/>
           <a:p>
             <a:pPr algn="l">
+              <a:lnSpc>
+                <a:spcPct val="125000"/>
+              </a:lnSpc>
               <a:spcAft>
                 <a:spcPts val="0"/>
               </a:spcAft>
@@ -9460,7 +9825,7 @@
                 <a:solidFill>
                   <a:srgbClr val="14213D"/>
                 </a:solidFill>
-                <a:latin typeface="Aptos"/>
+                <a:latin typeface="Arial"/>
               </a:rPr>
               <a:t>Remove brew basket from swinging basket holder</a:t>
             </a:r>
@@ -9531,12 +9896,15 @@
           <a:noFill/>
         </p:spPr>
         <p:txBody>
-          <a:bodyPr wrap="square" lIns="27432" rIns="27432" tIns="27432" bIns="27432" anchor="t">
-            <a:spAutoFit/>
+          <a:bodyPr wrap="square" lIns="8046" rIns="8046" tIns="8046" bIns="8046" anchor="t">
+            <a:normAutofit/>
           </a:bodyPr>
           <a:lstStyle/>
           <a:p>
             <a:pPr algn="l">
+              <a:lnSpc>
+                <a:spcPct val="125000"/>
+              </a:lnSpc>
               <a:spcAft>
                 <a:spcPts val="0"/>
               </a:spcAft>
@@ -9546,7 +9914,7 @@
                 <a:solidFill>
                   <a:srgbClr val="19A7A0"/>
                 </a:solidFill>
-                <a:latin typeface="Aptos"/>
+                <a:latin typeface="Arial"/>
               </a:rPr>
               <a:t>RESULT</a:t>
             </a:r>
@@ -9571,11 +9939,14 @@
         </p:spPr>
         <p:txBody>
           <a:bodyPr wrap="square" lIns="27432" rIns="27432" tIns="27432" bIns="27432" anchor="t">
-            <a:spAutoFit/>
+            <a:normAutofit/>
           </a:bodyPr>
           <a:lstStyle/>
           <a:p>
             <a:pPr algn="l">
+              <a:lnSpc>
+                <a:spcPct val="125000"/>
+              </a:lnSpc>
               <a:spcAft>
                 <a:spcPts val="0"/>
               </a:spcAft>
@@ -9585,9 +9956,9 @@
                 <a:solidFill>
                   <a:srgbClr val="14213D"/>
                 </a:solidFill>
-                <a:latin typeface="Aptos"/>
-              </a:rPr>
-              <a:t>• brew basket (Unknown)</a:t>
+                <a:latin typeface="Arial"/>
+              </a:rPr>
+              <a:t>• Brew basket (Unknown)</a:t>
             </a:r>
           </a:p>
         </p:txBody>
@@ -9609,12 +9980,15 @@
           <a:noFill/>
         </p:spPr>
         <p:txBody>
-          <a:bodyPr wrap="square" lIns="27432" rIns="27432" tIns="27432" bIns="27432" anchor="t">
-            <a:spAutoFit/>
+          <a:bodyPr wrap="square" lIns="7315" rIns="7315" tIns="7315" bIns="7315" anchor="t">
+            <a:normAutofit/>
           </a:bodyPr>
           <a:lstStyle/>
           <a:p>
             <a:pPr algn="l">
+              <a:lnSpc>
+                <a:spcPct val="125000"/>
+              </a:lnSpc>
               <a:spcAft>
                 <a:spcPts val="0"/>
               </a:spcAft>
@@ -9624,7 +9998,7 @@
                 <a:solidFill>
                   <a:srgbClr val="19A7A0"/>
                 </a:solidFill>
-                <a:latin typeface="Aptos"/>
+                <a:latin typeface="Arial"/>
               </a:rPr>
               <a:t>CONTINUES AS</a:t>
             </a:r>
@@ -9648,12 +10022,15 @@
           <a:noFill/>
         </p:spPr>
         <p:txBody>
-          <a:bodyPr wrap="square" lIns="27432" rIns="27432" tIns="27432" bIns="27432" anchor="t">
-            <a:spAutoFit/>
+          <a:bodyPr wrap="square" lIns="15361" rIns="15361" tIns="15361" bIns="15361" anchor="t">
+            <a:normAutofit/>
           </a:bodyPr>
           <a:lstStyle/>
           <a:p>
             <a:pPr algn="l">
+              <a:lnSpc>
+                <a:spcPct val="125000"/>
+              </a:lnSpc>
               <a:spcAft>
                 <a:spcPts val="0"/>
               </a:spcAft>
@@ -9663,7 +10040,7 @@
                 <a:solidFill>
                   <a:srgbClr val="14213D"/>
                 </a:solidFill>
-                <a:latin typeface="Aptos"/>
+                <a:latin typeface="Arial"/>
               </a:rPr>
               <a:t>• Component (Unknown)</a:t>
             </a:r>
@@ -9687,12 +10064,15 @@
           <a:noFill/>
         </p:spPr>
         <p:txBody>
-          <a:bodyPr wrap="square" lIns="27432" rIns="27432" tIns="27432" bIns="27432" anchor="t">
-            <a:spAutoFit/>
+          <a:bodyPr wrap="square" lIns="7315" rIns="7315" tIns="7315" bIns="7315" anchor="t">
+            <a:normAutofit/>
           </a:bodyPr>
           <a:lstStyle/>
           <a:p>
             <a:pPr algn="l">
+              <a:lnSpc>
+                <a:spcPct val="125000"/>
+              </a:lnSpc>
               <a:spcAft>
                 <a:spcPts val="0"/>
               </a:spcAft>
@@ -9702,7 +10082,7 @@
                 <a:solidFill>
                   <a:srgbClr val="19A7A0"/>
                 </a:solidFill>
-                <a:latin typeface="Aptos"/>
+                <a:latin typeface="Arial"/>
               </a:rPr>
               <a:t>TOOLS</a:t>
             </a:r>
@@ -9726,12 +10106,15 @@
           <a:noFill/>
         </p:spPr>
         <p:txBody>
-          <a:bodyPr wrap="square" lIns="27432" rIns="27432" tIns="27432" bIns="27432" anchor="t">
-            <a:spAutoFit/>
+          <a:bodyPr wrap="square" lIns="16459" rIns="16459" tIns="16459" bIns="16459" anchor="t">
+            <a:normAutofit/>
           </a:bodyPr>
           <a:lstStyle/>
           <a:p>
             <a:pPr algn="l">
+              <a:lnSpc>
+                <a:spcPct val="125000"/>
+              </a:lnSpc>
               <a:spcAft>
                 <a:spcPts val="0"/>
               </a:spcAft>
@@ -9741,7 +10124,7 @@
                 <a:solidFill>
                   <a:srgbClr val="14213D"/>
                 </a:solidFill>
-                <a:latin typeface="Aptos"/>
+                <a:latin typeface="Arial"/>
               </a:rPr>
               <a:t>No tools specified</a:t>
             </a:r>
@@ -9765,12 +10148,15 @@
           <a:noFill/>
         </p:spPr>
         <p:txBody>
-          <a:bodyPr wrap="square" lIns="27432" rIns="27432" tIns="27432" bIns="27432" anchor="t">
-            <a:spAutoFit/>
+          <a:bodyPr wrap="square" lIns="6583" rIns="6583" tIns="6583" bIns="6583" anchor="t">
+            <a:normAutofit/>
           </a:bodyPr>
           <a:lstStyle/>
           <a:p>
             <a:pPr algn="l">
+              <a:lnSpc>
+                <a:spcPct val="125000"/>
+              </a:lnSpc>
               <a:spcAft>
                 <a:spcPts val="0"/>
               </a:spcAft>
@@ -9780,7 +10166,7 @@
                 <a:solidFill>
                   <a:srgbClr val="64748B"/>
                 </a:solidFill>
-                <a:latin typeface="Aptos"/>
+                <a:latin typeface="Arial"/>
               </a:rPr>
               <a:t>Ninja Coffee Bar Single-Serve System CF111 30</a:t>
             </a:r>
@@ -9804,12 +10190,15 @@
           <a:noFill/>
         </p:spPr>
         <p:txBody>
-          <a:bodyPr wrap="square" lIns="27432" rIns="27432" tIns="27432" bIns="27432" anchor="t">
-            <a:spAutoFit/>
+          <a:bodyPr wrap="square" lIns="6583" rIns="6583" tIns="6583" bIns="6583" anchor="t">
+            <a:normAutofit/>
           </a:bodyPr>
           <a:lstStyle/>
           <a:p>
             <a:pPr algn="r">
+              <a:lnSpc>
+                <a:spcPct val="125000"/>
+              </a:lnSpc>
               <a:spcAft>
                 <a:spcPts val="0"/>
               </a:spcAft>
@@ -9819,7 +10208,7 @@
                 <a:solidFill>
                   <a:srgbClr val="64748B"/>
                 </a:solidFill>
-                <a:latin typeface="Aptos"/>
+                <a:latin typeface="Arial"/>
               </a:rPr>
               <a:t>6 / 11</a:t>
             </a:r>
@@ -9869,12 +10258,15 @@
           <a:noFill/>
         </p:spPr>
         <p:txBody>
-          <a:bodyPr wrap="square" lIns="27432" rIns="27432" tIns="27432" bIns="27432" anchor="t">
-            <a:spAutoFit/>
+          <a:bodyPr wrap="square" lIns="10241" rIns="10241" tIns="10241" bIns="10241" anchor="t">
+            <a:normAutofit/>
           </a:bodyPr>
           <a:lstStyle/>
           <a:p>
             <a:pPr algn="l">
+              <a:lnSpc>
+                <a:spcPct val="125000"/>
+              </a:lnSpc>
               <a:spcAft>
                 <a:spcPts val="0"/>
               </a:spcAft>
@@ -9884,7 +10276,7 @@
                 <a:solidFill>
                   <a:srgbClr val="19A7A0"/>
                 </a:solidFill>
-                <a:latin typeface="Aptos"/>
+                <a:latin typeface="Arial"/>
               </a:rPr>
               <a:t>ACTION GROUP 2</a:t>
             </a:r>
@@ -9908,12 +10300,15 @@
           <a:noFill/>
         </p:spPr>
         <p:txBody>
-          <a:bodyPr wrap="square" lIns="27432" rIns="27432" tIns="27432" bIns="27432" anchor="t">
-            <a:spAutoFit/>
+          <a:bodyPr wrap="square" lIns="20116" rIns="20116" tIns="20116" bIns="20116" anchor="t">
+            <a:normAutofit/>
           </a:bodyPr>
           <a:lstStyle/>
           <a:p>
             <a:pPr algn="l">
+              <a:lnSpc>
+                <a:spcPct val="125000"/>
+              </a:lnSpc>
               <a:spcAft>
                 <a:spcPts val="0"/>
               </a:spcAft>
@@ -9923,9 +10318,9 @@
                 <a:solidFill>
                   <a:srgbClr val="14213D"/>
                 </a:solidFill>
-                <a:latin typeface="Aptos"/>
-              </a:rPr>
-              <a:t>remove frother</a:t>
+                <a:latin typeface="Arial"/>
+              </a:rPr>
+              <a:t>Remove frother</a:t>
             </a:r>
           </a:p>
         </p:txBody>
@@ -9947,12 +10342,15 @@
           <a:noFill/>
         </p:spPr>
         <p:txBody>
-          <a:bodyPr wrap="square" lIns="27432" rIns="27432" tIns="27432" bIns="27432" anchor="t">
-            <a:spAutoFit/>
+          <a:bodyPr wrap="square" lIns="16459" rIns="16459" tIns="16459" bIns="16459" anchor="t">
+            <a:normAutofit/>
           </a:bodyPr>
           <a:lstStyle/>
           <a:p>
             <a:pPr algn="l">
+              <a:lnSpc>
+                <a:spcPct val="125000"/>
+              </a:lnSpc>
               <a:spcAft>
                 <a:spcPts val="0"/>
               </a:spcAft>
@@ -9962,7 +10360,7 @@
                 <a:solidFill>
                   <a:srgbClr val="64748B"/>
                 </a:solidFill>
-                <a:latin typeface="Aptos"/>
+                <a:latin typeface="Arial"/>
               </a:rPr>
               <a:t>Atomic actions are grouped under their parent disassembly operation.</a:t>
             </a:r>
@@ -10033,12 +10431,15 @@
           <a:noFill/>
         </p:spPr>
         <p:txBody>
-          <a:bodyPr wrap="square" lIns="27432" rIns="27432" tIns="27432" bIns="27432" anchor="t">
-            <a:spAutoFit/>
+          <a:bodyPr wrap="square" lIns="8046" rIns="8046" tIns="8046" bIns="8046" anchor="t">
+            <a:normAutofit/>
           </a:bodyPr>
           <a:lstStyle/>
           <a:p>
             <a:pPr algn="l">
+              <a:lnSpc>
+                <a:spcPct val="125000"/>
+              </a:lnSpc>
               <a:spcAft>
                 <a:spcPts val="0"/>
               </a:spcAft>
@@ -10048,7 +10449,7 @@
                 <a:solidFill>
                   <a:srgbClr val="14213D"/>
                 </a:solidFill>
-                <a:latin typeface="Aptos"/>
+                <a:latin typeface="Arial"/>
               </a:rPr>
               <a:t>Source: Component (Unknown)</a:t>
             </a:r>
@@ -10072,12 +10473,15 @@
           <a:noFill/>
         </p:spPr>
         <p:txBody>
-          <a:bodyPr wrap="square" lIns="27432" rIns="27432" tIns="27432" bIns="27432" anchor="t">
-            <a:spAutoFit/>
+          <a:bodyPr wrap="square" lIns="8046" rIns="8046" tIns="8046" bIns="8046" anchor="t">
+            <a:normAutofit/>
           </a:bodyPr>
           <a:lstStyle/>
           <a:p>
             <a:pPr algn="r">
+              <a:lnSpc>
+                <a:spcPct val="125000"/>
+              </a:lnSpc>
               <a:spcAft>
                 <a:spcPts val="0"/>
               </a:spcAft>
@@ -10087,7 +10491,7 @@
                 <a:solidFill>
                   <a:srgbClr val="19A7A0"/>
                 </a:solidFill>
-                <a:latin typeface="Aptos"/>
+                <a:latin typeface="Arial"/>
               </a:rPr>
               <a:t>explicit source</a:t>
             </a:r>
@@ -10158,12 +10562,15 @@
           <a:noFill/>
         </p:spPr>
         <p:txBody>
-          <a:bodyPr wrap="square" lIns="27432" rIns="27432" tIns="27432" bIns="27432" anchor="t">
-            <a:spAutoFit/>
+          <a:bodyPr wrap="square" lIns="9144" rIns="9144" tIns="9144" bIns="9144" anchor="t">
+            <a:normAutofit/>
           </a:bodyPr>
           <a:lstStyle/>
           <a:p>
             <a:pPr algn="l">
+              <a:lnSpc>
+                <a:spcPct val="125000"/>
+              </a:lnSpc>
               <a:spcAft>
                 <a:spcPts val="0"/>
               </a:spcAft>
@@ -10173,7 +10580,7 @@
                 <a:solidFill>
                   <a:srgbClr val="19A7A0"/>
                 </a:solidFill>
-                <a:latin typeface="Aptos"/>
+                <a:latin typeface="Arial"/>
               </a:rPr>
               <a:t>ATOMIC ACTIONS</a:t>
             </a:r>
@@ -10244,12 +10651,15 @@
           <a:noFill/>
         </p:spPr>
         <p:txBody>
-          <a:bodyPr wrap="square" lIns="27432" rIns="27432" tIns="27432" bIns="27432" anchor="ctr">
-            <a:spAutoFit/>
+          <a:bodyPr wrap="square" lIns="10241" rIns="10241" tIns="10241" bIns="10241" anchor="ctr">
+            <a:normAutofit/>
           </a:bodyPr>
           <a:lstStyle/>
           <a:p>
             <a:pPr algn="ctr">
+              <a:lnSpc>
+                <a:spcPct val="125000"/>
+              </a:lnSpc>
               <a:spcAft>
                 <a:spcPts val="0"/>
               </a:spcAft>
@@ -10259,7 +10669,7 @@
                 <a:solidFill>
                   <a:srgbClr val="FFFFFF"/>
                 </a:solidFill>
-                <a:latin typeface="Aptos"/>
+                <a:latin typeface="Arial"/>
               </a:rPr>
               <a:t>1</a:t>
             </a:r>
@@ -10283,12 +10693,15 @@
           <a:noFill/>
         </p:spPr>
         <p:txBody>
-          <a:bodyPr wrap="square" lIns="27432" rIns="27432" tIns="27432" bIns="27432" anchor="t">
-            <a:spAutoFit/>
+          <a:bodyPr wrap="square" lIns="19019" rIns="19019" tIns="19019" bIns="19019" anchor="t">
+            <a:normAutofit/>
           </a:bodyPr>
           <a:lstStyle/>
           <a:p>
             <a:pPr algn="l">
+              <a:lnSpc>
+                <a:spcPct val="125000"/>
+              </a:lnSpc>
               <a:spcAft>
                 <a:spcPts val="0"/>
               </a:spcAft>
@@ -10298,7 +10711,7 @@
                 <a:solidFill>
                   <a:srgbClr val="14213D"/>
                 </a:solidFill>
-                <a:latin typeface="Aptos"/>
+                <a:latin typeface="Arial"/>
               </a:rPr>
               <a:t>Remove four screws from under the basket area.</a:t>
             </a:r>
@@ -10369,12 +10782,15 @@
           <a:noFill/>
         </p:spPr>
         <p:txBody>
-          <a:bodyPr wrap="square" lIns="27432" rIns="27432" tIns="27432" bIns="27432" anchor="ctr">
-            <a:spAutoFit/>
+          <a:bodyPr wrap="square" lIns="10241" rIns="10241" tIns="10241" bIns="10241" anchor="ctr">
+            <a:normAutofit/>
           </a:bodyPr>
           <a:lstStyle/>
           <a:p>
             <a:pPr algn="ctr">
+              <a:lnSpc>
+                <a:spcPct val="125000"/>
+              </a:lnSpc>
               <a:spcAft>
                 <a:spcPts val="0"/>
               </a:spcAft>
@@ -10384,7 +10800,7 @@
                 <a:solidFill>
                   <a:srgbClr val="FFFFFF"/>
                 </a:solidFill>
-                <a:latin typeface="Aptos"/>
+                <a:latin typeface="Arial"/>
               </a:rPr>
               <a:t>2</a:t>
             </a:r>
@@ -10408,12 +10824,15 @@
           <a:noFill/>
         </p:spPr>
         <p:txBody>
-          <a:bodyPr wrap="square" lIns="27432" rIns="27432" tIns="27432" bIns="27432" anchor="t">
-            <a:spAutoFit/>
+          <a:bodyPr wrap="square" lIns="19019" rIns="19019" tIns="19019" bIns="19019" anchor="t">
+            <a:normAutofit/>
           </a:bodyPr>
           <a:lstStyle/>
           <a:p>
             <a:pPr algn="l">
+              <a:lnSpc>
+                <a:spcPct val="125000"/>
+              </a:lnSpc>
               <a:spcAft>
                 <a:spcPts val="0"/>
               </a:spcAft>
@@ -10423,7 +10842,7 @@
                 <a:solidFill>
                   <a:srgbClr val="14213D"/>
                 </a:solidFill>
-                <a:latin typeface="Aptos"/>
+                <a:latin typeface="Arial"/>
               </a:rPr>
               <a:t>pry the upper cover off the unit</a:t>
             </a:r>
@@ -10494,12 +10913,15 @@
           <a:noFill/>
         </p:spPr>
         <p:txBody>
-          <a:bodyPr wrap="square" lIns="27432" rIns="27432" tIns="27432" bIns="27432" anchor="ctr">
-            <a:spAutoFit/>
+          <a:bodyPr wrap="square" lIns="10241" rIns="10241" tIns="10241" bIns="10241" anchor="ctr">
+            <a:normAutofit/>
           </a:bodyPr>
           <a:lstStyle/>
           <a:p>
             <a:pPr algn="ctr">
+              <a:lnSpc>
+                <a:spcPct val="125000"/>
+              </a:lnSpc>
               <a:spcAft>
                 <a:spcPts val="0"/>
               </a:spcAft>
@@ -10509,7 +10931,7 @@
                 <a:solidFill>
                   <a:srgbClr val="FFFFFF"/>
                 </a:solidFill>
-                <a:latin typeface="Aptos"/>
+                <a:latin typeface="Arial"/>
               </a:rPr>
               <a:t>3</a:t>
             </a:r>
@@ -10533,12 +10955,15 @@
           <a:noFill/>
         </p:spPr>
         <p:txBody>
-          <a:bodyPr wrap="square" lIns="27432" rIns="27432" tIns="27432" bIns="27432" anchor="t">
-            <a:spAutoFit/>
+          <a:bodyPr wrap="square" lIns="19019" rIns="19019" tIns="19019" bIns="19019" anchor="t">
+            <a:normAutofit/>
           </a:bodyPr>
           <a:lstStyle/>
           <a:p>
             <a:pPr algn="l">
+              <a:lnSpc>
+                <a:spcPct val="125000"/>
+              </a:lnSpc>
               <a:spcAft>
                 <a:spcPts val="0"/>
               </a:spcAft>
@@ -10548,7 +10973,7 @@
                 <a:solidFill>
                   <a:srgbClr val="14213D"/>
                 </a:solidFill>
-                <a:latin typeface="Aptos"/>
+                <a:latin typeface="Arial"/>
               </a:rPr>
               <a:t>Remove one screw from the top of the unit</a:t>
             </a:r>
@@ -10619,12 +11044,15 @@
           <a:noFill/>
         </p:spPr>
         <p:txBody>
-          <a:bodyPr wrap="square" lIns="27432" rIns="27432" tIns="27432" bIns="27432" anchor="ctr">
-            <a:spAutoFit/>
+          <a:bodyPr wrap="square" lIns="10241" rIns="10241" tIns="10241" bIns="10241" anchor="ctr">
+            <a:normAutofit/>
           </a:bodyPr>
           <a:lstStyle/>
           <a:p>
             <a:pPr algn="ctr">
+              <a:lnSpc>
+                <a:spcPct val="125000"/>
+              </a:lnSpc>
               <a:spcAft>
                 <a:spcPts val="0"/>
               </a:spcAft>
@@ -10634,7 +11062,7 @@
                 <a:solidFill>
                   <a:srgbClr val="FFFFFF"/>
                 </a:solidFill>
-                <a:latin typeface="Aptos"/>
+                <a:latin typeface="Arial"/>
               </a:rPr>
               <a:t>4</a:t>
             </a:r>
@@ -10658,12 +11086,15 @@
           <a:noFill/>
         </p:spPr>
         <p:txBody>
-          <a:bodyPr wrap="square" lIns="27432" rIns="27432" tIns="27432" bIns="27432" anchor="t">
-            <a:spAutoFit/>
+          <a:bodyPr wrap="square" lIns="19019" rIns="19019" tIns="19019" bIns="19019" anchor="t">
+            <a:normAutofit/>
           </a:bodyPr>
           <a:lstStyle/>
           <a:p>
             <a:pPr algn="l">
+              <a:lnSpc>
+                <a:spcPct val="125000"/>
+              </a:lnSpc>
               <a:spcAft>
                 <a:spcPts val="0"/>
               </a:spcAft>
@@ -10673,7 +11104,7 @@
                 <a:solidFill>
                   <a:srgbClr val="14213D"/>
                 </a:solidFill>
-                <a:latin typeface="Aptos"/>
+                <a:latin typeface="Arial"/>
               </a:rPr>
               <a:t>Pull motor straight up</a:t>
             </a:r>
@@ -10744,12 +11175,15 @@
           <a:noFill/>
         </p:spPr>
         <p:txBody>
-          <a:bodyPr wrap="square" lIns="27432" rIns="27432" tIns="27432" bIns="27432" anchor="t">
-            <a:spAutoFit/>
+          <a:bodyPr wrap="square" lIns="8046" rIns="8046" tIns="8046" bIns="8046" anchor="t">
+            <a:normAutofit/>
           </a:bodyPr>
           <a:lstStyle/>
           <a:p>
             <a:pPr algn="l">
+              <a:lnSpc>
+                <a:spcPct val="125000"/>
+              </a:lnSpc>
               <a:spcAft>
                 <a:spcPts val="0"/>
               </a:spcAft>
@@ -10759,7 +11193,7 @@
                 <a:solidFill>
                   <a:srgbClr val="19A7A0"/>
                 </a:solidFill>
-                <a:latin typeface="Aptos"/>
+                <a:latin typeface="Arial"/>
               </a:rPr>
               <a:t>RESULT</a:t>
             </a:r>
@@ -10784,11 +11218,14 @@
         </p:spPr>
         <p:txBody>
           <a:bodyPr wrap="square" lIns="27432" rIns="27432" tIns="27432" bIns="27432" anchor="t">
-            <a:spAutoFit/>
+            <a:normAutofit/>
           </a:bodyPr>
           <a:lstStyle/>
           <a:p>
             <a:pPr algn="l">
+              <a:lnSpc>
+                <a:spcPct val="125000"/>
+              </a:lnSpc>
               <a:spcAft>
                 <a:spcPts val="0"/>
               </a:spcAft>
@@ -10798,9 +11235,9 @@
                 <a:solidFill>
                   <a:srgbClr val="14213D"/>
                 </a:solidFill>
-                <a:latin typeface="Aptos"/>
-              </a:rPr>
-              <a:t>• frother (Unknown)</a:t>
+                <a:latin typeface="Arial"/>
+              </a:rPr>
+              <a:t>• Frother (Unknown)</a:t>
             </a:r>
           </a:p>
         </p:txBody>
@@ -10822,12 +11259,15 @@
           <a:noFill/>
         </p:spPr>
         <p:txBody>
-          <a:bodyPr wrap="square" lIns="27432" rIns="27432" tIns="27432" bIns="27432" anchor="t">
-            <a:spAutoFit/>
+          <a:bodyPr wrap="square" lIns="7315" rIns="7315" tIns="7315" bIns="7315" anchor="t">
+            <a:normAutofit/>
           </a:bodyPr>
           <a:lstStyle/>
           <a:p>
             <a:pPr algn="l">
+              <a:lnSpc>
+                <a:spcPct val="125000"/>
+              </a:lnSpc>
               <a:spcAft>
                 <a:spcPts val="0"/>
               </a:spcAft>
@@ -10837,7 +11277,7 @@
                 <a:solidFill>
                   <a:srgbClr val="19A7A0"/>
                 </a:solidFill>
-                <a:latin typeface="Aptos"/>
+                <a:latin typeface="Arial"/>
               </a:rPr>
               <a:t>CONTINUES AS</a:t>
             </a:r>
@@ -10861,12 +11301,15 @@
           <a:noFill/>
         </p:spPr>
         <p:txBody>
-          <a:bodyPr wrap="square" lIns="27432" rIns="27432" tIns="27432" bIns="27432" anchor="t">
-            <a:spAutoFit/>
+          <a:bodyPr wrap="square" lIns="15361" rIns="15361" tIns="15361" bIns="15361" anchor="t">
+            <a:normAutofit/>
           </a:bodyPr>
           <a:lstStyle/>
           <a:p>
             <a:pPr algn="l">
+              <a:lnSpc>
+                <a:spcPct val="125000"/>
+              </a:lnSpc>
               <a:spcAft>
                 <a:spcPts val="0"/>
               </a:spcAft>
@@ -10876,7 +11319,7 @@
                 <a:solidFill>
                   <a:srgbClr val="14213D"/>
                 </a:solidFill>
-                <a:latin typeface="Aptos"/>
+                <a:latin typeface="Arial"/>
               </a:rPr>
               <a:t>• Component (Unknown)</a:t>
             </a:r>
@@ -10900,12 +11343,15 @@
           <a:noFill/>
         </p:spPr>
         <p:txBody>
-          <a:bodyPr wrap="square" lIns="27432" rIns="27432" tIns="27432" bIns="27432" anchor="t">
-            <a:spAutoFit/>
+          <a:bodyPr wrap="square" lIns="7315" rIns="7315" tIns="7315" bIns="7315" anchor="t">
+            <a:normAutofit/>
           </a:bodyPr>
           <a:lstStyle/>
           <a:p>
             <a:pPr algn="l">
+              <a:lnSpc>
+                <a:spcPct val="125000"/>
+              </a:lnSpc>
               <a:spcAft>
                 <a:spcPts val="0"/>
               </a:spcAft>
@@ -10915,7 +11361,7 @@
                 <a:solidFill>
                   <a:srgbClr val="19A7A0"/>
                 </a:solidFill>
-                <a:latin typeface="Aptos"/>
+                <a:latin typeface="Arial"/>
               </a:rPr>
               <a:t>TOOLS</a:t>
             </a:r>
@@ -10939,12 +11385,15 @@
           <a:noFill/>
         </p:spPr>
         <p:txBody>
-          <a:bodyPr wrap="square" lIns="27432" rIns="27432" tIns="27432" bIns="27432" anchor="t">
-            <a:spAutoFit/>
+          <a:bodyPr wrap="square" lIns="16459" rIns="16459" tIns="16459" bIns="16459" anchor="t">
+            <a:normAutofit/>
           </a:bodyPr>
           <a:lstStyle/>
           <a:p>
             <a:pPr algn="l">
+              <a:lnSpc>
+                <a:spcPct val="125000"/>
+              </a:lnSpc>
               <a:spcAft>
                 <a:spcPts val="0"/>
               </a:spcAft>
@@ -10954,7 +11403,7 @@
                 <a:solidFill>
                   <a:srgbClr val="14213D"/>
                 </a:solidFill>
-                <a:latin typeface="Aptos"/>
+                <a:latin typeface="Arial"/>
               </a:rPr>
               <a:t>No tools specified</a:t>
             </a:r>
@@ -10978,12 +11427,15 @@
           <a:noFill/>
         </p:spPr>
         <p:txBody>
-          <a:bodyPr wrap="square" lIns="27432" rIns="27432" tIns="27432" bIns="27432" anchor="t">
-            <a:spAutoFit/>
+          <a:bodyPr wrap="square" lIns="6583" rIns="6583" tIns="6583" bIns="6583" anchor="t">
+            <a:normAutofit/>
           </a:bodyPr>
           <a:lstStyle/>
           <a:p>
             <a:pPr algn="l">
+              <a:lnSpc>
+                <a:spcPct val="125000"/>
+              </a:lnSpc>
               <a:spcAft>
                 <a:spcPts val="0"/>
               </a:spcAft>
@@ -10993,7 +11445,7 @@
                 <a:solidFill>
                   <a:srgbClr val="64748B"/>
                 </a:solidFill>
-                <a:latin typeface="Aptos"/>
+                <a:latin typeface="Arial"/>
               </a:rPr>
               <a:t>Ninja Coffee Bar Single-Serve System CF111 30</a:t>
             </a:r>
@@ -11017,12 +11469,15 @@
           <a:noFill/>
         </p:spPr>
         <p:txBody>
-          <a:bodyPr wrap="square" lIns="27432" rIns="27432" tIns="27432" bIns="27432" anchor="t">
-            <a:spAutoFit/>
+          <a:bodyPr wrap="square" lIns="6583" rIns="6583" tIns="6583" bIns="6583" anchor="t">
+            <a:normAutofit/>
           </a:bodyPr>
           <a:lstStyle/>
           <a:p>
             <a:pPr algn="r">
+              <a:lnSpc>
+                <a:spcPct val="125000"/>
+              </a:lnSpc>
               <a:spcAft>
                 <a:spcPts val="0"/>
               </a:spcAft>
@@ -11032,7 +11487,7 @@
                 <a:solidFill>
                   <a:srgbClr val="64748B"/>
                 </a:solidFill>
-                <a:latin typeface="Aptos"/>
+                <a:latin typeface="Arial"/>
               </a:rPr>
               <a:t>7 / 11</a:t>
             </a:r>
@@ -11082,12 +11537,15 @@
           <a:noFill/>
         </p:spPr>
         <p:txBody>
-          <a:bodyPr wrap="square" lIns="27432" rIns="27432" tIns="27432" bIns="27432" anchor="t">
-            <a:spAutoFit/>
+          <a:bodyPr wrap="square" lIns="10241" rIns="10241" tIns="10241" bIns="10241" anchor="t">
+            <a:normAutofit/>
           </a:bodyPr>
           <a:lstStyle/>
           <a:p>
             <a:pPr algn="l">
+              <a:lnSpc>
+                <a:spcPct val="125000"/>
+              </a:lnSpc>
               <a:spcAft>
                 <a:spcPts val="0"/>
               </a:spcAft>
@@ -11097,7 +11555,7 @@
                 <a:solidFill>
                   <a:srgbClr val="19A7A0"/>
                 </a:solidFill>
-                <a:latin typeface="Aptos"/>
+                <a:latin typeface="Arial"/>
               </a:rPr>
               <a:t>ACTION GROUP 3</a:t>
             </a:r>
@@ -11121,12 +11579,15 @@
           <a:noFill/>
         </p:spPr>
         <p:txBody>
-          <a:bodyPr wrap="square" lIns="27432" rIns="27432" tIns="27432" bIns="27432" anchor="t">
-            <a:spAutoFit/>
+          <a:bodyPr wrap="square" lIns="20116" rIns="20116" tIns="20116" bIns="20116" anchor="t">
+            <a:normAutofit/>
           </a:bodyPr>
           <a:lstStyle/>
           <a:p>
             <a:pPr algn="l">
+              <a:lnSpc>
+                <a:spcPct val="125000"/>
+              </a:lnSpc>
               <a:spcAft>
                 <a:spcPts val="0"/>
               </a:spcAft>
@@ -11136,7 +11597,7 @@
                 <a:solidFill>
                   <a:srgbClr val="14213D"/>
                 </a:solidFill>
-                <a:latin typeface="Aptos"/>
+                <a:latin typeface="Arial"/>
               </a:rPr>
               <a:t>Remove Heater · part 1/2</a:t>
             </a:r>
@@ -11160,12 +11621,15 @@
           <a:noFill/>
         </p:spPr>
         <p:txBody>
-          <a:bodyPr wrap="square" lIns="27432" rIns="27432" tIns="27432" bIns="27432" anchor="t">
-            <a:spAutoFit/>
+          <a:bodyPr wrap="square" lIns="16459" rIns="16459" tIns="16459" bIns="16459" anchor="t">
+            <a:normAutofit/>
           </a:bodyPr>
           <a:lstStyle/>
           <a:p>
             <a:pPr algn="l">
+              <a:lnSpc>
+                <a:spcPct val="125000"/>
+              </a:lnSpc>
               <a:spcAft>
                 <a:spcPts val="0"/>
               </a:spcAft>
@@ -11175,7 +11639,7 @@
                 <a:solidFill>
                   <a:srgbClr val="64748B"/>
                 </a:solidFill>
-                <a:latin typeface="Aptos"/>
+                <a:latin typeface="Arial"/>
               </a:rPr>
               <a:t>Atomic actions are grouped under their parent disassembly operation.</a:t>
             </a:r>
@@ -11246,12 +11710,15 @@
           <a:noFill/>
         </p:spPr>
         <p:txBody>
-          <a:bodyPr wrap="square" lIns="27432" rIns="27432" tIns="27432" bIns="27432" anchor="t">
-            <a:spAutoFit/>
+          <a:bodyPr wrap="square" lIns="8046" rIns="8046" tIns="8046" bIns="8046" anchor="t">
+            <a:normAutofit/>
           </a:bodyPr>
           <a:lstStyle/>
           <a:p>
             <a:pPr algn="l">
+              <a:lnSpc>
+                <a:spcPct val="125000"/>
+              </a:lnSpc>
               <a:spcAft>
                 <a:spcPts val="0"/>
               </a:spcAft>
@@ -11261,7 +11728,7 @@
                 <a:solidFill>
                   <a:srgbClr val="14213D"/>
                 </a:solidFill>
-                <a:latin typeface="Aptos"/>
+                <a:latin typeface="Arial"/>
               </a:rPr>
               <a:t>Source: Component (Unknown)</a:t>
             </a:r>
@@ -11285,12 +11752,15 @@
           <a:noFill/>
         </p:spPr>
         <p:txBody>
-          <a:bodyPr wrap="square" lIns="27432" rIns="27432" tIns="27432" bIns="27432" anchor="t">
-            <a:spAutoFit/>
+          <a:bodyPr wrap="square" lIns="8046" rIns="8046" tIns="8046" bIns="8046" anchor="t">
+            <a:normAutofit/>
           </a:bodyPr>
           <a:lstStyle/>
           <a:p>
             <a:pPr algn="r">
+              <a:lnSpc>
+                <a:spcPct val="125000"/>
+              </a:lnSpc>
               <a:spcAft>
                 <a:spcPts val="0"/>
               </a:spcAft>
@@ -11300,7 +11770,7 @@
                 <a:solidFill>
                   <a:srgbClr val="19A7A0"/>
                 </a:solidFill>
-                <a:latin typeface="Aptos"/>
+                <a:latin typeface="Arial"/>
               </a:rPr>
               <a:t>explicit source</a:t>
             </a:r>
@@ -11371,12 +11841,15 @@
           <a:noFill/>
         </p:spPr>
         <p:txBody>
-          <a:bodyPr wrap="square" lIns="27432" rIns="27432" tIns="27432" bIns="27432" anchor="t">
-            <a:spAutoFit/>
+          <a:bodyPr wrap="square" lIns="9144" rIns="9144" tIns="9144" bIns="9144" anchor="t">
+            <a:normAutofit/>
           </a:bodyPr>
           <a:lstStyle/>
           <a:p>
             <a:pPr algn="l">
+              <a:lnSpc>
+                <a:spcPct val="125000"/>
+              </a:lnSpc>
               <a:spcAft>
                 <a:spcPts val="0"/>
               </a:spcAft>
@@ -11386,7 +11859,7 @@
                 <a:solidFill>
                   <a:srgbClr val="19A7A0"/>
                 </a:solidFill>
-                <a:latin typeface="Aptos"/>
+                <a:latin typeface="Arial"/>
               </a:rPr>
               <a:t>ATOMIC ACTIONS</a:t>
             </a:r>
@@ -11457,12 +11930,15 @@
           <a:noFill/>
         </p:spPr>
         <p:txBody>
-          <a:bodyPr wrap="square" lIns="27432" rIns="27432" tIns="27432" bIns="27432" anchor="ctr">
-            <a:spAutoFit/>
+          <a:bodyPr wrap="square" lIns="10241" rIns="10241" tIns="10241" bIns="10241" anchor="ctr">
+            <a:normAutofit/>
           </a:bodyPr>
           <a:lstStyle/>
           <a:p>
             <a:pPr algn="ctr">
+              <a:lnSpc>
+                <a:spcPct val="125000"/>
+              </a:lnSpc>
               <a:spcAft>
                 <a:spcPts val="0"/>
               </a:spcAft>
@@ -11472,7 +11948,7 @@
                 <a:solidFill>
                   <a:srgbClr val="FFFFFF"/>
                 </a:solidFill>
-                <a:latin typeface="Aptos"/>
+                <a:latin typeface="Arial"/>
               </a:rPr>
               <a:t>1</a:t>
             </a:r>
@@ -11496,12 +11972,15 @@
           <a:noFill/>
         </p:spPr>
         <p:txBody>
-          <a:bodyPr wrap="square" lIns="27432" rIns="27432" tIns="27432" bIns="27432" anchor="t">
-            <a:spAutoFit/>
+          <a:bodyPr wrap="square" lIns="19019" rIns="19019" tIns="19019" bIns="19019" anchor="t">
+            <a:normAutofit/>
           </a:bodyPr>
           <a:lstStyle/>
           <a:p>
             <a:pPr algn="l">
+              <a:lnSpc>
+                <a:spcPct val="125000"/>
+              </a:lnSpc>
               <a:spcAft>
                 <a:spcPts val="0"/>
               </a:spcAft>
@@ -11511,7 +11990,7 @@
                 <a:solidFill>
                   <a:srgbClr val="14213D"/>
                 </a:solidFill>
-                <a:latin typeface="Aptos"/>
+                <a:latin typeface="Arial"/>
               </a:rPr>
               <a:t>Remove six crews from the bottom of the unit</a:t>
             </a:r>
@@ -11582,12 +12061,15 @@
           <a:noFill/>
         </p:spPr>
         <p:txBody>
-          <a:bodyPr wrap="square" lIns="27432" rIns="27432" tIns="27432" bIns="27432" anchor="ctr">
-            <a:spAutoFit/>
+          <a:bodyPr wrap="square" lIns="10241" rIns="10241" tIns="10241" bIns="10241" anchor="ctr">
+            <a:normAutofit/>
           </a:bodyPr>
           <a:lstStyle/>
           <a:p>
             <a:pPr algn="ctr">
+              <a:lnSpc>
+                <a:spcPct val="125000"/>
+              </a:lnSpc>
               <a:spcAft>
                 <a:spcPts val="0"/>
               </a:spcAft>
@@ -11597,7 +12079,7 @@
                 <a:solidFill>
                   <a:srgbClr val="FFFFFF"/>
                 </a:solidFill>
-                <a:latin typeface="Aptos"/>
+                <a:latin typeface="Arial"/>
               </a:rPr>
               <a:t>2</a:t>
             </a:r>
@@ -11621,12 +12103,15 @@
           <a:noFill/>
         </p:spPr>
         <p:txBody>
-          <a:bodyPr wrap="square" lIns="27432" rIns="27432" tIns="27432" bIns="27432" anchor="t">
-            <a:spAutoFit/>
+          <a:bodyPr wrap="square" lIns="19019" rIns="19019" tIns="19019" bIns="19019" anchor="t">
+            <a:normAutofit/>
           </a:bodyPr>
           <a:lstStyle/>
           <a:p>
             <a:pPr algn="l">
+              <a:lnSpc>
+                <a:spcPct val="125000"/>
+              </a:lnSpc>
               <a:spcAft>
                 <a:spcPts val="0"/>
               </a:spcAft>
@@ -11636,7 +12121,7 @@
                 <a:solidFill>
                   <a:srgbClr val="14213D"/>
                 </a:solidFill>
-                <a:latin typeface="Aptos"/>
+                <a:latin typeface="Arial"/>
               </a:rPr>
               <a:t>Remove the bottom cover</a:t>
             </a:r>
@@ -11707,12 +12192,15 @@
           <a:noFill/>
         </p:spPr>
         <p:txBody>
-          <a:bodyPr wrap="square" lIns="27432" rIns="27432" tIns="27432" bIns="27432" anchor="ctr">
-            <a:spAutoFit/>
+          <a:bodyPr wrap="square" lIns="10241" rIns="10241" tIns="10241" bIns="10241" anchor="ctr">
+            <a:normAutofit/>
           </a:bodyPr>
           <a:lstStyle/>
           <a:p>
             <a:pPr algn="ctr">
+              <a:lnSpc>
+                <a:spcPct val="125000"/>
+              </a:lnSpc>
               <a:spcAft>
                 <a:spcPts val="0"/>
               </a:spcAft>
@@ -11722,7 +12210,7 @@
                 <a:solidFill>
                   <a:srgbClr val="FFFFFF"/>
                 </a:solidFill>
-                <a:latin typeface="Aptos"/>
+                <a:latin typeface="Arial"/>
               </a:rPr>
               <a:t>3</a:t>
             </a:r>
@@ -11746,12 +12234,15 @@
           <a:noFill/>
         </p:spPr>
         <p:txBody>
-          <a:bodyPr wrap="square" lIns="27432" rIns="27432" tIns="27432" bIns="27432" anchor="t">
-            <a:spAutoFit/>
+          <a:bodyPr wrap="square" lIns="19019" rIns="19019" tIns="19019" bIns="19019" anchor="t">
+            <a:normAutofit/>
           </a:bodyPr>
           <a:lstStyle/>
           <a:p>
             <a:pPr algn="l">
+              <a:lnSpc>
+                <a:spcPct val="125000"/>
+              </a:lnSpc>
               <a:spcAft>
                 <a:spcPts val="0"/>
               </a:spcAft>
@@ -11761,7 +12252,7 @@
                 <a:solidFill>
                   <a:srgbClr val="14213D"/>
                 </a:solidFill>
-                <a:latin typeface="Aptos"/>
+                <a:latin typeface="Arial"/>
               </a:rPr>
               <a:t>Remove 6 screws</a:t>
             </a:r>
@@ -11832,12 +12323,15 @@
           <a:noFill/>
         </p:spPr>
         <p:txBody>
-          <a:bodyPr wrap="square" lIns="27432" rIns="27432" tIns="27432" bIns="27432" anchor="ctr">
-            <a:spAutoFit/>
+          <a:bodyPr wrap="square" lIns="10241" rIns="10241" tIns="10241" bIns="10241" anchor="ctr">
+            <a:normAutofit/>
           </a:bodyPr>
           <a:lstStyle/>
           <a:p>
             <a:pPr algn="ctr">
+              <a:lnSpc>
+                <a:spcPct val="125000"/>
+              </a:lnSpc>
               <a:spcAft>
                 <a:spcPts val="0"/>
               </a:spcAft>
@@ -11847,7 +12341,7 @@
                 <a:solidFill>
                   <a:srgbClr val="FFFFFF"/>
                 </a:solidFill>
-                <a:latin typeface="Aptos"/>
+                <a:latin typeface="Arial"/>
               </a:rPr>
               <a:t>4</a:t>
             </a:r>
@@ -11871,12 +12365,15 @@
           <a:noFill/>
         </p:spPr>
         <p:txBody>
-          <a:bodyPr wrap="square" lIns="27432" rIns="27432" tIns="27432" bIns="27432" anchor="t">
-            <a:spAutoFit/>
+          <a:bodyPr wrap="square" lIns="19019" rIns="19019" tIns="19019" bIns="19019" anchor="t">
+            <a:normAutofit/>
           </a:bodyPr>
           <a:lstStyle/>
           <a:p>
             <a:pPr algn="l">
+              <a:lnSpc>
+                <a:spcPct val="125000"/>
+              </a:lnSpc>
               <a:spcAft>
                 <a:spcPts val="0"/>
               </a:spcAft>
@@ -11886,7 +12383,7 @@
                 <a:solidFill>
                   <a:srgbClr val="14213D"/>
                 </a:solidFill>
-                <a:latin typeface="Aptos"/>
+                <a:latin typeface="Arial"/>
               </a:rPr>
               <a:t>Remove plastiv cover</a:t>
             </a:r>
@@ -11957,12 +12454,15 @@
           <a:noFill/>
         </p:spPr>
         <p:txBody>
-          <a:bodyPr wrap="square" lIns="27432" rIns="27432" tIns="27432" bIns="27432" anchor="ctr">
-            <a:spAutoFit/>
+          <a:bodyPr wrap="square" lIns="10241" rIns="10241" tIns="10241" bIns="10241" anchor="ctr">
+            <a:normAutofit/>
           </a:bodyPr>
           <a:lstStyle/>
           <a:p>
             <a:pPr algn="ctr">
+              <a:lnSpc>
+                <a:spcPct val="125000"/>
+              </a:lnSpc>
               <a:spcAft>
                 <a:spcPts val="0"/>
               </a:spcAft>
@@ -11972,7 +12472,7 @@
                 <a:solidFill>
                   <a:srgbClr val="FFFFFF"/>
                 </a:solidFill>
-                <a:latin typeface="Aptos"/>
+                <a:latin typeface="Arial"/>
               </a:rPr>
               <a:t>5</a:t>
             </a:r>
@@ -11996,12 +12496,15 @@
           <a:noFill/>
         </p:spPr>
         <p:txBody>
-          <a:bodyPr wrap="square" lIns="27432" rIns="27432" tIns="27432" bIns="27432" anchor="t">
-            <a:spAutoFit/>
+          <a:bodyPr wrap="square" lIns="19019" rIns="19019" tIns="19019" bIns="19019" anchor="t">
+            <a:normAutofit/>
           </a:bodyPr>
           <a:lstStyle/>
           <a:p>
             <a:pPr algn="l">
+              <a:lnSpc>
+                <a:spcPct val="125000"/>
+              </a:lnSpc>
               <a:spcAft>
                 <a:spcPts val="0"/>
               </a:spcAft>
@@ -12011,7 +12514,7 @@
                 <a:solidFill>
                   <a:srgbClr val="14213D"/>
                 </a:solidFill>
-                <a:latin typeface="Aptos"/>
+                <a:latin typeface="Arial"/>
               </a:rPr>
               <a:t>Detach the valve tubes</a:t>
             </a:r>
@@ -12082,12 +12585,15 @@
           <a:noFill/>
         </p:spPr>
         <p:txBody>
-          <a:bodyPr wrap="square" lIns="27432" rIns="27432" tIns="27432" bIns="27432" anchor="ctr">
-            <a:spAutoFit/>
+          <a:bodyPr wrap="square" lIns="10241" rIns="10241" tIns="10241" bIns="10241" anchor="ctr">
+            <a:normAutofit/>
           </a:bodyPr>
           <a:lstStyle/>
           <a:p>
             <a:pPr algn="ctr">
+              <a:lnSpc>
+                <a:spcPct val="125000"/>
+              </a:lnSpc>
               <a:spcAft>
                 <a:spcPts val="0"/>
               </a:spcAft>
@@ -12097,7 +12603,7 @@
                 <a:solidFill>
                   <a:srgbClr val="FFFFFF"/>
                 </a:solidFill>
-                <a:latin typeface="Aptos"/>
+                <a:latin typeface="Arial"/>
               </a:rPr>
               <a:t>6</a:t>
             </a:r>
@@ -12121,12 +12627,15 @@
           <a:noFill/>
         </p:spPr>
         <p:txBody>
-          <a:bodyPr wrap="square" lIns="27432" rIns="27432" tIns="27432" bIns="27432" anchor="t">
-            <a:spAutoFit/>
+          <a:bodyPr wrap="square" lIns="19019" rIns="19019" tIns="19019" bIns="19019" anchor="t">
+            <a:normAutofit/>
           </a:bodyPr>
           <a:lstStyle/>
           <a:p>
             <a:pPr algn="l">
+              <a:lnSpc>
+                <a:spcPct val="125000"/>
+              </a:lnSpc>
               <a:spcAft>
                 <a:spcPts val="0"/>
               </a:spcAft>
@@ -12136,7 +12645,7 @@
                 <a:solidFill>
                   <a:srgbClr val="14213D"/>
                 </a:solidFill>
-                <a:latin typeface="Aptos"/>
+                <a:latin typeface="Arial"/>
               </a:rPr>
               <a:t>Remove 6 screws</a:t>
             </a:r>
@@ -12207,12 +12716,15 @@
           <a:noFill/>
         </p:spPr>
         <p:txBody>
-          <a:bodyPr wrap="square" lIns="27432" rIns="27432" tIns="27432" bIns="27432" anchor="t">
-            <a:spAutoFit/>
+          <a:bodyPr wrap="square" lIns="8046" rIns="8046" tIns="8046" bIns="8046" anchor="t">
+            <a:normAutofit/>
           </a:bodyPr>
           <a:lstStyle/>
           <a:p>
             <a:pPr algn="l">
+              <a:lnSpc>
+                <a:spcPct val="125000"/>
+              </a:lnSpc>
               <a:spcAft>
                 <a:spcPts val="0"/>
               </a:spcAft>
@@ -12222,7 +12734,7 @@
                 <a:solidFill>
                   <a:srgbClr val="19A7A0"/>
                 </a:solidFill>
-                <a:latin typeface="Aptos"/>
+                <a:latin typeface="Arial"/>
               </a:rPr>
               <a:t>RESULT</a:t>
             </a:r>
@@ -12247,11 +12759,14 @@
         </p:spPr>
         <p:txBody>
           <a:bodyPr wrap="square" lIns="27432" rIns="27432" tIns="27432" bIns="27432" anchor="t">
-            <a:spAutoFit/>
+            <a:normAutofit/>
           </a:bodyPr>
           <a:lstStyle/>
           <a:p>
             <a:pPr algn="l">
+              <a:lnSpc>
+                <a:spcPct val="125000"/>
+              </a:lnSpc>
               <a:spcAft>
                 <a:spcPts val="0"/>
               </a:spcAft>
@@ -12261,9 +12776,9 @@
                 <a:solidFill>
                   <a:srgbClr val="14213D"/>
                 </a:solidFill>
-                <a:latin typeface="Aptos"/>
-              </a:rPr>
-              <a:t>• heater (Unknown)</a:t>
+                <a:latin typeface="Arial"/>
+              </a:rPr>
+              <a:t>• Heater (Unknown)</a:t>
             </a:r>
           </a:p>
         </p:txBody>
@@ -12285,12 +12800,15 @@
           <a:noFill/>
         </p:spPr>
         <p:txBody>
-          <a:bodyPr wrap="square" lIns="27432" rIns="27432" tIns="27432" bIns="27432" anchor="t">
-            <a:spAutoFit/>
+          <a:bodyPr wrap="square" lIns="7315" rIns="7315" tIns="7315" bIns="7315" anchor="t">
+            <a:normAutofit/>
           </a:bodyPr>
           <a:lstStyle/>
           <a:p>
             <a:pPr algn="l">
+              <a:lnSpc>
+                <a:spcPct val="125000"/>
+              </a:lnSpc>
               <a:spcAft>
                 <a:spcPts val="0"/>
               </a:spcAft>
@@ -12300,7 +12818,7 @@
                 <a:solidFill>
                   <a:srgbClr val="19A7A0"/>
                 </a:solidFill>
-                <a:latin typeface="Aptos"/>
+                <a:latin typeface="Arial"/>
               </a:rPr>
               <a:t>CONTINUES AS</a:t>
             </a:r>
@@ -12324,12 +12842,15 @@
           <a:noFill/>
         </p:spPr>
         <p:txBody>
-          <a:bodyPr wrap="square" lIns="27432" rIns="27432" tIns="27432" bIns="27432" anchor="t">
-            <a:spAutoFit/>
+          <a:bodyPr wrap="square" lIns="15361" rIns="15361" tIns="15361" bIns="15361" anchor="t">
+            <a:normAutofit/>
           </a:bodyPr>
           <a:lstStyle/>
           <a:p>
             <a:pPr algn="l">
+              <a:lnSpc>
+                <a:spcPct val="125000"/>
+              </a:lnSpc>
               <a:spcAft>
                 <a:spcPts val="0"/>
               </a:spcAft>
@@ -12339,7 +12860,7 @@
                 <a:solidFill>
                   <a:srgbClr val="14213D"/>
                 </a:solidFill>
-                <a:latin typeface="Aptos"/>
+                <a:latin typeface="Arial"/>
               </a:rPr>
               <a:t>• Component (Unknown)</a:t>
             </a:r>
@@ -12363,12 +12884,15 @@
           <a:noFill/>
         </p:spPr>
         <p:txBody>
-          <a:bodyPr wrap="square" lIns="27432" rIns="27432" tIns="27432" bIns="27432" anchor="t">
-            <a:spAutoFit/>
+          <a:bodyPr wrap="square" lIns="7315" rIns="7315" tIns="7315" bIns="7315" anchor="t">
+            <a:normAutofit/>
           </a:bodyPr>
           <a:lstStyle/>
           <a:p>
             <a:pPr algn="l">
+              <a:lnSpc>
+                <a:spcPct val="125000"/>
+              </a:lnSpc>
               <a:spcAft>
                 <a:spcPts val="0"/>
               </a:spcAft>
@@ -12378,7 +12902,7 @@
                 <a:solidFill>
                   <a:srgbClr val="19A7A0"/>
                 </a:solidFill>
-                <a:latin typeface="Aptos"/>
+                <a:latin typeface="Arial"/>
               </a:rPr>
               <a:t>TOOLS</a:t>
             </a:r>
@@ -12402,12 +12926,15 @@
           <a:noFill/>
         </p:spPr>
         <p:txBody>
-          <a:bodyPr wrap="square" lIns="27432" rIns="27432" tIns="27432" bIns="27432" anchor="t">
-            <a:spAutoFit/>
+          <a:bodyPr wrap="square" lIns="16459" rIns="16459" tIns="16459" bIns="16459" anchor="t">
+            <a:normAutofit/>
           </a:bodyPr>
           <a:lstStyle/>
           <a:p>
             <a:pPr algn="l">
+              <a:lnSpc>
+                <a:spcPct val="125000"/>
+              </a:lnSpc>
               <a:spcAft>
                 <a:spcPts val="0"/>
               </a:spcAft>
@@ -12417,7 +12944,7 @@
                 <a:solidFill>
                   <a:srgbClr val="14213D"/>
                 </a:solidFill>
-                <a:latin typeface="Aptos"/>
+                <a:latin typeface="Arial"/>
               </a:rPr>
               <a:t>No tools specified</a:t>
             </a:r>
@@ -12441,12 +12968,15 @@
           <a:noFill/>
         </p:spPr>
         <p:txBody>
-          <a:bodyPr wrap="square" lIns="27432" rIns="27432" tIns="27432" bIns="27432" anchor="t">
-            <a:spAutoFit/>
+          <a:bodyPr wrap="square" lIns="6583" rIns="6583" tIns="6583" bIns="6583" anchor="t">
+            <a:normAutofit/>
           </a:bodyPr>
           <a:lstStyle/>
           <a:p>
             <a:pPr algn="l">
+              <a:lnSpc>
+                <a:spcPct val="125000"/>
+              </a:lnSpc>
               <a:spcAft>
                 <a:spcPts val="0"/>
               </a:spcAft>
@@ -12456,7 +12986,7 @@
                 <a:solidFill>
                   <a:srgbClr val="64748B"/>
                 </a:solidFill>
-                <a:latin typeface="Aptos"/>
+                <a:latin typeface="Arial"/>
               </a:rPr>
               <a:t>Ninja Coffee Bar Single-Serve System CF111 30</a:t>
             </a:r>
@@ -12480,12 +13010,15 @@
           <a:noFill/>
         </p:spPr>
         <p:txBody>
-          <a:bodyPr wrap="square" lIns="27432" rIns="27432" tIns="27432" bIns="27432" anchor="t">
-            <a:spAutoFit/>
+          <a:bodyPr wrap="square" lIns="6583" rIns="6583" tIns="6583" bIns="6583" anchor="t">
+            <a:normAutofit/>
           </a:bodyPr>
           <a:lstStyle/>
           <a:p>
             <a:pPr algn="r">
+              <a:lnSpc>
+                <a:spcPct val="125000"/>
+              </a:lnSpc>
               <a:spcAft>
                 <a:spcPts val="0"/>
               </a:spcAft>
@@ -12495,7 +13028,7 @@
                 <a:solidFill>
                   <a:srgbClr val="64748B"/>
                 </a:solidFill>
-                <a:latin typeface="Aptos"/>
+                <a:latin typeface="Arial"/>
               </a:rPr>
               <a:t>8 / 11</a:t>
             </a:r>
@@ -12545,12 +13078,15 @@
           <a:noFill/>
         </p:spPr>
         <p:txBody>
-          <a:bodyPr wrap="square" lIns="27432" rIns="27432" tIns="27432" bIns="27432" anchor="t">
-            <a:spAutoFit/>
+          <a:bodyPr wrap="square" lIns="10241" rIns="10241" tIns="10241" bIns="10241" anchor="t">
+            <a:normAutofit/>
           </a:bodyPr>
           <a:lstStyle/>
           <a:p>
             <a:pPr algn="l">
+              <a:lnSpc>
+                <a:spcPct val="125000"/>
+              </a:lnSpc>
               <a:spcAft>
                 <a:spcPts val="0"/>
               </a:spcAft>
@@ -12560,7 +13096,7 @@
                 <a:solidFill>
                   <a:srgbClr val="19A7A0"/>
                 </a:solidFill>
-                <a:latin typeface="Aptos"/>
+                <a:latin typeface="Arial"/>
               </a:rPr>
               <a:t>ACTION GROUP 3</a:t>
             </a:r>
@@ -12584,12 +13120,15 @@
           <a:noFill/>
         </p:spPr>
         <p:txBody>
-          <a:bodyPr wrap="square" lIns="27432" rIns="27432" tIns="27432" bIns="27432" anchor="t">
-            <a:spAutoFit/>
+          <a:bodyPr wrap="square" lIns="20116" rIns="20116" tIns="20116" bIns="20116" anchor="t">
+            <a:normAutofit/>
           </a:bodyPr>
           <a:lstStyle/>
           <a:p>
             <a:pPr algn="l">
+              <a:lnSpc>
+                <a:spcPct val="125000"/>
+              </a:lnSpc>
               <a:spcAft>
                 <a:spcPts val="0"/>
               </a:spcAft>
@@ -12599,7 +13138,7 @@
                 <a:solidFill>
                   <a:srgbClr val="14213D"/>
                 </a:solidFill>
-                <a:latin typeface="Aptos"/>
+                <a:latin typeface="Arial"/>
               </a:rPr>
               <a:t>Remove Heater · part 2/2</a:t>
             </a:r>
@@ -12623,12 +13162,15 @@
           <a:noFill/>
         </p:spPr>
         <p:txBody>
-          <a:bodyPr wrap="square" lIns="27432" rIns="27432" tIns="27432" bIns="27432" anchor="t">
-            <a:spAutoFit/>
+          <a:bodyPr wrap="square" lIns="16459" rIns="16459" tIns="16459" bIns="16459" anchor="t">
+            <a:normAutofit/>
           </a:bodyPr>
           <a:lstStyle/>
           <a:p>
             <a:pPr algn="l">
+              <a:lnSpc>
+                <a:spcPct val="125000"/>
+              </a:lnSpc>
               <a:spcAft>
                 <a:spcPts val="0"/>
               </a:spcAft>
@@ -12638,7 +13180,7 @@
                 <a:solidFill>
                   <a:srgbClr val="64748B"/>
                 </a:solidFill>
-                <a:latin typeface="Aptos"/>
+                <a:latin typeface="Arial"/>
               </a:rPr>
               <a:t>Atomic actions are grouped under their parent disassembly operation.</a:t>
             </a:r>
@@ -12709,12 +13251,15 @@
           <a:noFill/>
         </p:spPr>
         <p:txBody>
-          <a:bodyPr wrap="square" lIns="27432" rIns="27432" tIns="27432" bIns="27432" anchor="t">
-            <a:spAutoFit/>
+          <a:bodyPr wrap="square" lIns="8046" rIns="8046" tIns="8046" bIns="8046" anchor="t">
+            <a:normAutofit/>
           </a:bodyPr>
           <a:lstStyle/>
           <a:p>
             <a:pPr algn="l">
+              <a:lnSpc>
+                <a:spcPct val="125000"/>
+              </a:lnSpc>
               <a:spcAft>
                 <a:spcPts val="0"/>
               </a:spcAft>
@@ -12724,7 +13269,7 @@
                 <a:solidFill>
                   <a:srgbClr val="14213D"/>
                 </a:solidFill>
-                <a:latin typeface="Aptos"/>
+                <a:latin typeface="Arial"/>
               </a:rPr>
               <a:t>Source: Component (Unknown)</a:t>
             </a:r>
@@ -12748,12 +13293,15 @@
           <a:noFill/>
         </p:spPr>
         <p:txBody>
-          <a:bodyPr wrap="square" lIns="27432" rIns="27432" tIns="27432" bIns="27432" anchor="t">
-            <a:spAutoFit/>
+          <a:bodyPr wrap="square" lIns="8046" rIns="8046" tIns="8046" bIns="8046" anchor="t">
+            <a:normAutofit/>
           </a:bodyPr>
           <a:lstStyle/>
           <a:p>
             <a:pPr algn="r">
+              <a:lnSpc>
+                <a:spcPct val="125000"/>
+              </a:lnSpc>
               <a:spcAft>
                 <a:spcPts val="0"/>
               </a:spcAft>
@@ -12763,7 +13311,7 @@
                 <a:solidFill>
                   <a:srgbClr val="19A7A0"/>
                 </a:solidFill>
-                <a:latin typeface="Aptos"/>
+                <a:latin typeface="Arial"/>
               </a:rPr>
               <a:t>explicit source</a:t>
             </a:r>
@@ -12834,12 +13382,15 @@
           <a:noFill/>
         </p:spPr>
         <p:txBody>
-          <a:bodyPr wrap="square" lIns="27432" rIns="27432" tIns="27432" bIns="27432" anchor="t">
-            <a:spAutoFit/>
+          <a:bodyPr wrap="square" lIns="9144" rIns="9144" tIns="9144" bIns="9144" anchor="t">
+            <a:normAutofit/>
           </a:bodyPr>
           <a:lstStyle/>
           <a:p>
             <a:pPr algn="l">
+              <a:lnSpc>
+                <a:spcPct val="125000"/>
+              </a:lnSpc>
               <a:spcAft>
                 <a:spcPts val="0"/>
               </a:spcAft>
@@ -12849,7 +13400,7 @@
                 <a:solidFill>
                   <a:srgbClr val="19A7A0"/>
                 </a:solidFill>
-                <a:latin typeface="Aptos"/>
+                <a:latin typeface="Arial"/>
               </a:rPr>
               <a:t>ATOMIC ACTIONS</a:t>
             </a:r>
@@ -12920,12 +13471,15 @@
           <a:noFill/>
         </p:spPr>
         <p:txBody>
-          <a:bodyPr wrap="square" lIns="27432" rIns="27432" tIns="27432" bIns="27432" anchor="ctr">
-            <a:spAutoFit/>
+          <a:bodyPr wrap="square" lIns="10241" rIns="10241" tIns="10241" bIns="10241" anchor="ctr">
+            <a:normAutofit/>
           </a:bodyPr>
           <a:lstStyle/>
           <a:p>
             <a:pPr algn="ctr">
+              <a:lnSpc>
+                <a:spcPct val="125000"/>
+              </a:lnSpc>
               <a:spcAft>
                 <a:spcPts val="0"/>
               </a:spcAft>
@@ -12935,7 +13489,7 @@
                 <a:solidFill>
                   <a:srgbClr val="FFFFFF"/>
                 </a:solidFill>
-                <a:latin typeface="Aptos"/>
+                <a:latin typeface="Arial"/>
               </a:rPr>
               <a:t>7</a:t>
             </a:r>
@@ -12959,12 +13513,15 @@
           <a:noFill/>
         </p:spPr>
         <p:txBody>
-          <a:bodyPr wrap="square" lIns="27432" rIns="27432" tIns="27432" bIns="27432" anchor="t">
-            <a:spAutoFit/>
+          <a:bodyPr wrap="square" lIns="19019" rIns="19019" tIns="19019" bIns="19019" anchor="t">
+            <a:normAutofit/>
           </a:bodyPr>
           <a:lstStyle/>
           <a:p>
             <a:pPr algn="l">
+              <a:lnSpc>
+                <a:spcPct val="125000"/>
+              </a:lnSpc>
               <a:spcAft>
                 <a:spcPts val="0"/>
               </a:spcAft>
@@ -12974,7 +13531,7 @@
                 <a:solidFill>
                   <a:srgbClr val="14213D"/>
                 </a:solidFill>
-                <a:latin typeface="Aptos"/>
+                <a:latin typeface="Arial"/>
               </a:rPr>
               <a:t>pry the upper cover off the unit</a:t>
             </a:r>
@@ -13045,12 +13602,15 @@
           <a:noFill/>
         </p:spPr>
         <p:txBody>
-          <a:bodyPr wrap="square" lIns="27432" rIns="27432" tIns="27432" bIns="27432" anchor="ctr">
-            <a:spAutoFit/>
+          <a:bodyPr wrap="square" lIns="10241" rIns="10241" tIns="10241" bIns="10241" anchor="ctr">
+            <a:normAutofit/>
           </a:bodyPr>
           <a:lstStyle/>
           <a:p>
             <a:pPr algn="ctr">
+              <a:lnSpc>
+                <a:spcPct val="125000"/>
+              </a:lnSpc>
               <a:spcAft>
                 <a:spcPts val="0"/>
               </a:spcAft>
@@ -13060,7 +13620,7 @@
                 <a:solidFill>
                   <a:srgbClr val="FFFFFF"/>
                 </a:solidFill>
-                <a:latin typeface="Aptos"/>
+                <a:latin typeface="Arial"/>
               </a:rPr>
               <a:t>8</a:t>
             </a:r>
@@ -13084,12 +13644,15 @@
           <a:noFill/>
         </p:spPr>
         <p:txBody>
-          <a:bodyPr wrap="square" lIns="27432" rIns="27432" tIns="27432" bIns="27432" anchor="t">
-            <a:spAutoFit/>
+          <a:bodyPr wrap="square" lIns="19019" rIns="19019" tIns="19019" bIns="19019" anchor="t">
+            <a:normAutofit/>
           </a:bodyPr>
           <a:lstStyle/>
           <a:p>
             <a:pPr algn="l">
+              <a:lnSpc>
+                <a:spcPct val="125000"/>
+              </a:lnSpc>
               <a:spcAft>
                 <a:spcPts val="0"/>
               </a:spcAft>
@@ -13099,7 +13662,7 @@
                 <a:solidFill>
                   <a:srgbClr val="14213D"/>
                 </a:solidFill>
-                <a:latin typeface="Aptos"/>
+                <a:latin typeface="Arial"/>
               </a:rPr>
               <a:t>Separate hose from upper nozzle</a:t>
             </a:r>
@@ -13170,12 +13733,15 @@
           <a:noFill/>
         </p:spPr>
         <p:txBody>
-          <a:bodyPr wrap="square" lIns="27432" rIns="27432" tIns="27432" bIns="27432" anchor="ctr">
-            <a:spAutoFit/>
+          <a:bodyPr wrap="square" lIns="10241" rIns="10241" tIns="10241" bIns="10241" anchor="ctr">
+            <a:normAutofit/>
           </a:bodyPr>
           <a:lstStyle/>
           <a:p>
             <a:pPr algn="ctr">
+              <a:lnSpc>
+                <a:spcPct val="125000"/>
+              </a:lnSpc>
               <a:spcAft>
                 <a:spcPts val="0"/>
               </a:spcAft>
@@ -13185,7 +13751,7 @@
                 <a:solidFill>
                   <a:srgbClr val="FFFFFF"/>
                 </a:solidFill>
-                <a:latin typeface="Aptos"/>
+                <a:latin typeface="Arial"/>
               </a:rPr>
               <a:t>9</a:t>
             </a:r>
@@ -13209,12 +13775,15 @@
           <a:noFill/>
         </p:spPr>
         <p:txBody>
-          <a:bodyPr wrap="square" lIns="27432" rIns="27432" tIns="27432" bIns="27432" anchor="t">
-            <a:spAutoFit/>
+          <a:bodyPr wrap="square" lIns="19019" rIns="19019" tIns="19019" bIns="19019" anchor="t">
+            <a:normAutofit/>
           </a:bodyPr>
           <a:lstStyle/>
           <a:p>
             <a:pPr algn="l">
+              <a:lnSpc>
+                <a:spcPct val="125000"/>
+              </a:lnSpc>
               <a:spcAft>
                 <a:spcPts val="0"/>
               </a:spcAft>
@@ -13224,7 +13793,7 @@
                 <a:solidFill>
                   <a:srgbClr val="14213D"/>
                 </a:solidFill>
-                <a:latin typeface="Aptos"/>
+                <a:latin typeface="Arial"/>
               </a:rPr>
               <a:t>Remove 3 screws</a:t>
             </a:r>
@@ -13295,12 +13864,15 @@
           <a:noFill/>
         </p:spPr>
         <p:txBody>
-          <a:bodyPr wrap="square" lIns="27432" rIns="27432" tIns="27432" bIns="27432" anchor="ctr">
-            <a:spAutoFit/>
+          <a:bodyPr wrap="square" lIns="10241" rIns="10241" tIns="10241" bIns="10241" anchor="ctr">
+            <a:normAutofit/>
           </a:bodyPr>
           <a:lstStyle/>
           <a:p>
             <a:pPr algn="ctr">
+              <a:lnSpc>
+                <a:spcPct val="125000"/>
+              </a:lnSpc>
               <a:spcAft>
                 <a:spcPts val="0"/>
               </a:spcAft>
@@ -13310,7 +13882,7 @@
                 <a:solidFill>
                   <a:srgbClr val="FFFFFF"/>
                 </a:solidFill>
-                <a:latin typeface="Aptos"/>
+                <a:latin typeface="Arial"/>
               </a:rPr>
               <a:t>10</a:t>
             </a:r>
@@ -13334,12 +13906,15 @@
           <a:noFill/>
         </p:spPr>
         <p:txBody>
-          <a:bodyPr wrap="square" lIns="27432" rIns="27432" tIns="27432" bIns="27432" anchor="t">
-            <a:spAutoFit/>
+          <a:bodyPr wrap="square" lIns="19019" rIns="19019" tIns="19019" bIns="19019" anchor="t">
+            <a:normAutofit/>
           </a:bodyPr>
           <a:lstStyle/>
           <a:p>
             <a:pPr algn="l">
+              <a:lnSpc>
+                <a:spcPct val="125000"/>
+              </a:lnSpc>
               <a:spcAft>
                 <a:spcPts val="0"/>
               </a:spcAft>
@@ -13349,7 +13924,7 @@
                 <a:solidFill>
                   <a:srgbClr val="14213D"/>
                 </a:solidFill>
-                <a:latin typeface="Aptos"/>
+                <a:latin typeface="Arial"/>
               </a:rPr>
               <a:t>Remove heater</a:t>
             </a:r>
@@ -13420,12 +13995,15 @@
           <a:noFill/>
         </p:spPr>
         <p:txBody>
-          <a:bodyPr wrap="square" lIns="27432" rIns="27432" tIns="27432" bIns="27432" anchor="t">
-            <a:spAutoFit/>
+          <a:bodyPr wrap="square" lIns="8046" rIns="8046" tIns="8046" bIns="8046" anchor="t">
+            <a:normAutofit/>
           </a:bodyPr>
           <a:lstStyle/>
           <a:p>
             <a:pPr algn="l">
+              <a:lnSpc>
+                <a:spcPct val="125000"/>
+              </a:lnSpc>
               <a:spcAft>
                 <a:spcPts val="0"/>
               </a:spcAft>
@@ -13435,7 +14013,7 @@
                 <a:solidFill>
                   <a:srgbClr val="19A7A0"/>
                 </a:solidFill>
-                <a:latin typeface="Aptos"/>
+                <a:latin typeface="Arial"/>
               </a:rPr>
               <a:t>RESULT</a:t>
             </a:r>
@@ -13460,11 +14038,14 @@
         </p:spPr>
         <p:txBody>
           <a:bodyPr wrap="square" lIns="27432" rIns="27432" tIns="27432" bIns="27432" anchor="t">
-            <a:spAutoFit/>
+            <a:normAutofit/>
           </a:bodyPr>
           <a:lstStyle/>
           <a:p>
             <a:pPr algn="l">
+              <a:lnSpc>
+                <a:spcPct val="125000"/>
+              </a:lnSpc>
               <a:spcAft>
                 <a:spcPts val="0"/>
               </a:spcAft>
@@ -13474,9 +14055,9 @@
                 <a:solidFill>
                   <a:srgbClr val="14213D"/>
                 </a:solidFill>
-                <a:latin typeface="Aptos"/>
-              </a:rPr>
-              <a:t>• heater (Unknown)</a:t>
+                <a:latin typeface="Arial"/>
+              </a:rPr>
+              <a:t>• Heater (Unknown)</a:t>
             </a:r>
           </a:p>
         </p:txBody>
@@ -13498,12 +14079,15 @@
           <a:noFill/>
         </p:spPr>
         <p:txBody>
-          <a:bodyPr wrap="square" lIns="27432" rIns="27432" tIns="27432" bIns="27432" anchor="t">
-            <a:spAutoFit/>
+          <a:bodyPr wrap="square" lIns="7315" rIns="7315" tIns="7315" bIns="7315" anchor="t">
+            <a:normAutofit/>
           </a:bodyPr>
           <a:lstStyle/>
           <a:p>
             <a:pPr algn="l">
+              <a:lnSpc>
+                <a:spcPct val="125000"/>
+              </a:lnSpc>
               <a:spcAft>
                 <a:spcPts val="0"/>
               </a:spcAft>
@@ -13513,7 +14097,7 @@
                 <a:solidFill>
                   <a:srgbClr val="19A7A0"/>
                 </a:solidFill>
-                <a:latin typeface="Aptos"/>
+                <a:latin typeface="Arial"/>
               </a:rPr>
               <a:t>CONTINUES AS</a:t>
             </a:r>
@@ -13537,12 +14121,15 @@
           <a:noFill/>
         </p:spPr>
         <p:txBody>
-          <a:bodyPr wrap="square" lIns="27432" rIns="27432" tIns="27432" bIns="27432" anchor="t">
-            <a:spAutoFit/>
+          <a:bodyPr wrap="square" lIns="15361" rIns="15361" tIns="15361" bIns="15361" anchor="t">
+            <a:normAutofit/>
           </a:bodyPr>
           <a:lstStyle/>
           <a:p>
             <a:pPr algn="l">
+              <a:lnSpc>
+                <a:spcPct val="125000"/>
+              </a:lnSpc>
               <a:spcAft>
                 <a:spcPts val="0"/>
               </a:spcAft>
@@ -13552,7 +14139,7 @@
                 <a:solidFill>
                   <a:srgbClr val="14213D"/>
                 </a:solidFill>
-                <a:latin typeface="Aptos"/>
+                <a:latin typeface="Arial"/>
               </a:rPr>
               <a:t>• Component (Unknown)</a:t>
             </a:r>
@@ -13576,12 +14163,15 @@
           <a:noFill/>
         </p:spPr>
         <p:txBody>
-          <a:bodyPr wrap="square" lIns="27432" rIns="27432" tIns="27432" bIns="27432" anchor="t">
-            <a:spAutoFit/>
+          <a:bodyPr wrap="square" lIns="7315" rIns="7315" tIns="7315" bIns="7315" anchor="t">
+            <a:normAutofit/>
           </a:bodyPr>
           <a:lstStyle/>
           <a:p>
             <a:pPr algn="l">
+              <a:lnSpc>
+                <a:spcPct val="125000"/>
+              </a:lnSpc>
               <a:spcAft>
                 <a:spcPts val="0"/>
               </a:spcAft>
@@ -13591,7 +14181,7 @@
                 <a:solidFill>
                   <a:srgbClr val="19A7A0"/>
                 </a:solidFill>
-                <a:latin typeface="Aptos"/>
+                <a:latin typeface="Arial"/>
               </a:rPr>
               <a:t>TOOLS</a:t>
             </a:r>
@@ -13615,12 +14205,15 @@
           <a:noFill/>
         </p:spPr>
         <p:txBody>
-          <a:bodyPr wrap="square" lIns="27432" rIns="27432" tIns="27432" bIns="27432" anchor="t">
-            <a:spAutoFit/>
+          <a:bodyPr wrap="square" lIns="16459" rIns="16459" tIns="16459" bIns="16459" anchor="t">
+            <a:normAutofit/>
           </a:bodyPr>
           <a:lstStyle/>
           <a:p>
             <a:pPr algn="l">
+              <a:lnSpc>
+                <a:spcPct val="125000"/>
+              </a:lnSpc>
               <a:spcAft>
                 <a:spcPts val="0"/>
               </a:spcAft>
@@ -13630,7 +14223,7 @@
                 <a:solidFill>
                   <a:srgbClr val="14213D"/>
                 </a:solidFill>
-                <a:latin typeface="Aptos"/>
+                <a:latin typeface="Arial"/>
               </a:rPr>
               <a:t>No tools specified</a:t>
             </a:r>
@@ -13654,12 +14247,15 @@
           <a:noFill/>
         </p:spPr>
         <p:txBody>
-          <a:bodyPr wrap="square" lIns="27432" rIns="27432" tIns="27432" bIns="27432" anchor="t">
-            <a:spAutoFit/>
+          <a:bodyPr wrap="square" lIns="6583" rIns="6583" tIns="6583" bIns="6583" anchor="t">
+            <a:normAutofit/>
           </a:bodyPr>
           <a:lstStyle/>
           <a:p>
             <a:pPr algn="l">
+              <a:lnSpc>
+                <a:spcPct val="125000"/>
+              </a:lnSpc>
               <a:spcAft>
                 <a:spcPts val="0"/>
               </a:spcAft>
@@ -13669,7 +14265,7 @@
                 <a:solidFill>
                   <a:srgbClr val="64748B"/>
                 </a:solidFill>
-                <a:latin typeface="Aptos"/>
+                <a:latin typeface="Arial"/>
               </a:rPr>
               <a:t>Ninja Coffee Bar Single-Serve System CF111 30</a:t>
             </a:r>
@@ -13693,12 +14289,15 @@
           <a:noFill/>
         </p:spPr>
         <p:txBody>
-          <a:bodyPr wrap="square" lIns="27432" rIns="27432" tIns="27432" bIns="27432" anchor="t">
-            <a:spAutoFit/>
+          <a:bodyPr wrap="square" lIns="6583" rIns="6583" tIns="6583" bIns="6583" anchor="t">
+            <a:normAutofit/>
           </a:bodyPr>
           <a:lstStyle/>
           <a:p>
             <a:pPr algn="r">
+              <a:lnSpc>
+                <a:spcPct val="125000"/>
+              </a:lnSpc>
               <a:spcAft>
                 <a:spcPts val="0"/>
               </a:spcAft>
@@ -13708,7 +14307,7 @@
                 <a:solidFill>
                   <a:srgbClr val="64748B"/>
                 </a:solidFill>
-                <a:latin typeface="Aptos"/>
+                <a:latin typeface="Arial"/>
               </a:rPr>
               <a:t>9 / 11</a:t>
             </a:r>
